--- a/presentacion/CreditGuard_AI_v2.pptx
+++ b/presentacion/CreditGuard_AI_v2.pptx
@@ -4,6 +4,9 @@
   <p:sldMasterIdLst>
     <p:sldMasterId id="2147483648" r:id="rId1"/>
   </p:sldMasterIdLst>
+  <p:notesMasterIdLst>
+    <p:notesMasterId r:id="rId13"/>
+  </p:notesMasterIdLst>
   <p:sldIdLst>
     <p:sldId id="256" r:id="rId2"/>
     <p:sldId id="257" r:id="rId3"/>
@@ -17,10 +20,7 @@
     <p:sldId id="265" r:id="rId11"/>
     <p:sldId id="266" r:id="rId12"/>
   </p:sldIdLst>
-  <p:notesMasterIdLst>
-    <p:notesMasterId r:id="rId13"/>
-  </p:notesMasterIdLst>
-  <p:sldSz cx="9144000" cy="5143500"/>
+  <p:sldSz cx="9144000" cy="5143500" type="screen16x9"/>
   <p:notesSz cx="5143500" cy="9144000"/>
   <p:defaultTextStyle>
     <a:lvl1pPr marL="0" algn="l" defTabSz="914400" rtl="0" eaLnBrk="1" latinLnBrk="0" hangingPunct="1">
@@ -117,41 +117,41 @@
   <p:extLst>
     <p:ext uri="{521415D9-36F7-43E2-AB2F-B90AF26B5E84}">
       <p14:sectionLst xmlns:p14="http://schemas.microsoft.com/office/powerpoint/2010/main">
-        <p14:section name="Apertura" id="{78015a15-1293-743c-6a23-b10da32e1ad4}">
+        <p14:section name="Apertura" id="{78015A15-1293-743C-6A23-B10DA32E1AD4}">
           <p14:sldIdLst>
             <p14:sldId id="256"/>
           </p14:sldIdLst>
         </p14:section>
-        <p14:section name="Problema" id="{0eacb962-e2f4-5a6b-27df-b72917ed704e}">
+        <p14:section name="Problema" id="{0EACB962-E2F4-5A6B-27DF-B72917ED704E}">
           <p14:sldIdLst>
             <p14:sldId id="257"/>
           </p14:sldIdLst>
         </p14:section>
-        <p14:section name="Datos" id="{761f233b-cc40-595c-31be-ffc837c03e3d}">
+        <p14:section name="Datos" id="{761F233B-CC40-595C-31BE-FFC837C03E3D}">
           <p14:sldIdLst>
             <p14:sldId id="258"/>
           </p14:sldIdLst>
         </p14:section>
-        <p14:section name="Arquitectura" id="{958df7d3-cbf5-cf80-500a-09979a3eb389}">
+        <p14:section name="Arquitectura" id="{958DF7D3-CBF5-CF80-500A-09979A3EB389}">
           <p14:sldIdLst>
             <p14:sldId id="259"/>
             <p14:sldId id="260"/>
           </p14:sldIdLst>
         </p14:section>
-        <p14:section name="Resultados" id="{24eddf03-ac02-f70c-c0c5-cc4841a44944}">
+        <p14:section name="Resultados" id="{24EDDF03-AC02-F70C-C0C5-CC4841A44944}">
           <p14:sldIdLst>
             <p14:sldId id="261"/>
             <p14:sldId id="262"/>
             <p14:sldId id="263"/>
           </p14:sldIdLst>
         </p14:section>
-        <p14:section name="Pruebas y límites" id="{cecece0b-7d36-fb32-3fd3-6fe0636966bc}">
+        <p14:section name="Pruebas y límites" id="{CECECE0B-7D36-FB32-3FD3-6FE0636966BC}">
           <p14:sldIdLst>
             <p14:sldId id="264"/>
             <p14:sldId id="265"/>
           </p14:sldIdLst>
         </p14:section>
-        <p14:section name="Reflexión" id="{e4572c4d-aea7-7021-508e-1aefd09bc1f5}">
+        <p14:section name="Reflexión" id="{E4572C4D-AEA7-7021-508E-1AEFD09BC1F5}">
           <p14:sldIdLst>
             <p14:sldId id="266"/>
           </p14:sldIdLst>
@@ -187,234 +187,10 @@
           <a:chExt cx="0" cy="0"/>
         </a:xfrm>
       </p:grpSpPr>
-      <p:sp>
-        <p:nvSpPr>
-          <p:cNvPr id="2" name="Header Placeholder 1"/>
-          <p:cNvSpPr>
-            <a:spLocks noGrp="1"/>
-          </p:cNvSpPr>
-          <p:nvPr>
-            <p:ph type="hdr" sz="quarter"/>
-          </p:nvPr>
-        </p:nvSpPr>
-        <p:spPr>
-          <a:xfrm>
-            <a:off x="0" y="0"/>
-            <a:ext cx="2971800" cy="458788"/>
-          </a:xfrm>
-          <a:prstGeom prst="rect">
-            <a:avLst/>
-          </a:prstGeom>
-        </p:spPr>
-        <p:txBody>
-          <a:bodyPr vert="horz" lIns="91440" tIns="45720" rIns="91440" bIns="45720" rtlCol="0"/>
-          <a:lstStyle>
-            <a:lvl1pPr algn="l">
-              <a:defRPr sz="1200"/>
-            </a:lvl1pPr>
-          </a:lstStyle>
-          <a:p>
-            <a:endParaRPr lang="en-US"/>
-          </a:p>
-        </p:txBody>
-      </p:sp>
-      <p:sp>
-        <p:nvSpPr>
-          <p:cNvPr id="3" name="Date Placeholder 2"/>
-          <p:cNvSpPr>
-            <a:spLocks noGrp="1"/>
-          </p:cNvSpPr>
-          <p:nvPr>
-            <p:ph type="dt" idx="1"/>
-          </p:nvPr>
-        </p:nvSpPr>
-        <p:spPr>
-          <a:xfrm>
-            <a:off x="3884613" y="0"/>
-            <a:ext cx="2971800" cy="458788"/>
-          </a:xfrm>
-          <a:prstGeom prst="rect">
-            <a:avLst/>
-          </a:prstGeom>
-        </p:spPr>
-        <p:txBody>
-          <a:bodyPr vert="horz" lIns="91440" tIns="45720" rIns="91440" bIns="45720" rtlCol="0"/>
-          <a:lstStyle>
-            <a:lvl1pPr algn="r">
-              <a:defRPr sz="1200"/>
-            </a:lvl1pPr>
-          </a:lstStyle>
-          <a:p>
-            <a:fld id="{5282F153-3F37-0F45-9E97-73ACFA13230C}" type="datetimeFigureOut">
-              <a:rPr lang="en-US"/>
-              <a:t>7/23/19</a:t>
-            </a:fld>
-            <a:endParaRPr lang="en-US"/>
-          </a:p>
-        </p:txBody>
-      </p:sp>
-      <p:sp>
-        <p:nvSpPr>
-          <p:cNvPr id="4" name="Slide Image Placeholder 3"/>
-          <p:cNvSpPr>
-            <a:spLocks noGrp="1" noRot="1" noChangeAspect="1"/>
-          </p:cNvSpPr>
-          <p:nvPr>
-            <p:ph type="sldImg" idx="2"/>
-          </p:nvPr>
-        </p:nvSpPr>
-        <p:spPr>
-          <a:xfrm>
-            <a:off x="685800" y="1143000"/>
-            <a:ext cx="5486400" cy="3086100"/>
-          </a:xfrm>
-          <a:prstGeom prst="rect">
-            <a:avLst/>
-          </a:prstGeom>
-          <a:noFill/>
-          <a:ln w="12700">
-            <a:solidFill>
-              <a:prstClr val="black"/>
-            </a:solidFill>
-          </a:ln>
-        </p:spPr>
-        <p:txBody>
-          <a:bodyPr vert="horz" lIns="91440" tIns="45720" rIns="91440" bIns="45720" rtlCol="0" anchor="ctr"/>
-          <a:lstStyle/>
-          <a:p>
-            <a:endParaRPr lang="en-US"/>
-          </a:p>
-        </p:txBody>
-      </p:sp>
-      <p:sp>
-        <p:nvSpPr>
-          <p:cNvPr id="5" name="Notes Placeholder 4"/>
-          <p:cNvSpPr>
-            <a:spLocks noGrp="1"/>
-          </p:cNvSpPr>
-          <p:nvPr>
-            <p:ph type="body" sz="quarter" idx="3"/>
-          </p:nvPr>
-        </p:nvSpPr>
-        <p:spPr>
-          <a:xfrm>
-            <a:off x="685800" y="4400550"/>
-            <a:ext cx="5486400" cy="3600450"/>
-          </a:xfrm>
-          <a:prstGeom prst="rect">
-            <a:avLst/>
-          </a:prstGeom>
-        </p:spPr>
-        <p:txBody>
-          <a:bodyPr vert="horz" lIns="91440" tIns="45720" rIns="91440" bIns="45720" rtlCol="0"/>
-          <a:lstStyle/>
-          <a:p>
-            <a:pPr lvl="0"/>
-            <a:r>
-              <a:rPr lang="en-US"/>
-              <a:t>Click to edit Master text styles</a:t>
-            </a:r>
-          </a:p>
-          <a:p>
-            <a:pPr lvl="1"/>
-            <a:r>
-              <a:rPr lang="en-US"/>
-              <a:t>Second level</a:t>
-            </a:r>
-          </a:p>
-          <a:p>
-            <a:pPr lvl="2"/>
-            <a:r>
-              <a:rPr lang="en-US"/>
-              <a:t>Third level</a:t>
-            </a:r>
-          </a:p>
-          <a:p>
-            <a:pPr lvl="3"/>
-            <a:r>
-              <a:rPr lang="en-US"/>
-              <a:t>Fourth level</a:t>
-            </a:r>
-          </a:p>
-          <a:p>
-            <a:pPr lvl="4"/>
-            <a:r>
-              <a:rPr lang="en-US"/>
-              <a:t>Fifth level</a:t>
-            </a:r>
-          </a:p>
-        </p:txBody>
-      </p:sp>
-      <p:sp>
-        <p:nvSpPr>
-          <p:cNvPr id="6" name="Footer Placeholder 5"/>
-          <p:cNvSpPr>
-            <a:spLocks noGrp="1"/>
-          </p:cNvSpPr>
-          <p:nvPr>
-            <p:ph type="ftr" sz="quarter" idx="4"/>
-          </p:nvPr>
-        </p:nvSpPr>
-        <p:spPr>
-          <a:xfrm>
-            <a:off x="0" y="8685213"/>
-            <a:ext cx="2971800" cy="458787"/>
-          </a:xfrm>
-          <a:prstGeom prst="rect">
-            <a:avLst/>
-          </a:prstGeom>
-        </p:spPr>
-        <p:txBody>
-          <a:bodyPr vert="horz" lIns="91440" tIns="45720" rIns="91440" bIns="45720" rtlCol="0" anchor="b"/>
-          <a:lstStyle>
-            <a:lvl1pPr algn="l">
-              <a:defRPr sz="1200"/>
-            </a:lvl1pPr>
-          </a:lstStyle>
-          <a:p>
-            <a:endParaRPr lang="en-US"/>
-          </a:p>
-        </p:txBody>
-      </p:sp>
-      <p:sp>
-        <p:nvSpPr>
-          <p:cNvPr id="7" name="Slide Number Placeholder 6"/>
-          <p:cNvSpPr>
-            <a:spLocks noGrp="1"/>
-          </p:cNvSpPr>
-          <p:nvPr>
-            <p:ph type="sldNum" sz="quarter" idx="5"/>
-          </p:nvPr>
-        </p:nvSpPr>
-        <p:spPr>
-          <a:xfrm>
-            <a:off x="3884613" y="8685213"/>
-            <a:ext cx="2971800" cy="458787"/>
-          </a:xfrm>
-          <a:prstGeom prst="rect">
-            <a:avLst/>
-          </a:prstGeom>
-        </p:spPr>
-        <p:txBody>
-          <a:bodyPr vert="horz" lIns="91440" tIns="45720" rIns="91440" bIns="45720" rtlCol="0" anchor="b"/>
-          <a:lstStyle>
-            <a:lvl1pPr algn="r">
-              <a:defRPr sz="1200"/>
-            </a:lvl1pPr>
-          </a:lstStyle>
-          <a:p>
-            <a:fld id="{CE5E9CC1-C706-0F49-92D6-E571CC5EEA8F}" type="slidenum">
-              <a:rPr lang="en-US"/>
-              <a:t>‹#›</a:t>
-            </a:fld>
-            <a:endParaRPr lang="en-US"/>
-          </a:p>
-        </p:txBody>
-      </p:sp>
     </p:spTree>
     <p:extLst>
       <p:ext uri="{BB962C8B-B14F-4D97-AF65-F5344CB8AC3E}">
-        <p14:creationId xmlns:p14="http://schemas.microsoft.com/office/powerpoint/2010/main" val="1024086991"/>
+        <p14:creationId xmlns:p14="http://schemas.microsoft.com/office/powerpoint/2010/main" val="2778135943"/>
       </p:ext>
     </p:extLst>
   </p:cSld>
@@ -558,10 +334,6 @@
           <a:bodyPr/>
           <a:lstStyle/>
           <a:p>
-            <a:r>
-              <a:rPr lang="en-US" dirty="0"/>
-              <a:t/>
-            </a:r>
             <a:endParaRPr lang="en-US" dirty="0"/>
           </a:p>
         </p:txBody>
@@ -646,10 +418,6 @@
           <a:bodyPr/>
           <a:lstStyle/>
           <a:p>
-            <a:r>
-              <a:rPr lang="en-US" dirty="0"/>
-              <a:t/>
-            </a:r>
             <a:endParaRPr lang="en-US" dirty="0"/>
           </a:p>
         </p:txBody>
@@ -734,10 +502,6 @@
           <a:bodyPr/>
           <a:lstStyle/>
           <a:p>
-            <a:r>
-              <a:rPr lang="en-US" dirty="0"/>
-              <a:t/>
-            </a:r>
             <a:endParaRPr lang="en-US" dirty="0"/>
           </a:p>
         </p:txBody>
@@ -822,10 +586,6 @@
           <a:bodyPr/>
           <a:lstStyle/>
           <a:p>
-            <a:r>
-              <a:rPr lang="en-US" dirty="0"/>
-              <a:t/>
-            </a:r>
             <a:endParaRPr lang="en-US" dirty="0"/>
           </a:p>
         </p:txBody>
@@ -910,10 +670,6 @@
           <a:bodyPr/>
           <a:lstStyle/>
           <a:p>
-            <a:r>
-              <a:rPr lang="en-US" dirty="0"/>
-              <a:t/>
-            </a:r>
             <a:endParaRPr lang="en-US" dirty="0"/>
           </a:p>
         </p:txBody>
@@ -998,10 +754,6 @@
           <a:bodyPr/>
           <a:lstStyle/>
           <a:p>
-            <a:r>
-              <a:rPr lang="en-US" dirty="0"/>
-              <a:t/>
-            </a:r>
             <a:endParaRPr lang="en-US" dirty="0"/>
           </a:p>
         </p:txBody>
@@ -1086,10 +838,6 @@
           <a:bodyPr/>
           <a:lstStyle/>
           <a:p>
-            <a:r>
-              <a:rPr lang="en-US" dirty="0"/>
-              <a:t/>
-            </a:r>
             <a:endParaRPr lang="en-US" dirty="0"/>
           </a:p>
         </p:txBody>
@@ -1174,10 +922,6 @@
           <a:bodyPr/>
           <a:lstStyle/>
           <a:p>
-            <a:r>
-              <a:rPr lang="en-US" dirty="0"/>
-              <a:t/>
-            </a:r>
             <a:endParaRPr lang="en-US" dirty="0"/>
           </a:p>
         </p:txBody>
@@ -1262,10 +1006,6 @@
           <a:bodyPr/>
           <a:lstStyle/>
           <a:p>
-            <a:r>
-              <a:rPr lang="en-US" dirty="0"/>
-              <a:t/>
-            </a:r>
             <a:endParaRPr lang="en-US" dirty="0"/>
           </a:p>
         </p:txBody>
@@ -1350,10 +1090,6 @@
           <a:bodyPr/>
           <a:lstStyle/>
           <a:p>
-            <a:r>
-              <a:rPr lang="en-US" dirty="0"/>
-              <a:t/>
-            </a:r>
             <a:endParaRPr lang="en-US" dirty="0"/>
           </a:p>
         </p:txBody>
@@ -1438,10 +1174,6 @@
           <a:bodyPr/>
           <a:lstStyle/>
           <a:p>
-            <a:r>
-              <a:rPr lang="en-US" dirty="0"/>
-              <a:t/>
-            </a:r>
             <a:endParaRPr lang="en-US" dirty="0"/>
           </a:p>
         </p:txBody>
@@ -1520,6 +1252,7 @@
         <a:solidFill>
           <a:schemeClr val="bg2"/>
         </a:solidFill>
+        <a:effectLst/>
       </p:bgPr>
     </p:bg>
     <p:spTree>
@@ -1539,9 +1272,11 @@
       <p:sp>
         <p:nvSpPr>
           <p:cNvPr id="2" name="Text 0"/>
-          <p:cNvSpPr/>
+          <p:cNvSpPr>
+            <a:spLocks noGrp="1"/>
+          </p:cNvSpPr>
           <p:nvPr>
-            <p:ph idx="100" type="body" hasCustomPrompt="1"/>
+            <p:ph type="body" idx="100" hasCustomPrompt="1"/>
           </p:nvPr>
         </p:nvSpPr>
         <p:spPr>
@@ -1558,9 +1293,9 @@
         <p:txBody>
           <a:bodyPr wrap="square" rtlCol="0"/>
           <a:lstStyle>
-            <a:lvl1pPr indent="0" marL="0">
-              <a:buNone/>
-              <a:defRPr lang="en-US" sz="1100" b="1" spc="200" kern="0" dirty="0">
+            <a:lvl1pPr marL="0" indent="0">
+              <a:buNone/>
+              <a:defRPr lang="en-US" sz="1100" b="1" kern="0" spc="200" dirty="0">
                 <a:solidFill>
                   <a:schemeClr val="accent1"/>
                 </a:solidFill>
@@ -1571,7 +1306,7 @@
             </a:lvl1pPr>
           </a:lstStyle>
           <a:p>
-            <a:pPr indent="0" marL="0">
+            <a:pPr marL="0" indent="0">
               <a:buNone/>
             </a:pPr>
             <a:endParaRPr lang="en-US" sz="1100" dirty="0"/>
@@ -1581,9 +1316,11 @@
       <p:sp>
         <p:nvSpPr>
           <p:cNvPr id="3" name="Text 0"/>
-          <p:cNvSpPr/>
+          <p:cNvSpPr>
+            <a:spLocks noGrp="1"/>
+          </p:cNvSpPr>
           <p:nvPr>
-            <p:ph idx="101" type="title" hasCustomPrompt="1"/>
+            <p:ph type="title" idx="101" hasCustomPrompt="1"/>
           </p:nvPr>
         </p:nvSpPr>
         <p:spPr>
@@ -1600,7 +1337,7 @@
         <p:txBody>
           <a:bodyPr wrap="square" rtlCol="0"/>
           <a:lstStyle>
-            <a:lvl1pPr algn="l" indent="0" marL="0">
+            <a:lvl1pPr marL="0" indent="0" algn="l">
               <a:buNone/>
               <a:defRPr lang="en-US" sz="2600" b="1" dirty="0">
                 <a:solidFill>
@@ -1613,7 +1350,7 @@
             </a:lvl1pPr>
           </a:lstStyle>
           <a:p>
-            <a:pPr algn="l" indent="0" marL="0">
+            <a:pPr marL="0" indent="0" algn="l">
               <a:buNone/>
             </a:pPr>
             <a:endParaRPr lang="en-US" sz="2600" dirty="0"/>
@@ -1641,7 +1378,7 @@
           <a:bodyPr wrap="square" lIns="0" tIns="0" rIns="0" bIns="0" rtlCol="0" anchor="ctr"/>
           <a:lstStyle/>
           <a:p>
-            <a:pPr indent="0" marL="0">
+            <a:pPr marL="0" indent="0">
               <a:buNone/>
             </a:pPr>
             <a:r>
@@ -1679,7 +1416,7 @@
           </a:prstGeom>
           <a:extLst>
             <a:ext uri="{C572A759-6A51-4108-AA02-DFA0A04FC94B}">
-              <ma14:wrappingTextBoxFlag xmlns:ma14="http://schemas.microsoft.com/office/mac/drawingml/2011/main" val="0"/>
+              <ma14:wrappingTextBoxFlag xmlns:ma14="http://schemas.microsoft.com/office/mac/drawingml/2011/main" xmlns="" val="0"/>
             </a:ext>
           </a:extLst>
         </p:spPr>
@@ -1700,8 +1437,8 @@
           <a:p>
             <a:pPr algn="r"/>
             <a:fld id="{F7021451-1387-4CA6-816F-3879F97B5CBC}" type="slidenum">
-              <a:rPr b="0" lang="en-US"/>
-              <a:t>1002</a:t>
+              <a:rPr lang="en-US" b="0"/>
+              <a:t>‹Nº›</a:t>
             </a:fld>
             <a:endParaRPr lang="en-US"/>
           </a:p>
@@ -1718,6 +1455,11 @@
 <file path=ppt/slideMasters/slideMaster1.xml><?xml version="1.0" encoding="utf-8"?>
 <p:sldMaster xmlns:a="http://schemas.openxmlformats.org/drawingml/2006/main" xmlns:r="http://schemas.openxmlformats.org/officeDocument/2006/relationships" xmlns:p="http://schemas.openxmlformats.org/presentationml/2006/main">
   <p:cSld>
+    <p:bg>
+      <p:bgRef idx="1001">
+        <a:schemeClr val="bg1"/>
+      </p:bgRef>
+    </p:bg>
     <p:spTree>
       <p:nvGrpSpPr>
         <p:cNvPr id="1" name=""/>
@@ -1752,7 +1494,7 @@
           </a:prstGeom>
           <a:extLst>
             <a:ext uri="{C572A759-6A51-4108-AA02-DFA0A04FC94B}">
-              <ma14:wrappingTextBoxFlag xmlns:ma14="http://schemas.microsoft.com/office/mac/drawingml/2011/main" val="0"/>
+              <ma14:wrappingTextBoxFlag xmlns:ma14="http://schemas.microsoft.com/office/mac/drawingml/2011/main" xmlns="" val="0"/>
             </a:ext>
           </a:extLst>
         </p:spPr>
@@ -1773,8 +1515,8 @@
           <a:p>
             <a:pPr algn="r"/>
             <a:fld id="{F7021451-1387-4CA6-816F-3879F97B5CBC}" type="slidenum">
-              <a:rPr b="0" lang="en-US"/>
-              <a:t>null</a:t>
+              <a:rPr lang="en-US" b="0"/>
+              <a:t>‹Nº›</a:t>
             </a:fld>
             <a:endParaRPr lang="en-US"/>
           </a:p>
@@ -2061,9 +1803,11 @@
       <p:sp>
         <p:nvSpPr>
           <p:cNvPr id="2" name="Text 0"/>
-          <p:cNvSpPr/>
+          <p:cNvSpPr>
+            <a:spLocks noGrp="1"/>
+          </p:cNvSpPr>
           <p:nvPr>
-            <p:ph idx="100" type="body" hasCustomPrompt="1"/>
+            <p:ph type="body" idx="100" hasCustomPrompt="1"/>
           </p:nvPr>
         </p:nvSpPr>
         <p:spPr>
@@ -2081,11 +1825,11 @@
           <a:bodyPr wrap="square" lIns="0" tIns="0" rIns="0" bIns="0" rtlCol="0" anchor="ctr"/>
           <a:lstStyle/>
           <a:p>
-            <a:pPr indent="0" marL="0">
-              <a:buNone/>
-            </a:pPr>
-            <a:r>
-              <a:rPr lang="en-US" sz="1100" b="1" spc="200" kern="0" dirty="0">
+            <a:pPr marL="0" indent="0">
+              <a:buNone/>
+            </a:pPr>
+            <a:r>
+              <a:rPr lang="en-US" sz="1100" b="1" kern="0" spc="200" dirty="0">
                 <a:solidFill>
                   <a:schemeClr val="accent1"/>
                 </a:solidFill>
@@ -2120,7 +1864,7 @@
           <a:bodyPr wrap="square" lIns="0" tIns="0" rIns="0" bIns="0" rtlCol="0" anchor="t"/>
           <a:lstStyle/>
           <a:p>
-            <a:pPr indent="0" marL="0">
+            <a:pPr marL="0" indent="0">
               <a:buNone/>
             </a:pPr>
             <a:r>
@@ -2159,7 +1903,7 @@
           <a:bodyPr wrap="square" lIns="0" tIns="0" rIns="0" bIns="0" rtlCol="0" anchor="b"/>
           <a:lstStyle/>
           <a:p>
-            <a:pPr indent="0" marL="0">
+            <a:pPr marL="0" indent="0">
               <a:buNone/>
             </a:pPr>
             <a:r>
@@ -2198,7 +1942,7 @@
           <a:bodyPr wrap="square" lIns="0" tIns="0" rIns="0" bIns="0" rtlCol="0" anchor="b"/>
           <a:lstStyle/>
           <a:p>
-            <a:pPr indent="0" marL="0">
+            <a:pPr marL="0" indent="0">
               <a:buNone/>
             </a:pPr>
             <a:r>
@@ -2237,7 +1981,7 @@
           <a:bodyPr wrap="square" lIns="0" tIns="0" rIns="0" bIns="0" rtlCol="0" anchor="b"/>
           <a:lstStyle/>
           <a:p>
-            <a:pPr indent="0" marL="0">
+            <a:pPr marL="0" indent="0">
               <a:buNone/>
             </a:pPr>
             <a:r>
@@ -2276,7 +2020,7 @@
           <a:bodyPr wrap="square" lIns="0" tIns="0" rIns="0" bIns="0" rtlCol="0" anchor="ctr"/>
           <a:lstStyle/>
           <a:p>
-            <a:pPr indent="0" marL="0">
+            <a:pPr marL="0" indent="0">
               <a:buNone/>
             </a:pPr>
             <a:r>
@@ -2315,7 +2059,7 @@
           <a:bodyPr wrap="square" lIns="0" tIns="0" rIns="0" bIns="0" rtlCol="0" anchor="ctr"/>
           <a:lstStyle/>
           <a:p>
-            <a:pPr indent="0" marL="0">
+            <a:pPr marL="0" indent="0">
               <a:buNone/>
             </a:pPr>
             <a:r>
@@ -2354,7 +2098,7 @@
           <a:bodyPr wrap="square" lIns="0" tIns="0" rIns="0" bIns="0" rtlCol="0" anchor="t"/>
           <a:lstStyle/>
           <a:p>
-            <a:pPr indent="0" marL="0">
+            <a:pPr marL="0" indent="0">
               <a:buNone/>
             </a:pPr>
             <a:r>
@@ -2393,7 +2137,7 @@
           <a:bodyPr wrap="square" lIns="0" tIns="0" rIns="0" bIns="0" rtlCol="0" anchor="ctr"/>
           <a:lstStyle/>
           <a:p>
-            <a:pPr indent="0" marL="0">
+            <a:pPr marL="0" indent="0">
               <a:buNone/>
             </a:pPr>
             <a:r>
@@ -2408,36 +2152,6 @@
               <a:t>Roberto Mario Brochero López · Sofía Montero Jara · Santiago Nicolás Viuche Pinilla</a:t>
             </a:r>
             <a:endParaRPr lang="en-US" sz="1200" dirty="0"/>
-          </a:p>
-        </p:txBody>
-      </p:sp>
-      <p:sp>
-        <p:nvSpPr>
-          <p:cNvPr id="11" name="Text 0"/>
-          <p:cNvSpPr/>
-          <p:nvPr>
-            <p:ph idx="101" type="title" hasCustomPrompt="1"/>
-          </p:nvPr>
-        </p:nvSpPr>
-        <p:spPr>
-          <a:xfrm>
-            <a:off x="457200" y="548640"/>
-            <a:ext cx="8229600" cy="566928"/>
-          </a:xfrm>
-          <a:prstGeom prst="rect">
-            <a:avLst/>
-          </a:prstGeom>
-          <a:noFill/>
-          <a:ln/>
-        </p:spPr>
-        <p:txBody>
-          <a:bodyPr wrap="square" lIns="0" tIns="0" rIns="0" bIns="0" rtlCol="0" anchor="ctr"/>
-          <a:lstStyle/>
-          <a:p>
-            <a:pPr algn="l" indent="0" marL="0">
-              <a:buNone/>
-            </a:pPr>
-            <a:endParaRPr lang="en-US" sz="2600" dirty="0"/>
           </a:p>
         </p:txBody>
       </p:sp>
@@ -2461,7 +2175,7 @@
           </a:prstGeom>
           <a:extLst>
             <a:ext uri="{C572A759-6A51-4108-AA02-DFA0A04FC94B}">
-              <ma14:wrappingTextBoxFlag xmlns:ma14="http://schemas.microsoft.com/office/mac/drawingml/2011/main" val="0"/>
+              <ma14:wrappingTextBoxFlag xmlns:ma14="http://schemas.microsoft.com/office/mac/drawingml/2011/main" xmlns="" val="0"/>
             </a:ext>
           </a:extLst>
         </p:spPr>
@@ -2482,7 +2196,7 @@
           <a:p>
             <a:pPr algn="r"/>
             <a:fld id="{F7021451-1387-4CA6-816F-3879F97B5CBC}" type="slidenum">
-              <a:rPr b="0" lang="en-US"/>
+              <a:rPr lang="en-US" b="0"/>
               <a:t>1</a:t>
             </a:fld>
             <a:endParaRPr lang="en-US"/>
@@ -2517,9 +2231,11 @@
       <p:sp>
         <p:nvSpPr>
           <p:cNvPr id="2" name="Text 0"/>
-          <p:cNvSpPr/>
+          <p:cNvSpPr>
+            <a:spLocks noGrp="1"/>
+          </p:cNvSpPr>
           <p:nvPr>
-            <p:ph idx="100" type="body" hasCustomPrompt="1"/>
+            <p:ph type="body" idx="100" hasCustomPrompt="1"/>
           </p:nvPr>
         </p:nvSpPr>
         <p:spPr>
@@ -2537,11 +2253,11 @@
           <a:bodyPr wrap="square" lIns="0" tIns="0" rIns="0" bIns="0" rtlCol="0" anchor="ctr"/>
           <a:lstStyle/>
           <a:p>
-            <a:pPr indent="0" marL="0">
-              <a:buNone/>
-            </a:pPr>
-            <a:r>
-              <a:rPr lang="en-US" sz="1100" b="1" spc="200" kern="0" dirty="0">
+            <a:pPr marL="0" indent="0">
+              <a:buNone/>
+            </a:pPr>
+            <a:r>
+              <a:rPr lang="en-US" sz="1100" b="1" kern="0" spc="200" dirty="0">
                 <a:solidFill>
                   <a:schemeClr val="accent1"/>
                 </a:solidFill>
@@ -2558,9 +2274,11 @@
       <p:sp>
         <p:nvSpPr>
           <p:cNvPr id="3" name="Text 0"/>
-          <p:cNvSpPr/>
+          <p:cNvSpPr>
+            <a:spLocks noGrp="1"/>
+          </p:cNvSpPr>
           <p:nvPr>
-            <p:ph idx="101" type="title" hasCustomPrompt="1"/>
+            <p:ph type="title" idx="101" hasCustomPrompt="1"/>
           </p:nvPr>
         </p:nvSpPr>
         <p:spPr>
@@ -2578,7 +2296,7 @@
           <a:bodyPr wrap="square" lIns="0" tIns="0" rIns="0" bIns="0" rtlCol="0" anchor="ctr"/>
           <a:lstStyle/>
           <a:p>
-            <a:pPr algn="l" indent="0" marL="0">
+            <a:pPr marL="0" indent="0" algn="l">
               <a:buNone/>
             </a:pPr>
             <a:r>
@@ -2644,7 +2362,7 @@
           <a:bodyPr wrap="square" lIns="0" tIns="0" rIns="0" bIns="0" rtlCol="0" anchor="ctr"/>
           <a:lstStyle/>
           <a:p>
-            <a:pPr indent="0" marL="0">
+            <a:pPr marL="0" indent="0">
               <a:buNone/>
             </a:pPr>
             <a:r>
@@ -2683,7 +2401,7 @@
           <a:bodyPr wrap="square" lIns="0" tIns="0" rIns="0" bIns="0" rtlCol="0" anchor="t"/>
           <a:lstStyle/>
           <a:p>
-            <a:pPr indent="0" marL="0">
+            <a:pPr marL="0" indent="0">
               <a:buNone/>
             </a:pPr>
             <a:r>
@@ -2749,7 +2467,7 @@
           <a:bodyPr wrap="square" lIns="0" tIns="0" rIns="0" bIns="0" rtlCol="0" anchor="ctr"/>
           <a:lstStyle/>
           <a:p>
-            <a:pPr indent="0" marL="0">
+            <a:pPr marL="0" indent="0">
               <a:buNone/>
             </a:pPr>
             <a:r>
@@ -2788,7 +2506,7 @@
           <a:bodyPr wrap="square" lIns="0" tIns="0" rIns="0" bIns="0" rtlCol="0" anchor="t"/>
           <a:lstStyle/>
           <a:p>
-            <a:pPr indent="0" marL="0">
+            <a:pPr marL="0" indent="0">
               <a:buNone/>
             </a:pPr>
             <a:r>
@@ -2854,7 +2572,7 @@
           <a:bodyPr wrap="square" lIns="0" tIns="0" rIns="0" bIns="0" rtlCol="0" anchor="ctr"/>
           <a:lstStyle/>
           <a:p>
-            <a:pPr indent="0" marL="0">
+            <a:pPr marL="0" indent="0">
               <a:buNone/>
             </a:pPr>
             <a:r>
@@ -2893,7 +2611,7 @@
           <a:bodyPr wrap="square" lIns="0" tIns="0" rIns="0" bIns="0" rtlCol="0" anchor="t"/>
           <a:lstStyle/>
           <a:p>
-            <a:pPr indent="0" marL="0">
+            <a:pPr marL="0" indent="0">
               <a:buNone/>
             </a:pPr>
             <a:r>
@@ -2959,7 +2677,7 @@
           <a:bodyPr wrap="square" lIns="0" tIns="0" rIns="0" bIns="0" rtlCol="0" anchor="ctr"/>
           <a:lstStyle/>
           <a:p>
-            <a:pPr indent="0" marL="0">
+            <a:pPr marL="0" indent="0">
               <a:buNone/>
             </a:pPr>
             <a:r>
@@ -2998,7 +2716,7 @@
           <a:bodyPr wrap="square" lIns="0" tIns="0" rIns="0" bIns="0" rtlCol="0" anchor="t"/>
           <a:lstStyle/>
           <a:p>
-            <a:pPr indent="0" marL="0">
+            <a:pPr marL="0" indent="0">
               <a:buNone/>
             </a:pPr>
             <a:r>
@@ -3064,7 +2782,7 @@
           <a:bodyPr wrap="square" lIns="0" tIns="0" rIns="0" bIns="0" rtlCol="0" anchor="ctr"/>
           <a:lstStyle/>
           <a:p>
-            <a:pPr indent="0" marL="0">
+            <a:pPr marL="0" indent="0">
               <a:buNone/>
             </a:pPr>
             <a:r>
@@ -3103,7 +2821,7 @@
           <a:bodyPr wrap="square" lIns="0" tIns="0" rIns="0" bIns="0" rtlCol="0" anchor="t"/>
           <a:lstStyle/>
           <a:p>
-            <a:pPr indent="0" marL="0">
+            <a:pPr marL="0" indent="0">
               <a:buNone/>
             </a:pPr>
             <a:r>
@@ -3169,7 +2887,7 @@
           <a:bodyPr wrap="square" lIns="0" tIns="0" rIns="0" bIns="0" rtlCol="0" anchor="ctr"/>
           <a:lstStyle/>
           <a:p>
-            <a:pPr indent="0" marL="0">
+            <a:pPr marL="0" indent="0">
               <a:buNone/>
             </a:pPr>
             <a:r>
@@ -3208,7 +2926,7 @@
           <a:bodyPr wrap="square" lIns="0" tIns="0" rIns="0" bIns="0" rtlCol="0" anchor="t"/>
           <a:lstStyle/>
           <a:p>
-            <a:pPr indent="0" marL="0">
+            <a:pPr marL="0" indent="0">
               <a:buNone/>
             </a:pPr>
             <a:r>
@@ -3246,7 +2964,7 @@
           </a:prstGeom>
           <a:extLst>
             <a:ext uri="{C572A759-6A51-4108-AA02-DFA0A04FC94B}">
-              <ma14:wrappingTextBoxFlag xmlns:ma14="http://schemas.microsoft.com/office/mac/drawingml/2011/main" val="0"/>
+              <ma14:wrappingTextBoxFlag xmlns:ma14="http://schemas.microsoft.com/office/mac/drawingml/2011/main" xmlns="" val="0"/>
             </a:ext>
           </a:extLst>
         </p:spPr>
@@ -3267,7 +2985,7 @@
           <a:p>
             <a:pPr algn="r"/>
             <a:fld id="{F7021451-1387-4CA6-816F-3879F97B5CBC}" type="slidenum">
-              <a:rPr b="0" lang="en-US"/>
+              <a:rPr lang="en-US" b="0"/>
               <a:t>10</a:t>
             </a:fld>
             <a:endParaRPr lang="en-US"/>
@@ -3302,9 +3020,11 @@
       <p:sp>
         <p:nvSpPr>
           <p:cNvPr id="2" name="Text 0"/>
-          <p:cNvSpPr/>
+          <p:cNvSpPr>
+            <a:spLocks noGrp="1"/>
+          </p:cNvSpPr>
           <p:nvPr>
-            <p:ph idx="100" type="body" hasCustomPrompt="1"/>
+            <p:ph type="body" idx="100" hasCustomPrompt="1"/>
           </p:nvPr>
         </p:nvSpPr>
         <p:spPr>
@@ -3322,11 +3042,11 @@
           <a:bodyPr wrap="square" lIns="0" tIns="0" rIns="0" bIns="0" rtlCol="0" anchor="ctr"/>
           <a:lstStyle/>
           <a:p>
-            <a:pPr indent="0" marL="0">
-              <a:buNone/>
-            </a:pPr>
-            <a:r>
-              <a:rPr lang="en-US" sz="1100" b="1" spc="200" kern="0" dirty="0">
+            <a:pPr marL="0" indent="0">
+              <a:buNone/>
+            </a:pPr>
+            <a:r>
+              <a:rPr lang="en-US" sz="1100" b="1" kern="0" spc="200" dirty="0">
                 <a:solidFill>
                   <a:schemeClr val="accent1"/>
                 </a:solidFill>
@@ -3343,9 +3063,11 @@
       <p:sp>
         <p:nvSpPr>
           <p:cNvPr id="3" name="Text 0"/>
-          <p:cNvSpPr/>
+          <p:cNvSpPr>
+            <a:spLocks noGrp="1"/>
+          </p:cNvSpPr>
           <p:nvPr>
-            <p:ph idx="101" type="title" hasCustomPrompt="1"/>
+            <p:ph type="title" idx="101" hasCustomPrompt="1"/>
           </p:nvPr>
         </p:nvSpPr>
         <p:spPr>
@@ -3363,7 +3085,7 @@
           <a:bodyPr wrap="square" lIns="0" tIns="0" rIns="0" bIns="0" rtlCol="0" anchor="ctr"/>
           <a:lstStyle/>
           <a:p>
-            <a:pPr algn="l" indent="0" marL="0">
+            <a:pPr marL="0" indent="0" algn="l">
               <a:buNone/>
             </a:pPr>
             <a:r>
@@ -3402,7 +3124,7 @@
           <a:bodyPr wrap="square" lIns="0" tIns="0" rIns="0" bIns="0" rtlCol="0" anchor="t"/>
           <a:lstStyle/>
           <a:p>
-            <a:pPr indent="0" marL="0">
+            <a:pPr marL="0" indent="0">
               <a:buNone/>
             </a:pPr>
             <a:r>
@@ -3468,7 +3190,7 @@
           <a:bodyPr wrap="square" lIns="0" tIns="0" rIns="0" bIns="0" rtlCol="0" anchor="ctr"/>
           <a:lstStyle/>
           <a:p>
-            <a:pPr indent="0" marL="0">
+            <a:pPr marL="0" indent="0">
               <a:buNone/>
             </a:pPr>
             <a:r>
@@ -3507,7 +3229,7 @@
           <a:bodyPr wrap="square" lIns="0" tIns="0" rIns="0" bIns="0" rtlCol="0" anchor="t"/>
           <a:lstStyle/>
           <a:p>
-            <a:pPr indent="0" marL="0">
+            <a:pPr marL="0" indent="0">
               <a:buNone/>
             </a:pPr>
             <a:r>
@@ -3573,7 +3295,7 @@
           <a:bodyPr wrap="square" lIns="0" tIns="0" rIns="0" bIns="0" rtlCol="0" anchor="ctr"/>
           <a:lstStyle/>
           <a:p>
-            <a:pPr indent="0" marL="0">
+            <a:pPr marL="0" indent="0">
               <a:buNone/>
             </a:pPr>
             <a:r>
@@ -3612,7 +3334,7 @@
           <a:bodyPr wrap="square" lIns="0" tIns="0" rIns="0" bIns="0" rtlCol="0" anchor="t"/>
           <a:lstStyle/>
           <a:p>
-            <a:pPr indent="0" marL="0">
+            <a:pPr marL="0" indent="0">
               <a:buNone/>
             </a:pPr>
             <a:r>
@@ -3678,7 +3400,7 @@
           <a:bodyPr wrap="square" lIns="0" tIns="0" rIns="0" bIns="0" rtlCol="0" anchor="ctr"/>
           <a:lstStyle/>
           <a:p>
-            <a:pPr indent="0" marL="0">
+            <a:pPr marL="0" indent="0">
               <a:buNone/>
             </a:pPr>
             <a:r>
@@ -3717,7 +3439,7 @@
           <a:bodyPr wrap="square" lIns="0" tIns="0" rIns="0" bIns="0" rtlCol="0" anchor="t"/>
           <a:lstStyle/>
           <a:p>
-            <a:pPr indent="0" marL="0">
+            <a:pPr marL="0" indent="0">
               <a:buNone/>
             </a:pPr>
             <a:r>
@@ -3755,7 +3477,7 @@
           </a:prstGeom>
           <a:extLst>
             <a:ext uri="{C572A759-6A51-4108-AA02-DFA0A04FC94B}">
-              <ma14:wrappingTextBoxFlag xmlns:ma14="http://schemas.microsoft.com/office/mac/drawingml/2011/main" val="0"/>
+              <ma14:wrappingTextBoxFlag xmlns:ma14="http://schemas.microsoft.com/office/mac/drawingml/2011/main" xmlns="" val="0"/>
             </a:ext>
           </a:extLst>
         </p:spPr>
@@ -3776,7 +3498,7 @@
           <a:p>
             <a:pPr algn="r"/>
             <a:fld id="{F7021451-1387-4CA6-816F-3879F97B5CBC}" type="slidenum">
-              <a:rPr b="0" lang="en-US"/>
+              <a:rPr lang="en-US" b="0"/>
               <a:t>11</a:t>
             </a:fld>
             <a:endParaRPr lang="en-US"/>
@@ -3811,9 +3533,11 @@
       <p:sp>
         <p:nvSpPr>
           <p:cNvPr id="2" name="Text 0"/>
-          <p:cNvSpPr/>
+          <p:cNvSpPr>
+            <a:spLocks noGrp="1"/>
+          </p:cNvSpPr>
           <p:nvPr>
-            <p:ph idx="100" type="body" hasCustomPrompt="1"/>
+            <p:ph type="body" idx="100" hasCustomPrompt="1"/>
           </p:nvPr>
         </p:nvSpPr>
         <p:spPr>
@@ -3831,11 +3555,11 @@
           <a:bodyPr wrap="square" lIns="0" tIns="0" rIns="0" bIns="0" rtlCol="0" anchor="ctr"/>
           <a:lstStyle/>
           <a:p>
-            <a:pPr indent="0" marL="0">
-              <a:buNone/>
-            </a:pPr>
-            <a:r>
-              <a:rPr lang="en-US" sz="1100" b="1" spc="200" kern="0" dirty="0">
+            <a:pPr marL="0" indent="0">
+              <a:buNone/>
+            </a:pPr>
+            <a:r>
+              <a:rPr lang="en-US" sz="1100" b="1" kern="0" spc="200" dirty="0">
                 <a:solidFill>
                   <a:schemeClr val="accent1"/>
                 </a:solidFill>
@@ -3852,9 +3576,11 @@
       <p:sp>
         <p:nvSpPr>
           <p:cNvPr id="3" name="Text 0"/>
-          <p:cNvSpPr/>
+          <p:cNvSpPr>
+            <a:spLocks noGrp="1"/>
+          </p:cNvSpPr>
           <p:nvPr>
-            <p:ph idx="101" type="title" hasCustomPrompt="1"/>
+            <p:ph type="title" idx="101" hasCustomPrompt="1"/>
           </p:nvPr>
         </p:nvSpPr>
         <p:spPr>
@@ -3872,7 +3598,7 @@
           <a:bodyPr wrap="square" lIns="0" tIns="0" rIns="0" bIns="0" rtlCol="0" anchor="ctr"/>
           <a:lstStyle/>
           <a:p>
-            <a:pPr algn="l" indent="0" marL="0">
+            <a:pPr marL="0" indent="0" algn="l">
               <a:buNone/>
             </a:pPr>
             <a:r>
@@ -3938,7 +3664,7 @@
           <a:bodyPr wrap="square" lIns="0" tIns="0" rIns="0" bIns="0" rtlCol="0" anchor="ctr"/>
           <a:lstStyle/>
           <a:p>
-            <a:pPr indent="0" marL="0">
+            <a:pPr marL="0" indent="0">
               <a:buNone/>
             </a:pPr>
             <a:r>
@@ -3977,7 +3703,7 @@
           <a:bodyPr wrap="square" lIns="0" tIns="0" rIns="0" bIns="0" rtlCol="0" anchor="t"/>
           <a:lstStyle/>
           <a:p>
-            <a:pPr indent="0" marL="0">
+            <a:pPr marL="0" indent="0">
               <a:buNone/>
             </a:pPr>
             <a:r>
@@ -4043,7 +3769,7 @@
           <a:bodyPr wrap="square" lIns="0" tIns="0" rIns="0" bIns="0" rtlCol="0" anchor="ctr"/>
           <a:lstStyle/>
           <a:p>
-            <a:pPr indent="0" marL="0">
+            <a:pPr marL="0" indent="0">
               <a:buNone/>
             </a:pPr>
             <a:r>
@@ -4082,7 +3808,7 @@
           <a:bodyPr wrap="square" lIns="0" tIns="0" rIns="0" bIns="0" rtlCol="0" anchor="t"/>
           <a:lstStyle/>
           <a:p>
-            <a:pPr indent="0" marL="0">
+            <a:pPr marL="0" indent="0">
               <a:buNone/>
             </a:pPr>
             <a:r>
@@ -4148,7 +3874,7 @@
           <a:bodyPr wrap="square" lIns="0" tIns="0" rIns="0" bIns="0" rtlCol="0" anchor="ctr"/>
           <a:lstStyle/>
           <a:p>
-            <a:pPr indent="0" marL="0">
+            <a:pPr marL="0" indent="0">
               <a:buNone/>
             </a:pPr>
             <a:r>
@@ -4187,7 +3913,7 @@
           <a:bodyPr wrap="square" lIns="0" tIns="0" rIns="0" bIns="0" rtlCol="0" anchor="t"/>
           <a:lstStyle/>
           <a:p>
-            <a:pPr indent="0" marL="0">
+            <a:pPr marL="0" indent="0">
               <a:buNone/>
             </a:pPr>
             <a:r>
@@ -4253,11 +3979,11 @@
           <a:bodyPr wrap="square" lIns="0" tIns="0" rIns="0" bIns="0" rtlCol="0" anchor="ctr"/>
           <a:lstStyle/>
           <a:p>
-            <a:pPr indent="0" marL="0">
-              <a:buNone/>
-            </a:pPr>
-            <a:r>
-              <a:rPr lang="en-US" sz="1000" b="1" spc="100" kern="0" dirty="0">
+            <a:pPr marL="0" indent="0">
+              <a:buNone/>
+            </a:pPr>
+            <a:r>
+              <a:rPr lang="en-US" sz="1000" b="1" kern="0" spc="100" dirty="0">
                 <a:solidFill>
                   <a:schemeClr val="tx2"/>
                 </a:solidFill>
@@ -4292,7 +4018,7 @@
           <a:bodyPr wrap="square" lIns="0" tIns="0" rIns="0" bIns="0" rtlCol="0" anchor="ctr"/>
           <a:lstStyle/>
           <a:p>
-            <a:pPr indent="0" marL="0">
+            <a:pPr marL="0" indent="0">
               <a:buNone/>
             </a:pPr>
             <a:r>
@@ -4306,9 +4032,6 @@
               </a:rPr>
               <a:t>✓  </a:t>
             </a:r>
-            <a:pPr indent="0" marL="0">
-              <a:buNone/>
-            </a:pPr>
             <a:r>
               <a:rPr lang="en-US" sz="1250" b="1" dirty="0">
                 <a:solidFill>
@@ -4345,7 +4068,7 @@
           <a:bodyPr wrap="square" lIns="0" tIns="0" rIns="0" bIns="0" rtlCol="0" anchor="ctr"/>
           <a:lstStyle/>
           <a:p>
-            <a:pPr indent="0" marL="0">
+            <a:pPr marL="0" indent="0">
               <a:buNone/>
             </a:pPr>
             <a:r>
@@ -4359,9 +4082,6 @@
               </a:rPr>
               <a:t>–  </a:t>
             </a:r>
-            <a:pPr indent="0" marL="0">
-              <a:buNone/>
-            </a:pPr>
             <a:r>
               <a:rPr lang="en-US" sz="1250" dirty="0">
                 <a:solidFill>
@@ -4398,7 +4118,7 @@
           <a:bodyPr wrap="square" lIns="0" tIns="0" rIns="0" bIns="0" rtlCol="0" anchor="ctr"/>
           <a:lstStyle/>
           <a:p>
-            <a:pPr indent="0" marL="0">
+            <a:pPr marL="0" indent="0">
               <a:buNone/>
             </a:pPr>
             <a:r>
@@ -4412,9 +4132,6 @@
               </a:rPr>
               <a:t>–  </a:t>
             </a:r>
-            <a:pPr indent="0" marL="0">
-              <a:buNone/>
-            </a:pPr>
             <a:r>
               <a:rPr lang="en-US" sz="1250" dirty="0">
                 <a:solidFill>
@@ -4451,7 +4168,7 @@
           <a:bodyPr wrap="square" lIns="0" tIns="0" rIns="0" bIns="0" rtlCol="0" anchor="ctr"/>
           <a:lstStyle/>
           <a:p>
-            <a:pPr indent="0" marL="0">
+            <a:pPr marL="0" indent="0">
               <a:buNone/>
             </a:pPr>
             <a:r>
@@ -4465,9 +4182,6 @@
               </a:rPr>
               <a:t>–  </a:t>
             </a:r>
-            <a:pPr indent="0" marL="0">
-              <a:buNone/>
-            </a:pPr>
             <a:r>
               <a:rPr lang="en-US" sz="1250" dirty="0">
                 <a:solidFill>
@@ -4504,7 +4218,7 @@
           <a:bodyPr wrap="square" lIns="0" tIns="0" rIns="0" bIns="0" rtlCol="0" anchor="ctr"/>
           <a:lstStyle/>
           <a:p>
-            <a:pPr indent="0" marL="0">
+            <a:pPr marL="0" indent="0">
               <a:buNone/>
             </a:pPr>
             <a:r>
@@ -4518,9 +4232,6 @@
               </a:rPr>
               <a:t>–  </a:t>
             </a:r>
-            <a:pPr indent="0" marL="0">
-              <a:buNone/>
-            </a:pPr>
             <a:r>
               <a:rPr lang="en-US" sz="1250" dirty="0">
                 <a:solidFill>
@@ -4557,7 +4268,7 @@
           <a:bodyPr wrap="square" lIns="0" tIns="0" rIns="0" bIns="0" rtlCol="0" anchor="t"/>
           <a:lstStyle/>
           <a:p>
-            <a:pPr indent="0" marL="0">
+            <a:pPr marL="0" indent="0">
               <a:buNone/>
             </a:pPr>
             <a:r>
@@ -4595,7 +4306,7 @@
           </a:prstGeom>
           <a:extLst>
             <a:ext uri="{C572A759-6A51-4108-AA02-DFA0A04FC94B}">
-              <ma14:wrappingTextBoxFlag xmlns:ma14="http://schemas.microsoft.com/office/mac/drawingml/2011/main" val="0"/>
+              <ma14:wrappingTextBoxFlag xmlns:ma14="http://schemas.microsoft.com/office/mac/drawingml/2011/main" xmlns="" val="0"/>
             </a:ext>
           </a:extLst>
         </p:spPr>
@@ -4616,7 +4327,7 @@
           <a:p>
             <a:pPr algn="r"/>
             <a:fld id="{F7021451-1387-4CA6-816F-3879F97B5CBC}" type="slidenum">
-              <a:rPr b="0" lang="en-US"/>
+              <a:rPr lang="en-US" b="0"/>
               <a:t>2</a:t>
             </a:fld>
             <a:endParaRPr lang="en-US"/>
@@ -4651,9 +4362,11 @@
       <p:sp>
         <p:nvSpPr>
           <p:cNvPr id="2" name="Text 0"/>
-          <p:cNvSpPr/>
+          <p:cNvSpPr>
+            <a:spLocks noGrp="1"/>
+          </p:cNvSpPr>
           <p:nvPr>
-            <p:ph idx="100" type="body" hasCustomPrompt="1"/>
+            <p:ph type="body" idx="100" hasCustomPrompt="1"/>
           </p:nvPr>
         </p:nvSpPr>
         <p:spPr>
@@ -4671,11 +4384,11 @@
           <a:bodyPr wrap="square" lIns="0" tIns="0" rIns="0" bIns="0" rtlCol="0" anchor="ctr"/>
           <a:lstStyle/>
           <a:p>
-            <a:pPr indent="0" marL="0">
-              <a:buNone/>
-            </a:pPr>
-            <a:r>
-              <a:rPr lang="en-US" sz="1100" b="1" spc="200" kern="0" dirty="0">
+            <a:pPr marL="0" indent="0">
+              <a:buNone/>
+            </a:pPr>
+            <a:r>
+              <a:rPr lang="en-US" sz="1100" b="1" kern="0" spc="200" dirty="0">
                 <a:solidFill>
                   <a:schemeClr val="accent1"/>
                 </a:solidFill>
@@ -4692,9 +4405,11 @@
       <p:sp>
         <p:nvSpPr>
           <p:cNvPr id="3" name="Text 0"/>
-          <p:cNvSpPr/>
+          <p:cNvSpPr>
+            <a:spLocks noGrp="1"/>
+          </p:cNvSpPr>
           <p:nvPr>
-            <p:ph idx="101" type="title" hasCustomPrompt="1"/>
+            <p:ph type="title" idx="101" hasCustomPrompt="1"/>
           </p:nvPr>
         </p:nvSpPr>
         <p:spPr>
@@ -4712,7 +4427,7 @@
           <a:bodyPr wrap="square" lIns="0" tIns="0" rIns="0" bIns="0" rtlCol="0" anchor="ctr"/>
           <a:lstStyle/>
           <a:p>
-            <a:pPr algn="l" indent="0" marL="0">
+            <a:pPr marL="0" indent="0" algn="l">
               <a:buNone/>
             </a:pPr>
             <a:r>
@@ -4778,7 +4493,7 @@
           <a:bodyPr wrap="square" lIns="0" tIns="0" rIns="0" bIns="0" rtlCol="0" anchor="ctr"/>
           <a:lstStyle/>
           <a:p>
-            <a:pPr indent="0" marL="0">
+            <a:pPr marL="0" indent="0">
               <a:buNone/>
             </a:pPr>
             <a:r>
@@ -4817,7 +4532,7 @@
           <a:bodyPr wrap="square" lIns="0" tIns="0" rIns="0" bIns="0" rtlCol="0" anchor="t"/>
           <a:lstStyle/>
           <a:p>
-            <a:pPr indent="0" marL="0">
+            <a:pPr marL="0" indent="0">
               <a:buNone/>
             </a:pPr>
             <a:r>
@@ -4883,7 +4598,7 @@
           <a:bodyPr wrap="square" lIns="0" tIns="0" rIns="0" bIns="0" rtlCol="0" anchor="ctr"/>
           <a:lstStyle/>
           <a:p>
-            <a:pPr indent="0" marL="0">
+            <a:pPr marL="0" indent="0">
               <a:buNone/>
             </a:pPr>
             <a:r>
@@ -4922,7 +4637,7 @@
           <a:bodyPr wrap="square" lIns="0" tIns="0" rIns="0" bIns="0" rtlCol="0" anchor="t"/>
           <a:lstStyle/>
           <a:p>
-            <a:pPr indent="0" marL="0">
+            <a:pPr marL="0" indent="0">
               <a:buNone/>
             </a:pPr>
             <a:r>
@@ -4988,7 +4703,7 @@
           <a:bodyPr wrap="square" lIns="0" tIns="0" rIns="0" bIns="0" rtlCol="0" anchor="ctr"/>
           <a:lstStyle/>
           <a:p>
-            <a:pPr indent="0" marL="0">
+            <a:pPr marL="0" indent="0">
               <a:buNone/>
             </a:pPr>
             <a:r>
@@ -5027,7 +4742,7 @@
           <a:bodyPr wrap="square" lIns="0" tIns="0" rIns="0" bIns="0" rtlCol="0" anchor="t"/>
           <a:lstStyle/>
           <a:p>
-            <a:pPr indent="0" marL="0">
+            <a:pPr marL="0" indent="0">
               <a:buNone/>
             </a:pPr>
             <a:r>
@@ -5093,7 +4808,7 @@
           <a:bodyPr wrap="square" lIns="0" tIns="0" rIns="0" bIns="0" rtlCol="0" anchor="ctr"/>
           <a:lstStyle/>
           <a:p>
-            <a:pPr indent="0" marL="0">
+            <a:pPr marL="0" indent="0">
               <a:buNone/>
             </a:pPr>
             <a:r>
@@ -5132,7 +4847,7 @@
           <a:bodyPr wrap="square" lIns="0" tIns="0" rIns="0" bIns="0" rtlCol="0" anchor="t"/>
           <a:lstStyle/>
           <a:p>
-            <a:pPr indent="0" marL="0">
+            <a:pPr marL="0" indent="0">
               <a:buNone/>
             </a:pPr>
             <a:r>
@@ -5198,7 +4913,7 @@
           <a:bodyPr wrap="square" lIns="0" tIns="0" rIns="0" bIns="0" rtlCol="0" anchor="ctr"/>
           <a:lstStyle/>
           <a:p>
-            <a:pPr indent="0" marL="0">
+            <a:pPr marL="0" indent="0">
               <a:buNone/>
             </a:pPr>
             <a:r>
@@ -5237,7 +4952,7 @@
           <a:bodyPr wrap="square" lIns="0" tIns="0" rIns="0" bIns="0" rtlCol="0" anchor="t"/>
           <a:lstStyle/>
           <a:p>
-            <a:pPr indent="0" marL="0">
+            <a:pPr marL="0" indent="0">
               <a:buNone/>
             </a:pPr>
             <a:r>
@@ -5276,7 +4991,7 @@
           <a:bodyPr wrap="square" lIns="0" tIns="0" rIns="0" bIns="0" rtlCol="0" anchor="t"/>
           <a:lstStyle/>
           <a:p>
-            <a:pPr indent="0" marL="0">
+            <a:pPr marL="0" indent="0">
               <a:buNone/>
             </a:pPr>
             <a:r>
@@ -5290,9 +5005,6 @@
               </a:rPr>
               <a:t>Supabase (PostgreSQL) · tabla public.credit_risk · 13 columnas. </a:t>
             </a:r>
-            <a:pPr indent="0" marL="0">
-              <a:buNone/>
-            </a:pPr>
             <a:r>
               <a:rPr lang="en-US" sz="1200" dirty="0">
                 <a:solidFill>
@@ -5328,7 +5040,7 @@
           </a:prstGeom>
           <a:extLst>
             <a:ext uri="{C572A759-6A51-4108-AA02-DFA0A04FC94B}">
-              <ma14:wrappingTextBoxFlag xmlns:ma14="http://schemas.microsoft.com/office/mac/drawingml/2011/main" val="0"/>
+              <ma14:wrappingTextBoxFlag xmlns:ma14="http://schemas.microsoft.com/office/mac/drawingml/2011/main" xmlns="" val="0"/>
             </a:ext>
           </a:extLst>
         </p:spPr>
@@ -5349,7 +5061,7 @@
           <a:p>
             <a:pPr algn="r"/>
             <a:fld id="{F7021451-1387-4CA6-816F-3879F97B5CBC}" type="slidenum">
-              <a:rPr b="0" lang="en-US"/>
+              <a:rPr lang="en-US" b="0"/>
               <a:t>3</a:t>
             </a:fld>
             <a:endParaRPr lang="en-US"/>
@@ -5384,9 +5096,11 @@
       <p:sp>
         <p:nvSpPr>
           <p:cNvPr id="2" name="Text 0"/>
-          <p:cNvSpPr/>
+          <p:cNvSpPr>
+            <a:spLocks noGrp="1"/>
+          </p:cNvSpPr>
           <p:nvPr>
-            <p:ph idx="100" type="body" hasCustomPrompt="1"/>
+            <p:ph type="body" idx="100" hasCustomPrompt="1"/>
           </p:nvPr>
         </p:nvSpPr>
         <p:spPr>
@@ -5404,11 +5118,11 @@
           <a:bodyPr wrap="square" lIns="0" tIns="0" rIns="0" bIns="0" rtlCol="0" anchor="ctr"/>
           <a:lstStyle/>
           <a:p>
-            <a:pPr indent="0" marL="0">
-              <a:buNone/>
-            </a:pPr>
-            <a:r>
-              <a:rPr lang="en-US" sz="1100" b="1" spc="200" kern="0" dirty="0">
+            <a:pPr marL="0" indent="0">
+              <a:buNone/>
+            </a:pPr>
+            <a:r>
+              <a:rPr lang="en-US" sz="1100" b="1" kern="0" spc="200" dirty="0">
                 <a:solidFill>
                   <a:schemeClr val="accent1"/>
                 </a:solidFill>
@@ -5425,9 +5139,11 @@
       <p:sp>
         <p:nvSpPr>
           <p:cNvPr id="3" name="Text 0"/>
-          <p:cNvSpPr/>
+          <p:cNvSpPr>
+            <a:spLocks noGrp="1"/>
+          </p:cNvSpPr>
           <p:nvPr>
-            <p:ph idx="101" type="title" hasCustomPrompt="1"/>
+            <p:ph type="title" idx="101" hasCustomPrompt="1"/>
           </p:nvPr>
         </p:nvSpPr>
         <p:spPr>
@@ -5445,7 +5161,7 @@
           <a:bodyPr wrap="square" lIns="0" tIns="0" rIns="0" bIns="0" rtlCol="0" anchor="ctr"/>
           <a:lstStyle/>
           <a:p>
-            <a:pPr algn="l" indent="0" marL="0">
+            <a:pPr marL="0" indent="0" algn="l">
               <a:buNone/>
             </a:pPr>
             <a:r>
@@ -5540,7 +5256,7 @@
           <a:bodyPr wrap="square" lIns="0" tIns="0" rIns="0" bIns="0" rtlCol="0" anchor="ctr"/>
           <a:lstStyle/>
           <a:p>
-            <a:pPr algn="ctr" indent="0" marL="0">
+            <a:pPr marL="0" indent="0" algn="ctr">
               <a:buNone/>
             </a:pPr>
             <a:r>
@@ -5557,7 +5273,7 @@
             <a:endParaRPr lang="en-US" sz="1250" dirty="0"/>
           </a:p>
           <a:p>
-            <a:pPr algn="ctr" indent="0" marL="0">
+            <a:pPr marL="0" indent="0" algn="ctr">
               <a:buNone/>
             </a:pPr>
             <a:r>
@@ -5623,7 +5339,7 @@
           <a:bodyPr wrap="square" lIns="0" tIns="0" rIns="0" bIns="0" rtlCol="0" anchor="ctr"/>
           <a:lstStyle/>
           <a:p>
-            <a:pPr algn="ctr" indent="0" marL="0">
+            <a:pPr marL="0" indent="0" algn="ctr">
               <a:buNone/>
             </a:pPr>
             <a:r>
@@ -5640,7 +5356,7 @@
             <a:endParaRPr lang="en-US" sz="1250" dirty="0"/>
           </a:p>
           <a:p>
-            <a:pPr algn="ctr" indent="0" marL="0">
+            <a:pPr marL="0" indent="0" algn="ctr">
               <a:buNone/>
             </a:pPr>
             <a:r>
@@ -5706,7 +5422,7 @@
           <a:bodyPr wrap="square" lIns="0" tIns="0" rIns="0" bIns="0" rtlCol="0" anchor="ctr"/>
           <a:lstStyle/>
           <a:p>
-            <a:pPr algn="ctr" indent="0" marL="0">
+            <a:pPr marL="0" indent="0" algn="ctr">
               <a:buNone/>
             </a:pPr>
             <a:r>
@@ -5723,7 +5439,7 @@
             <a:endParaRPr lang="en-US" sz="1250" dirty="0"/>
           </a:p>
           <a:p>
-            <a:pPr algn="ctr" indent="0" marL="0">
+            <a:pPr marL="0" indent="0" algn="ctr">
               <a:buNone/>
             </a:pPr>
             <a:r>
@@ -5789,7 +5505,7 @@
           <a:bodyPr wrap="square" lIns="0" tIns="0" rIns="0" bIns="0" rtlCol="0" anchor="ctr"/>
           <a:lstStyle/>
           <a:p>
-            <a:pPr algn="ctr" indent="0" marL="0">
+            <a:pPr marL="0" indent="0" algn="ctr">
               <a:buNone/>
             </a:pPr>
             <a:r>
@@ -5806,7 +5522,7 @@
             <a:endParaRPr lang="en-US" sz="1250" dirty="0"/>
           </a:p>
           <a:p>
-            <a:pPr algn="ctr" indent="0" marL="0">
+            <a:pPr marL="0" indent="0" algn="ctr">
               <a:buNone/>
             </a:pPr>
             <a:r>
@@ -5823,7 +5539,7 @@
             <a:endParaRPr lang="en-US" sz="1250" dirty="0"/>
           </a:p>
           <a:p>
-            <a:pPr algn="ctr" indent="0" marL="0">
+            <a:pPr marL="0" indent="0" algn="ctr">
               <a:buNone/>
             </a:pPr>
             <a:r>
@@ -5889,7 +5605,7 @@
           <a:bodyPr wrap="square" lIns="0" tIns="0" rIns="0" bIns="0" rtlCol="0" anchor="ctr"/>
           <a:lstStyle/>
           <a:p>
-            <a:pPr algn="ctr" indent="0" marL="0">
+            <a:pPr marL="0" indent="0" algn="ctr">
               <a:buNone/>
             </a:pPr>
             <a:r>
@@ -5906,7 +5622,7 @@
             <a:endParaRPr lang="en-US" sz="1250" dirty="0"/>
           </a:p>
           <a:p>
-            <a:pPr algn="ctr" indent="0" marL="0">
+            <a:pPr marL="0" indent="0" algn="ctr">
               <a:buNone/>
             </a:pPr>
             <a:r>
@@ -5923,7 +5639,7 @@
             <a:endParaRPr lang="en-US" sz="1250" dirty="0"/>
           </a:p>
           <a:p>
-            <a:pPr algn="ctr" indent="0" marL="0">
+            <a:pPr marL="0" indent="0" algn="ctr">
               <a:buNone/>
             </a:pPr>
             <a:r>
@@ -5989,7 +5705,7 @@
           <a:bodyPr wrap="square" lIns="0" tIns="0" rIns="0" bIns="0" rtlCol="0" anchor="ctr"/>
           <a:lstStyle/>
           <a:p>
-            <a:pPr algn="ctr" indent="0" marL="0">
+            <a:pPr marL="0" indent="0" algn="ctr">
               <a:buNone/>
             </a:pPr>
             <a:r>
@@ -6006,7 +5722,7 @@
             <a:endParaRPr lang="en-US" sz="1250" dirty="0"/>
           </a:p>
           <a:p>
-            <a:pPr algn="ctr" indent="0" marL="0">
+            <a:pPr marL="0" indent="0" algn="ctr">
               <a:buNone/>
             </a:pPr>
             <a:r>
@@ -6072,7 +5788,7 @@
           <a:bodyPr wrap="square" lIns="0" tIns="0" rIns="0" bIns="0" rtlCol="0" anchor="ctr"/>
           <a:lstStyle/>
           <a:p>
-            <a:pPr algn="ctr" indent="0" marL="0">
+            <a:pPr marL="0" indent="0" algn="ctr">
               <a:buNone/>
             </a:pPr>
             <a:r>
@@ -6089,7 +5805,7 @@
             <a:endParaRPr lang="en-US" sz="1150" dirty="0"/>
           </a:p>
           <a:p>
-            <a:pPr algn="ctr" indent="0" marL="0">
+            <a:pPr marL="0" indent="0" algn="ctr">
               <a:buNone/>
             </a:pPr>
             <a:r>
@@ -6155,7 +5871,7 @@
           <a:bodyPr wrap="square" lIns="0" tIns="0" rIns="0" bIns="0" rtlCol="0" anchor="ctr"/>
           <a:lstStyle/>
           <a:p>
-            <a:pPr algn="ctr" indent="0" marL="0">
+            <a:pPr marL="0" indent="0" algn="ctr">
               <a:buNone/>
             </a:pPr>
             <a:r>
@@ -6172,7 +5888,7 @@
             <a:endParaRPr lang="en-US" sz="1150" dirty="0"/>
           </a:p>
           <a:p>
-            <a:pPr algn="ctr" indent="0" marL="0">
+            <a:pPr marL="0" indent="0" algn="ctr">
               <a:buNone/>
             </a:pPr>
             <a:r>
@@ -6497,7 +6213,7 @@
           <a:bodyPr wrap="square" lIns="0" tIns="0" rIns="0" bIns="0" rtlCol="0" anchor="ctr"/>
           <a:lstStyle/>
           <a:p>
-            <a:pPr indent="0" marL="0">
+            <a:pPr marL="0" indent="0">
               <a:buNone/>
             </a:pPr>
             <a:r>
@@ -6536,7 +6252,7 @@
           <a:bodyPr wrap="square" lIns="0" tIns="0" rIns="0" bIns="0" rtlCol="0" anchor="ctr"/>
           <a:lstStyle/>
           <a:p>
-            <a:pPr algn="r" indent="0" marL="0">
+            <a:pPr marL="0" indent="0" algn="r">
               <a:buNone/>
             </a:pPr>
             <a:r>
@@ -6556,7 +6272,7 @@
       </p:sp>
       <p:sp>
         <p:nvSpPr>
-          <p:cNvPr id="25" name="Slide Number Placeholder 0"/>
+          <p:cNvPr id="35" name="Slide Number Placeholder 0"/>
           <p:cNvSpPr>
             <a:spLocks noGrp="1"/>
           </p:cNvSpPr>
@@ -6574,7 +6290,7 @@
           </a:prstGeom>
           <a:extLst>
             <a:ext uri="{C572A759-6A51-4108-AA02-DFA0A04FC94B}">
-              <ma14:wrappingTextBoxFlag xmlns:ma14="http://schemas.microsoft.com/office/mac/drawingml/2011/main" val="0"/>
+              <ma14:wrappingTextBoxFlag xmlns:ma14="http://schemas.microsoft.com/office/mac/drawingml/2011/main" xmlns="" val="0"/>
             </a:ext>
           </a:extLst>
         </p:spPr>
@@ -6595,7 +6311,7 @@
           <a:p>
             <a:pPr algn="r"/>
             <a:fld id="{F7021451-1387-4CA6-816F-3879F97B5CBC}" type="slidenum">
-              <a:rPr b="0" lang="en-US"/>
+              <a:rPr lang="en-US" b="0"/>
               <a:t>4</a:t>
             </a:fld>
             <a:endParaRPr lang="en-US"/>
@@ -6630,9 +6346,11 @@
       <p:sp>
         <p:nvSpPr>
           <p:cNvPr id="2" name="Text 0"/>
-          <p:cNvSpPr/>
+          <p:cNvSpPr>
+            <a:spLocks noGrp="1"/>
+          </p:cNvSpPr>
           <p:nvPr>
-            <p:ph idx="100" type="body" hasCustomPrompt="1"/>
+            <p:ph type="body" idx="100" hasCustomPrompt="1"/>
           </p:nvPr>
         </p:nvSpPr>
         <p:spPr>
@@ -6650,11 +6368,11 @@
           <a:bodyPr wrap="square" lIns="0" tIns="0" rIns="0" bIns="0" rtlCol="0" anchor="ctr"/>
           <a:lstStyle/>
           <a:p>
-            <a:pPr indent="0" marL="0">
-              <a:buNone/>
-            </a:pPr>
-            <a:r>
-              <a:rPr lang="en-US" sz="1100" b="1" spc="200" kern="0" dirty="0">
+            <a:pPr marL="0" indent="0">
+              <a:buNone/>
+            </a:pPr>
+            <a:r>
+              <a:rPr lang="en-US" sz="1100" b="1" kern="0" spc="200" dirty="0">
                 <a:solidFill>
                   <a:schemeClr val="accent1"/>
                 </a:solidFill>
@@ -6671,9 +6389,11 @@
       <p:sp>
         <p:nvSpPr>
           <p:cNvPr id="3" name="Text 0"/>
-          <p:cNvSpPr/>
+          <p:cNvSpPr>
+            <a:spLocks noGrp="1"/>
+          </p:cNvSpPr>
           <p:nvPr>
-            <p:ph idx="101" type="title" hasCustomPrompt="1"/>
+            <p:ph type="title" idx="101" hasCustomPrompt="1"/>
           </p:nvPr>
         </p:nvSpPr>
         <p:spPr>
@@ -6691,7 +6411,7 @@
           <a:bodyPr wrap="square" lIns="0" tIns="0" rIns="0" bIns="0" rtlCol="0" anchor="ctr"/>
           <a:lstStyle/>
           <a:p>
-            <a:pPr algn="l" indent="0" marL="0">
+            <a:pPr marL="0" indent="0" algn="l">
               <a:buNone/>
             </a:pPr>
             <a:r>
@@ -6757,11 +6477,11 @@
           <a:bodyPr wrap="square" lIns="0" tIns="0" rIns="0" bIns="0" rtlCol="0" anchor="ctr"/>
           <a:lstStyle/>
           <a:p>
-            <a:pPr indent="0" marL="0">
-              <a:buNone/>
-            </a:pPr>
-            <a:r>
-              <a:rPr lang="en-US" sz="1000" b="1" spc="100" kern="0" dirty="0">
+            <a:pPr marL="0" indent="0">
+              <a:buNone/>
+            </a:pPr>
+            <a:r>
+              <a:rPr lang="en-US" sz="1000" b="1" kern="0" spc="100" dirty="0">
                 <a:solidFill>
                   <a:schemeClr val="tx2"/>
                 </a:solidFill>
@@ -6796,7 +6516,7 @@
           <a:bodyPr wrap="square" lIns="0" tIns="0" rIns="0" bIns="0" rtlCol="0" anchor="ctr"/>
           <a:lstStyle/>
           <a:p>
-            <a:pPr indent="0" marL="0">
+            <a:pPr marL="0" indent="0">
               <a:buNone/>
             </a:pPr>
             <a:r>
@@ -6813,7 +6533,7 @@
             <a:endParaRPr lang="en-US" sz="1250" dirty="0"/>
           </a:p>
           <a:p>
-            <a:pPr indent="0" marL="0">
+            <a:pPr marL="0" indent="0">
               <a:buNone/>
             </a:pPr>
             <a:r>
@@ -6902,7 +6622,7 @@
           <a:bodyPr wrap="square" lIns="0" tIns="0" rIns="0" bIns="0" rtlCol="0" anchor="ctr"/>
           <a:lstStyle/>
           <a:p>
-            <a:pPr indent="0" marL="0">
+            <a:pPr marL="0" indent="0">
               <a:buNone/>
             </a:pPr>
             <a:r>
@@ -6941,7 +6661,7 @@
           <a:bodyPr wrap="square" lIns="0" tIns="0" rIns="0" bIns="0" rtlCol="0" anchor="ctr"/>
           <a:lstStyle/>
           <a:p>
-            <a:pPr indent="0" marL="0">
+            <a:pPr marL="0" indent="0">
               <a:buNone/>
             </a:pPr>
             <a:r>
@@ -6958,7 +6678,7 @@
             <a:endParaRPr lang="en-US" sz="1250" dirty="0"/>
           </a:p>
           <a:p>
-            <a:pPr indent="0" marL="0">
+            <a:pPr marL="0" indent="0">
               <a:buNone/>
             </a:pPr>
             <a:r>
@@ -7047,7 +6767,7 @@
           <a:bodyPr wrap="square" lIns="0" tIns="0" rIns="0" bIns="0" rtlCol="0" anchor="ctr"/>
           <a:lstStyle/>
           <a:p>
-            <a:pPr indent="0" marL="0">
+            <a:pPr marL="0" indent="0">
               <a:buNone/>
             </a:pPr>
             <a:r>
@@ -7086,7 +6806,7 @@
           <a:bodyPr wrap="square" lIns="0" tIns="0" rIns="0" bIns="0" rtlCol="0" anchor="ctr"/>
           <a:lstStyle/>
           <a:p>
-            <a:pPr indent="0" marL="0">
+            <a:pPr marL="0" indent="0">
               <a:buNone/>
             </a:pPr>
             <a:r>
@@ -7103,7 +6823,7 @@
             <a:endParaRPr lang="en-US" sz="1250" dirty="0"/>
           </a:p>
           <a:p>
-            <a:pPr indent="0" marL="0">
+            <a:pPr marL="0" indent="0">
               <a:buNone/>
             </a:pPr>
             <a:r>
@@ -7192,7 +6912,7 @@
           <a:bodyPr wrap="square" lIns="0" tIns="0" rIns="0" bIns="0" rtlCol="0" anchor="ctr"/>
           <a:lstStyle/>
           <a:p>
-            <a:pPr indent="0" marL="0">
+            <a:pPr marL="0" indent="0">
               <a:buNone/>
             </a:pPr>
             <a:r>
@@ -7231,7 +6951,7 @@
           <a:bodyPr wrap="square" lIns="0" tIns="0" rIns="0" bIns="0" rtlCol="0" anchor="ctr"/>
           <a:lstStyle/>
           <a:p>
-            <a:pPr indent="0" marL="0">
+            <a:pPr marL="0" indent="0">
               <a:buNone/>
             </a:pPr>
             <a:r>
@@ -7248,7 +6968,7 @@
             <a:endParaRPr lang="en-US" sz="1250" dirty="0"/>
           </a:p>
           <a:p>
-            <a:pPr indent="0" marL="0">
+            <a:pPr marL="0" indent="0">
               <a:buNone/>
             </a:pPr>
             <a:r>
@@ -7337,7 +7057,7 @@
           <a:bodyPr wrap="square" lIns="0" tIns="0" rIns="0" bIns="0" rtlCol="0" anchor="ctr"/>
           <a:lstStyle/>
           <a:p>
-            <a:pPr indent="0" marL="0">
+            <a:pPr marL="0" indent="0">
               <a:buNone/>
             </a:pPr>
             <a:r>
@@ -7430,11 +7150,11 @@
           <a:bodyPr wrap="square" lIns="0" tIns="0" rIns="0" bIns="0" rtlCol="0" anchor="ctr"/>
           <a:lstStyle/>
           <a:p>
-            <a:pPr algn="ctr" indent="0" marL="0">
-              <a:buNone/>
-            </a:pPr>
-            <a:r>
-              <a:rPr lang="en-US" sz="1000" b="1" spc="100" kern="0" dirty="0">
+            <a:pPr marL="0" indent="0" algn="ctr">
+              <a:buNone/>
+            </a:pPr>
+            <a:r>
+              <a:rPr lang="en-US" sz="1000" b="1" kern="0" spc="100" dirty="0">
                 <a:solidFill>
                   <a:schemeClr val="accent2"/>
                 </a:solidFill>
@@ -7469,7 +7189,7 @@
           <a:bodyPr wrap="square" lIns="0" tIns="0" rIns="0" bIns="0" rtlCol="0" anchor="t"/>
           <a:lstStyle/>
           <a:p>
-            <a:pPr indent="0" marL="0">
+            <a:pPr marL="0" indent="0">
               <a:buNone/>
             </a:pPr>
             <a:r>
@@ -7562,11 +7282,11 @@
           <a:bodyPr wrap="square" lIns="0" tIns="0" rIns="0" bIns="0" rtlCol="0" anchor="ctr"/>
           <a:lstStyle/>
           <a:p>
-            <a:pPr algn="ctr" indent="0" marL="0">
-              <a:buNone/>
-            </a:pPr>
-            <a:r>
-              <a:rPr lang="en-US" sz="1000" b="1" spc="100" kern="0" dirty="0">
+            <a:pPr marL="0" indent="0" algn="ctr">
+              <a:buNone/>
+            </a:pPr>
+            <a:r>
+              <a:rPr lang="en-US" sz="1000" b="1" kern="0" spc="100" dirty="0">
                 <a:solidFill>
                   <a:schemeClr val="accent3"/>
                 </a:solidFill>
@@ -7601,7 +7321,7 @@
           <a:bodyPr wrap="square" lIns="0" tIns="0" rIns="0" bIns="0" rtlCol="0" anchor="t"/>
           <a:lstStyle/>
           <a:p>
-            <a:pPr indent="0" marL="0">
+            <a:pPr marL="0" indent="0">
               <a:buNone/>
             </a:pPr>
             <a:r>
@@ -7694,11 +7414,11 @@
           <a:bodyPr wrap="square" lIns="0" tIns="0" rIns="0" bIns="0" rtlCol="0" anchor="ctr"/>
           <a:lstStyle/>
           <a:p>
-            <a:pPr algn="ctr" indent="0" marL="0">
-              <a:buNone/>
-            </a:pPr>
-            <a:r>
-              <a:rPr lang="en-US" sz="1000" b="1" spc="100" kern="0" dirty="0">
+            <a:pPr marL="0" indent="0" algn="ctr">
+              <a:buNone/>
+            </a:pPr>
+            <a:r>
+              <a:rPr lang="en-US" sz="1000" b="1" kern="0" spc="100" dirty="0">
                 <a:solidFill>
                   <a:schemeClr val="accent4"/>
                 </a:solidFill>
@@ -7733,7 +7453,7 @@
           <a:bodyPr wrap="square" lIns="0" tIns="0" rIns="0" bIns="0" rtlCol="0" anchor="t"/>
           <a:lstStyle/>
           <a:p>
-            <a:pPr indent="0" marL="0">
+            <a:pPr marL="0" indent="0">
               <a:buNone/>
             </a:pPr>
             <a:r>
@@ -7753,7 +7473,7 @@
       </p:sp>
       <p:sp>
         <p:nvSpPr>
-          <p:cNvPr id="25" name="Slide Number Placeholder 0"/>
+          <p:cNvPr id="34" name="Slide Number Placeholder 0"/>
           <p:cNvSpPr>
             <a:spLocks noGrp="1"/>
           </p:cNvSpPr>
@@ -7771,7 +7491,7 @@
           </a:prstGeom>
           <a:extLst>
             <a:ext uri="{C572A759-6A51-4108-AA02-DFA0A04FC94B}">
-              <ma14:wrappingTextBoxFlag xmlns:ma14="http://schemas.microsoft.com/office/mac/drawingml/2011/main" val="0"/>
+              <ma14:wrappingTextBoxFlag xmlns:ma14="http://schemas.microsoft.com/office/mac/drawingml/2011/main" xmlns="" val="0"/>
             </a:ext>
           </a:extLst>
         </p:spPr>
@@ -7792,7 +7512,7 @@
           <a:p>
             <a:pPr algn="r"/>
             <a:fld id="{F7021451-1387-4CA6-816F-3879F97B5CBC}" type="slidenum">
-              <a:rPr b="0" lang="en-US"/>
+              <a:rPr lang="en-US" b="0"/>
               <a:t>5</a:t>
             </a:fld>
             <a:endParaRPr lang="en-US"/>
@@ -7827,9 +7547,11 @@
       <p:sp>
         <p:nvSpPr>
           <p:cNvPr id="2" name="Text 0"/>
-          <p:cNvSpPr/>
+          <p:cNvSpPr>
+            <a:spLocks noGrp="1"/>
+          </p:cNvSpPr>
           <p:nvPr>
-            <p:ph idx="100" type="body" hasCustomPrompt="1"/>
+            <p:ph type="body" idx="100" hasCustomPrompt="1"/>
           </p:nvPr>
         </p:nvSpPr>
         <p:spPr>
@@ -7847,11 +7569,11 @@
           <a:bodyPr wrap="square" lIns="0" tIns="0" rIns="0" bIns="0" rtlCol="0" anchor="ctr"/>
           <a:lstStyle/>
           <a:p>
-            <a:pPr indent="0" marL="0">
-              <a:buNone/>
-            </a:pPr>
-            <a:r>
-              <a:rPr lang="en-US" sz="1100" b="1" spc="200" kern="0" dirty="0">
+            <a:pPr marL="0" indent="0">
+              <a:buNone/>
+            </a:pPr>
+            <a:r>
+              <a:rPr lang="en-US" sz="1100" b="1" kern="0" spc="200" dirty="0">
                 <a:solidFill>
                   <a:schemeClr val="accent1"/>
                 </a:solidFill>
@@ -7868,9 +7590,11 @@
       <p:sp>
         <p:nvSpPr>
           <p:cNvPr id="3" name="Text 0"/>
-          <p:cNvSpPr/>
+          <p:cNvSpPr>
+            <a:spLocks noGrp="1"/>
+          </p:cNvSpPr>
           <p:nvPr>
-            <p:ph idx="101" type="title" hasCustomPrompt="1"/>
+            <p:ph type="title" idx="101" hasCustomPrompt="1"/>
           </p:nvPr>
         </p:nvSpPr>
         <p:spPr>
@@ -7888,7 +7612,7 @@
           <a:bodyPr wrap="square" lIns="0" tIns="0" rIns="0" bIns="0" rtlCol="0" anchor="ctr"/>
           <a:lstStyle/>
           <a:p>
-            <a:pPr algn="l" indent="0" marL="0">
+            <a:pPr marL="0" indent="0" algn="l">
               <a:buNone/>
             </a:pPr>
             <a:r>
@@ -7949,18 +7673,48 @@
         </p:nvGraphicFramePr>
         <p:xfrm>
           <a:off x="566928" y="1463040"/>
-          <a:ext cx="4443984" cy="914400"/>
+          <a:ext cx="4443984" cy="1755648"/>
         </p:xfrm>
         <a:graphic>
           <a:graphicData uri="http://schemas.openxmlformats.org/drawingml/2006/table">
             <a:tbl>
               <a:tblPr/>
               <a:tblGrid>
-                <a:gridCol w="1005840"/>
-                <a:gridCol w="914400"/>
-                <a:gridCol w="841248"/>
-                <a:gridCol w="896112"/>
-                <a:gridCol w="786384"/>
+                <a:gridCol w="1005840">
+                  <a:extLst>
+                    <a:ext uri="{9D8B030D-6E8A-4147-A177-3AD203B41FA5}">
+                      <a16:colId xmlns:a16="http://schemas.microsoft.com/office/drawing/2014/main" val="20000"/>
+                    </a:ext>
+                  </a:extLst>
+                </a:gridCol>
+                <a:gridCol w="914400">
+                  <a:extLst>
+                    <a:ext uri="{9D8B030D-6E8A-4147-A177-3AD203B41FA5}">
+                      <a16:colId xmlns:a16="http://schemas.microsoft.com/office/drawing/2014/main" val="20001"/>
+                    </a:ext>
+                  </a:extLst>
+                </a:gridCol>
+                <a:gridCol w="841248">
+                  <a:extLst>
+                    <a:ext uri="{9D8B030D-6E8A-4147-A177-3AD203B41FA5}">
+                      <a16:colId xmlns:a16="http://schemas.microsoft.com/office/drawing/2014/main" val="20002"/>
+                    </a:ext>
+                  </a:extLst>
+                </a:gridCol>
+                <a:gridCol w="896112">
+                  <a:extLst>
+                    <a:ext uri="{9D8B030D-6E8A-4147-A177-3AD203B41FA5}">
+                      <a16:colId xmlns:a16="http://schemas.microsoft.com/office/drawing/2014/main" val="20003"/>
+                    </a:ext>
+                  </a:extLst>
+                </a:gridCol>
+                <a:gridCol w="786384">
+                  <a:extLst>
+                    <a:ext uri="{9D8B030D-6E8A-4147-A177-3AD203B41FA5}">
+                      <a16:colId xmlns:a16="http://schemas.microsoft.com/office/drawing/2014/main" val="20004"/>
+                    </a:ext>
+                  </a:extLst>
+                </a:gridCol>
               </a:tblGrid>
               <a:tr h="438912">
                 <a:tc>
@@ -7968,7 +7722,7 @@
                     <a:bodyPr/>
                     <a:lstStyle/>
                     <a:p>
-                      <a:pPr algn="l" indent="0" marL="0">
+                      <a:pPr marL="0" indent="0" algn="l">
                         <a:buNone/>
                       </a:pPr>
                       <a:r>
@@ -7989,7 +7743,7 @@
                       </a:endParaRPr>
                     </a:p>
                   </a:txBody>
-                  <a:tcPr marL="91440" marR="91440" marT="45720" marB="45720" anchor="ctr">
+                  <a:tcPr anchor="ctr">
                     <a:lnL w="0" cap="flat" cmpd="sng" algn="ctr">
                       <a:noFill/>
                     </a:lnL>
@@ -8015,7 +7769,7 @@
                     <a:bodyPr/>
                     <a:lstStyle/>
                     <a:p>
-                      <a:pPr algn="r" indent="0" marL="0">
+                      <a:pPr marL="0" indent="0" algn="r">
                         <a:buNone/>
                       </a:pPr>
                       <a:r>
@@ -8036,7 +7790,7 @@
                       </a:endParaRPr>
                     </a:p>
                   </a:txBody>
-                  <a:tcPr marL="91440" marR="91440" marT="45720" marB="45720" anchor="ctr">
+                  <a:tcPr anchor="ctr">
                     <a:lnL w="0" cap="flat" cmpd="sng" algn="ctr">
                       <a:noFill/>
                     </a:lnL>
@@ -8062,7 +7816,7 @@
                     <a:bodyPr/>
                     <a:lstStyle/>
                     <a:p>
-                      <a:pPr algn="r" indent="0" marL="0">
+                      <a:pPr marL="0" indent="0" algn="r">
                         <a:buNone/>
                       </a:pPr>
                       <a:r>
@@ -8083,7 +7837,7 @@
                       </a:endParaRPr>
                     </a:p>
                   </a:txBody>
-                  <a:tcPr marL="91440" marR="91440" marT="45720" marB="45720" anchor="ctr">
+                  <a:tcPr anchor="ctr">
                     <a:lnL w="0" cap="flat" cmpd="sng" algn="ctr">
                       <a:noFill/>
                     </a:lnL>
@@ -8109,7 +7863,7 @@
                     <a:bodyPr/>
                     <a:lstStyle/>
                     <a:p>
-                      <a:pPr algn="r" indent="0" marL="0">
+                      <a:pPr marL="0" indent="0" algn="r">
                         <a:buNone/>
                       </a:pPr>
                       <a:r>
@@ -8130,7 +7884,7 @@
                       </a:endParaRPr>
                     </a:p>
                   </a:txBody>
-                  <a:tcPr marL="91440" marR="91440" marT="45720" marB="45720" anchor="ctr">
+                  <a:tcPr anchor="ctr">
                     <a:lnL w="0" cap="flat" cmpd="sng" algn="ctr">
                       <a:noFill/>
                     </a:lnL>
@@ -8156,7 +7910,7 @@
                     <a:bodyPr/>
                     <a:lstStyle/>
                     <a:p>
-                      <a:pPr algn="r" indent="0" marL="0">
+                      <a:pPr marL="0" indent="0" algn="r">
                         <a:buNone/>
                       </a:pPr>
                       <a:r>
@@ -8177,7 +7931,7 @@
                       </a:endParaRPr>
                     </a:p>
                   </a:txBody>
-                  <a:tcPr marL="91440" marR="91440" marT="45720" marB="45720" anchor="ctr">
+                  <a:tcPr anchor="ctr">
                     <a:lnL w="0" cap="flat" cmpd="sng" algn="ctr">
                       <a:noFill/>
                     </a:lnL>
@@ -8198,6 +7952,11 @@
                     </a:lnB>
                   </a:tcPr>
                 </a:tc>
+                <a:extLst>
+                  <a:ext uri="{0D108BD9-81ED-4DB2-BD59-A6C34878D82A}">
+                    <a16:rowId xmlns:a16="http://schemas.microsoft.com/office/drawing/2014/main" val="10000"/>
+                  </a:ext>
+                </a:extLst>
               </a:tr>
               <a:tr h="438912">
                 <a:tc>
@@ -8205,7 +7964,7 @@
                     <a:bodyPr/>
                     <a:lstStyle/>
                     <a:p>
-                      <a:pPr indent="0" marL="0">
+                      <a:pPr marL="0" indent="0">
                         <a:buNone/>
                       </a:pPr>
                       <a:r>
@@ -8226,7 +7985,2217 @@
                       </a:endParaRPr>
                     </a:p>
                   </a:txBody>
-                  <a:tcPr marL="91440" marR="91440" marT="45720" marB="45720" anchor="ctr">
+                  <a:tcPr anchor="ctr">
+                    <a:lnL w="0" cap="flat" cmpd="sng" algn="ctr">
+                      <a:noFill/>
+                    </a:lnL>
+                    <a:lnR w="0" cap="flat" cmpd="sng" algn="ctr">
+                      <a:noFill/>
+                    </a:lnR>
+                    <a:lnT w="9525" cap="flat" cmpd="sng" algn="ctr">
+                      <a:solidFill>
+                        <a:srgbClr val="DCE2E7"/>
+                      </a:solidFill>
+                      <a:prstDash val="solid"/>
+                      <a:round/>
+                      <a:headEnd type="none" w="med" len="med"/>
+                      <a:tailEnd type="none" w="med" len="med"/>
+                    </a:lnT>
+                    <a:lnB w="9525" cap="flat" cmpd="sng" algn="ctr">
+                      <a:solidFill>
+                        <a:srgbClr val="DCE2E7"/>
+                      </a:solidFill>
+                      <a:prstDash val="solid"/>
+                      <a:round/>
+                      <a:headEnd type="none" w="med" len="med"/>
+                      <a:tailEnd type="none" w="med" len="med"/>
+                    </a:lnB>
+                  </a:tcPr>
+                </a:tc>
+                <a:tc>
+                  <a:txBody>
+                    <a:bodyPr/>
+                    <a:lstStyle/>
+                    <a:p>
+                      <a:pPr marL="0" indent="0" algn="r">
+                        <a:buNone/>
+                      </a:pPr>
+                      <a:r>
+                        <a:rPr lang="en-US" sz="1200" dirty="0">
+                          <a:solidFill>
+                            <a:schemeClr val="tx1"/>
+                          </a:solidFill>
+                          <a:latin typeface="Consolas" pitchFamily="34" charset="0"/>
+                          <a:ea typeface="Consolas" pitchFamily="34" charset="-122"/>
+                          <a:cs typeface="Consolas" pitchFamily="34" charset="-120"/>
+                        </a:rPr>
+                        <a:t>19.746</a:t>
+                      </a:r>
+                      <a:endParaRPr lang="en-US" sz="1200" dirty="0">
+                        <a:latin typeface="Consolas" charset="0"/>
+                        <a:ea typeface="Consolas" charset="0"/>
+                        <a:cs typeface="Consolas" charset="0"/>
+                      </a:endParaRPr>
+                    </a:p>
+                  </a:txBody>
+                  <a:tcPr anchor="ctr">
+                    <a:lnL w="0" cap="flat" cmpd="sng" algn="ctr">
+                      <a:noFill/>
+                    </a:lnL>
+                    <a:lnR w="0" cap="flat" cmpd="sng" algn="ctr">
+                      <a:noFill/>
+                    </a:lnR>
+                    <a:lnT w="9525" cap="flat" cmpd="sng" algn="ctr">
+                      <a:solidFill>
+                        <a:srgbClr val="DCE2E7"/>
+                      </a:solidFill>
+                      <a:prstDash val="solid"/>
+                      <a:round/>
+                      <a:headEnd type="none" w="med" len="med"/>
+                      <a:tailEnd type="none" w="med" len="med"/>
+                    </a:lnT>
+                    <a:lnB w="9525" cap="flat" cmpd="sng" algn="ctr">
+                      <a:solidFill>
+                        <a:srgbClr val="DCE2E7"/>
+                      </a:solidFill>
+                      <a:prstDash val="solid"/>
+                      <a:round/>
+                      <a:headEnd type="none" w="med" len="med"/>
+                      <a:tailEnd type="none" w="med" len="med"/>
+                    </a:lnB>
+                  </a:tcPr>
+                </a:tc>
+                <a:tc>
+                  <a:txBody>
+                    <a:bodyPr/>
+                    <a:lstStyle/>
+                    <a:p>
+                      <a:pPr marL="0" indent="0" algn="r">
+                        <a:buNone/>
+                      </a:pPr>
+                      <a:r>
+                        <a:rPr lang="en-US" sz="1200" dirty="0">
+                          <a:solidFill>
+                            <a:schemeClr val="tx1"/>
+                          </a:solidFill>
+                          <a:latin typeface="Consolas" pitchFamily="34" charset="0"/>
+                          <a:ea typeface="Consolas" pitchFamily="34" charset="-122"/>
+                          <a:cs typeface="Consolas" pitchFamily="34" charset="-120"/>
+                        </a:rPr>
+                        <a:t>60,6 %</a:t>
+                      </a:r>
+                      <a:endParaRPr lang="en-US" sz="1200" dirty="0">
+                        <a:latin typeface="Consolas" charset="0"/>
+                        <a:ea typeface="Consolas" charset="0"/>
+                        <a:cs typeface="Consolas" charset="0"/>
+                      </a:endParaRPr>
+                    </a:p>
+                  </a:txBody>
+                  <a:tcPr anchor="ctr">
+                    <a:lnL w="0" cap="flat" cmpd="sng" algn="ctr">
+                      <a:noFill/>
+                    </a:lnL>
+                    <a:lnR w="0" cap="flat" cmpd="sng" algn="ctr">
+                      <a:noFill/>
+                    </a:lnR>
+                    <a:lnT w="9525" cap="flat" cmpd="sng" algn="ctr">
+                      <a:solidFill>
+                        <a:srgbClr val="DCE2E7"/>
+                      </a:solidFill>
+                      <a:prstDash val="solid"/>
+                      <a:round/>
+                      <a:headEnd type="none" w="med" len="med"/>
+                      <a:tailEnd type="none" w="med" len="med"/>
+                    </a:lnT>
+                    <a:lnB w="9525" cap="flat" cmpd="sng" algn="ctr">
+                      <a:solidFill>
+                        <a:srgbClr val="DCE2E7"/>
+                      </a:solidFill>
+                      <a:prstDash val="solid"/>
+                      <a:round/>
+                      <a:headEnd type="none" w="med" len="med"/>
+                      <a:tailEnd type="none" w="med" len="med"/>
+                    </a:lnB>
+                  </a:tcPr>
+                </a:tc>
+                <a:tc>
+                  <a:txBody>
+                    <a:bodyPr/>
+                    <a:lstStyle/>
+                    <a:p>
+                      <a:pPr marL="0" indent="0" algn="r">
+                        <a:buNone/>
+                      </a:pPr>
+                      <a:r>
+                        <a:rPr lang="en-US" sz="1200" dirty="0">
+                          <a:solidFill>
+                            <a:schemeClr val="tx1"/>
+                          </a:solidFill>
+                          <a:latin typeface="Consolas" pitchFamily="34" charset="0"/>
+                          <a:ea typeface="Consolas" pitchFamily="34" charset="-122"/>
+                          <a:cs typeface="Consolas" pitchFamily="34" charset="-120"/>
+                        </a:rPr>
+                        <a:t>161,3 M$</a:t>
+                      </a:r>
+                      <a:endParaRPr lang="en-US" sz="1200" dirty="0">
+                        <a:latin typeface="Consolas" charset="0"/>
+                        <a:ea typeface="Consolas" charset="0"/>
+                        <a:cs typeface="Consolas" charset="0"/>
+                      </a:endParaRPr>
+                    </a:p>
+                  </a:txBody>
+                  <a:tcPr anchor="ctr">
+                    <a:lnL w="0" cap="flat" cmpd="sng" algn="ctr">
+                      <a:noFill/>
+                    </a:lnL>
+                    <a:lnR w="0" cap="flat" cmpd="sng" algn="ctr">
+                      <a:noFill/>
+                    </a:lnR>
+                    <a:lnT w="9525" cap="flat" cmpd="sng" algn="ctr">
+                      <a:solidFill>
+                        <a:srgbClr val="DCE2E7"/>
+                      </a:solidFill>
+                      <a:prstDash val="solid"/>
+                      <a:round/>
+                      <a:headEnd type="none" w="med" len="med"/>
+                      <a:tailEnd type="none" w="med" len="med"/>
+                    </a:lnT>
+                    <a:lnB w="9525" cap="flat" cmpd="sng" algn="ctr">
+                      <a:solidFill>
+                        <a:srgbClr val="DCE2E7"/>
+                      </a:solidFill>
+                      <a:prstDash val="solid"/>
+                      <a:round/>
+                      <a:headEnd type="none" w="med" len="med"/>
+                      <a:tailEnd type="none" w="med" len="med"/>
+                    </a:lnB>
+                  </a:tcPr>
+                </a:tc>
+                <a:tc>
+                  <a:txBody>
+                    <a:bodyPr/>
+                    <a:lstStyle/>
+                    <a:p>
+                      <a:pPr marL="0" indent="0" algn="r">
+                        <a:buNone/>
+                      </a:pPr>
+                      <a:r>
+                        <a:rPr lang="en-US" sz="1200" dirty="0">
+                          <a:solidFill>
+                            <a:schemeClr val="tx1"/>
+                          </a:solidFill>
+                          <a:latin typeface="Consolas" pitchFamily="34" charset="0"/>
+                          <a:ea typeface="Consolas" pitchFamily="34" charset="-122"/>
+                          <a:cs typeface="Consolas" pitchFamily="34" charset="-120"/>
+                        </a:rPr>
+                        <a:t>8,2 %</a:t>
+                      </a:r>
+                      <a:endParaRPr lang="en-US" sz="1200" dirty="0">
+                        <a:latin typeface="Consolas" charset="0"/>
+                        <a:ea typeface="Consolas" charset="0"/>
+                        <a:cs typeface="Consolas" charset="0"/>
+                      </a:endParaRPr>
+                    </a:p>
+                  </a:txBody>
+                  <a:tcPr anchor="ctr">
+                    <a:lnL w="0" cap="flat" cmpd="sng" algn="ctr">
+                      <a:noFill/>
+                    </a:lnL>
+                    <a:lnR w="0" cap="flat" cmpd="sng" algn="ctr">
+                      <a:noFill/>
+                    </a:lnR>
+                    <a:lnT w="9525" cap="flat" cmpd="sng" algn="ctr">
+                      <a:solidFill>
+                        <a:srgbClr val="DCE2E7"/>
+                      </a:solidFill>
+                      <a:prstDash val="solid"/>
+                      <a:round/>
+                      <a:headEnd type="none" w="med" len="med"/>
+                      <a:tailEnd type="none" w="med" len="med"/>
+                    </a:lnT>
+                    <a:lnB w="9525" cap="flat" cmpd="sng" algn="ctr">
+                      <a:solidFill>
+                        <a:srgbClr val="DCE2E7"/>
+                      </a:solidFill>
+                      <a:prstDash val="solid"/>
+                      <a:round/>
+                      <a:headEnd type="none" w="med" len="med"/>
+                      <a:tailEnd type="none" w="med" len="med"/>
+                    </a:lnB>
+                  </a:tcPr>
+                </a:tc>
+                <a:extLst>
+                  <a:ext uri="{0D108BD9-81ED-4DB2-BD59-A6C34878D82A}">
+                    <a16:rowId xmlns:a16="http://schemas.microsoft.com/office/drawing/2014/main" val="10001"/>
+                  </a:ext>
+                </a:extLst>
+              </a:tr>
+              <a:tr h="438912">
+                <a:tc>
+                  <a:txBody>
+                    <a:bodyPr/>
+                    <a:lstStyle/>
+                    <a:p>
+                      <a:pPr marL="0" indent="0">
+                        <a:buNone/>
+                      </a:pPr>
+                      <a:r>
+                        <a:rPr lang="en-US" sz="1200" b="1" dirty="0">
+                          <a:solidFill>
+                            <a:schemeClr val="accent3"/>
+                          </a:solidFill>
+                          <a:latin typeface="Calibri" pitchFamily="34" charset="0"/>
+                          <a:ea typeface="Calibri" pitchFamily="34" charset="-122"/>
+                          <a:cs typeface="Calibri" pitchFamily="34" charset="-120"/>
+                        </a:rPr>
+                        <a:t>MODERADO</a:t>
+                      </a:r>
+                      <a:endParaRPr lang="en-US" sz="1200" dirty="0">
+                        <a:latin typeface="Calibri" charset="0"/>
+                        <a:ea typeface="Calibri" charset="0"/>
+                        <a:cs typeface="Calibri" charset="0"/>
+                      </a:endParaRPr>
+                    </a:p>
+                  </a:txBody>
+                  <a:tcPr anchor="ctr">
+                    <a:lnL w="0" cap="flat" cmpd="sng" algn="ctr">
+                      <a:noFill/>
+                    </a:lnL>
+                    <a:lnR w="0" cap="flat" cmpd="sng" algn="ctr">
+                      <a:noFill/>
+                    </a:lnR>
+                    <a:lnT w="9525" cap="flat" cmpd="sng" algn="ctr">
+                      <a:solidFill>
+                        <a:srgbClr val="DCE2E7"/>
+                      </a:solidFill>
+                      <a:prstDash val="solid"/>
+                      <a:round/>
+                      <a:headEnd type="none" w="med" len="med"/>
+                      <a:tailEnd type="none" w="med" len="med"/>
+                    </a:lnT>
+                    <a:lnB w="9525" cap="flat" cmpd="sng" algn="ctr">
+                      <a:solidFill>
+                        <a:srgbClr val="DCE2E7"/>
+                      </a:solidFill>
+                      <a:prstDash val="solid"/>
+                      <a:round/>
+                      <a:headEnd type="none" w="med" len="med"/>
+                      <a:tailEnd type="none" w="med" len="med"/>
+                    </a:lnB>
+                  </a:tcPr>
+                </a:tc>
+                <a:tc>
+                  <a:txBody>
+                    <a:bodyPr/>
+                    <a:lstStyle/>
+                    <a:p>
+                      <a:pPr marL="0" indent="0" algn="r">
+                        <a:buNone/>
+                      </a:pPr>
+                      <a:r>
+                        <a:rPr lang="en-US" sz="1200" dirty="0">
+                          <a:solidFill>
+                            <a:schemeClr val="tx1"/>
+                          </a:solidFill>
+                          <a:latin typeface="Consolas" pitchFamily="34" charset="0"/>
+                          <a:ea typeface="Consolas" pitchFamily="34" charset="-122"/>
+                          <a:cs typeface="Consolas" pitchFamily="34" charset="-120"/>
+                        </a:rPr>
+                        <a:t>11.674</a:t>
+                      </a:r>
+                      <a:endParaRPr lang="en-US" sz="1200" dirty="0">
+                        <a:latin typeface="Consolas" charset="0"/>
+                        <a:ea typeface="Consolas" charset="0"/>
+                        <a:cs typeface="Consolas" charset="0"/>
+                      </a:endParaRPr>
+                    </a:p>
+                  </a:txBody>
+                  <a:tcPr anchor="ctr">
+                    <a:lnL w="0" cap="flat" cmpd="sng" algn="ctr">
+                      <a:noFill/>
+                    </a:lnL>
+                    <a:lnR w="0" cap="flat" cmpd="sng" algn="ctr">
+                      <a:noFill/>
+                    </a:lnR>
+                    <a:lnT w="9525" cap="flat" cmpd="sng" algn="ctr">
+                      <a:solidFill>
+                        <a:srgbClr val="DCE2E7"/>
+                      </a:solidFill>
+                      <a:prstDash val="solid"/>
+                      <a:round/>
+                      <a:headEnd type="none" w="med" len="med"/>
+                      <a:tailEnd type="none" w="med" len="med"/>
+                    </a:lnT>
+                    <a:lnB w="9525" cap="flat" cmpd="sng" algn="ctr">
+                      <a:solidFill>
+                        <a:srgbClr val="DCE2E7"/>
+                      </a:solidFill>
+                      <a:prstDash val="solid"/>
+                      <a:round/>
+                      <a:headEnd type="none" w="med" len="med"/>
+                      <a:tailEnd type="none" w="med" len="med"/>
+                    </a:lnB>
+                  </a:tcPr>
+                </a:tc>
+                <a:tc>
+                  <a:txBody>
+                    <a:bodyPr/>
+                    <a:lstStyle/>
+                    <a:p>
+                      <a:pPr marL="0" indent="0" algn="r">
+                        <a:buNone/>
+                      </a:pPr>
+                      <a:r>
+                        <a:rPr lang="en-US" sz="1200" dirty="0">
+                          <a:solidFill>
+                            <a:schemeClr val="tx1"/>
+                          </a:solidFill>
+                          <a:latin typeface="Consolas" pitchFamily="34" charset="0"/>
+                          <a:ea typeface="Consolas" pitchFamily="34" charset="-122"/>
+                          <a:cs typeface="Consolas" pitchFamily="34" charset="-120"/>
+                        </a:rPr>
+                        <a:t>35,8 %</a:t>
+                      </a:r>
+                      <a:endParaRPr lang="en-US" sz="1200" dirty="0">
+                        <a:latin typeface="Consolas" charset="0"/>
+                        <a:ea typeface="Consolas" charset="0"/>
+                        <a:cs typeface="Consolas" charset="0"/>
+                      </a:endParaRPr>
+                    </a:p>
+                  </a:txBody>
+                  <a:tcPr anchor="ctr">
+                    <a:lnL w="0" cap="flat" cmpd="sng" algn="ctr">
+                      <a:noFill/>
+                    </a:lnL>
+                    <a:lnR w="0" cap="flat" cmpd="sng" algn="ctr">
+                      <a:noFill/>
+                    </a:lnR>
+                    <a:lnT w="9525" cap="flat" cmpd="sng" algn="ctr">
+                      <a:solidFill>
+                        <a:srgbClr val="DCE2E7"/>
+                      </a:solidFill>
+                      <a:prstDash val="solid"/>
+                      <a:round/>
+                      <a:headEnd type="none" w="med" len="med"/>
+                      <a:tailEnd type="none" w="med" len="med"/>
+                    </a:lnT>
+                    <a:lnB w="9525" cap="flat" cmpd="sng" algn="ctr">
+                      <a:solidFill>
+                        <a:srgbClr val="DCE2E7"/>
+                      </a:solidFill>
+                      <a:prstDash val="solid"/>
+                      <a:round/>
+                      <a:headEnd type="none" w="med" len="med"/>
+                      <a:tailEnd type="none" w="med" len="med"/>
+                    </a:lnB>
+                  </a:tcPr>
+                </a:tc>
+                <a:tc>
+                  <a:txBody>
+                    <a:bodyPr/>
+                    <a:lstStyle/>
+                    <a:p>
+                      <a:pPr marL="0" indent="0" algn="r">
+                        <a:buNone/>
+                      </a:pPr>
+                      <a:r>
+                        <a:rPr lang="en-US" sz="1200" dirty="0">
+                          <a:solidFill>
+                            <a:schemeClr val="tx1"/>
+                          </a:solidFill>
+                          <a:latin typeface="Consolas" pitchFamily="34" charset="0"/>
+                          <a:ea typeface="Consolas" pitchFamily="34" charset="-122"/>
+                          <a:cs typeface="Consolas" pitchFamily="34" charset="-120"/>
+                        </a:rPr>
+                        <a:t>132,4 M$</a:t>
+                      </a:r>
+                      <a:endParaRPr lang="en-US" sz="1200" dirty="0">
+                        <a:latin typeface="Consolas" charset="0"/>
+                        <a:ea typeface="Consolas" charset="0"/>
+                        <a:cs typeface="Consolas" charset="0"/>
+                      </a:endParaRPr>
+                    </a:p>
+                  </a:txBody>
+                  <a:tcPr anchor="ctr">
+                    <a:lnL w="0" cap="flat" cmpd="sng" algn="ctr">
+                      <a:noFill/>
+                    </a:lnL>
+                    <a:lnR w="0" cap="flat" cmpd="sng" algn="ctr">
+                      <a:noFill/>
+                    </a:lnR>
+                    <a:lnT w="9525" cap="flat" cmpd="sng" algn="ctr">
+                      <a:solidFill>
+                        <a:srgbClr val="DCE2E7"/>
+                      </a:solidFill>
+                      <a:prstDash val="solid"/>
+                      <a:round/>
+                      <a:headEnd type="none" w="med" len="med"/>
+                      <a:tailEnd type="none" w="med" len="med"/>
+                    </a:lnT>
+                    <a:lnB w="9525" cap="flat" cmpd="sng" algn="ctr">
+                      <a:solidFill>
+                        <a:srgbClr val="DCE2E7"/>
+                      </a:solidFill>
+                      <a:prstDash val="solid"/>
+                      <a:round/>
+                      <a:headEnd type="none" w="med" len="med"/>
+                      <a:tailEnd type="none" w="med" len="med"/>
+                    </a:lnB>
+                  </a:tcPr>
+                </a:tc>
+                <a:tc>
+                  <a:txBody>
+                    <a:bodyPr/>
+                    <a:lstStyle/>
+                    <a:p>
+                      <a:pPr marL="0" indent="0" algn="r">
+                        <a:buNone/>
+                      </a:pPr>
+                      <a:r>
+                        <a:rPr lang="en-US" sz="1200" dirty="0">
+                          <a:solidFill>
+                            <a:schemeClr val="tx1"/>
+                          </a:solidFill>
+                          <a:latin typeface="Consolas" pitchFamily="34" charset="0"/>
+                          <a:ea typeface="Consolas" pitchFamily="34" charset="-122"/>
+                          <a:cs typeface="Consolas" pitchFamily="34" charset="-120"/>
+                        </a:rPr>
+                        <a:t>39,8 %</a:t>
+                      </a:r>
+                      <a:endParaRPr lang="en-US" sz="1200" dirty="0">
+                        <a:latin typeface="Consolas" charset="0"/>
+                        <a:ea typeface="Consolas" charset="0"/>
+                        <a:cs typeface="Consolas" charset="0"/>
+                      </a:endParaRPr>
+                    </a:p>
+                  </a:txBody>
+                  <a:tcPr anchor="ctr">
+                    <a:lnL w="0" cap="flat" cmpd="sng" algn="ctr">
+                      <a:noFill/>
+                    </a:lnL>
+                    <a:lnR w="0" cap="flat" cmpd="sng" algn="ctr">
+                      <a:noFill/>
+                    </a:lnR>
+                    <a:lnT w="9525" cap="flat" cmpd="sng" algn="ctr">
+                      <a:solidFill>
+                        <a:srgbClr val="DCE2E7"/>
+                      </a:solidFill>
+                      <a:prstDash val="solid"/>
+                      <a:round/>
+                      <a:headEnd type="none" w="med" len="med"/>
+                      <a:tailEnd type="none" w="med" len="med"/>
+                    </a:lnT>
+                    <a:lnB w="9525" cap="flat" cmpd="sng" algn="ctr">
+                      <a:solidFill>
+                        <a:srgbClr val="DCE2E7"/>
+                      </a:solidFill>
+                      <a:prstDash val="solid"/>
+                      <a:round/>
+                      <a:headEnd type="none" w="med" len="med"/>
+                      <a:tailEnd type="none" w="med" len="med"/>
+                    </a:lnB>
+                  </a:tcPr>
+                </a:tc>
+                <a:extLst>
+                  <a:ext uri="{0D108BD9-81ED-4DB2-BD59-A6C34878D82A}">
+                    <a16:rowId xmlns:a16="http://schemas.microsoft.com/office/drawing/2014/main" val="10002"/>
+                  </a:ext>
+                </a:extLst>
+              </a:tr>
+              <a:tr h="438912">
+                <a:tc>
+                  <a:txBody>
+                    <a:bodyPr/>
+                    <a:lstStyle/>
+                    <a:p>
+                      <a:pPr marL="0" indent="0">
+                        <a:buNone/>
+                      </a:pPr>
+                      <a:r>
+                        <a:rPr lang="en-US" sz="1200" b="1" dirty="0">
+                          <a:solidFill>
+                            <a:schemeClr val="accent4"/>
+                          </a:solidFill>
+                          <a:latin typeface="Calibri" pitchFamily="34" charset="0"/>
+                          <a:ea typeface="Calibri" pitchFamily="34" charset="-122"/>
+                          <a:cs typeface="Calibri" pitchFamily="34" charset="-120"/>
+                        </a:rPr>
+                        <a:t>CRÍTICO</a:t>
+                      </a:r>
+                      <a:endParaRPr lang="en-US" sz="1200" dirty="0">
+                        <a:latin typeface="Calibri" charset="0"/>
+                        <a:ea typeface="Calibri" charset="0"/>
+                        <a:cs typeface="Calibri" charset="0"/>
+                      </a:endParaRPr>
+                    </a:p>
+                  </a:txBody>
+                  <a:tcPr anchor="ctr">
+                    <a:lnL w="0" cap="flat" cmpd="sng" algn="ctr">
+                      <a:noFill/>
+                    </a:lnL>
+                    <a:lnR w="0" cap="flat" cmpd="sng" algn="ctr">
+                      <a:noFill/>
+                    </a:lnR>
+                    <a:lnT w="9525" cap="flat" cmpd="sng" algn="ctr">
+                      <a:solidFill>
+                        <a:srgbClr val="DCE2E7"/>
+                      </a:solidFill>
+                      <a:prstDash val="solid"/>
+                      <a:round/>
+                      <a:headEnd type="none" w="med" len="med"/>
+                      <a:tailEnd type="none" w="med" len="med"/>
+                    </a:lnT>
+                    <a:lnB w="9525" cap="flat" cmpd="sng" algn="ctr">
+                      <a:solidFill>
+                        <a:srgbClr val="DCE2E7"/>
+                      </a:solidFill>
+                      <a:prstDash val="solid"/>
+                      <a:round/>
+                      <a:headEnd type="none" w="med" len="med"/>
+                      <a:tailEnd type="none" w="med" len="med"/>
+                    </a:lnB>
+                  </a:tcPr>
+                </a:tc>
+                <a:tc>
+                  <a:txBody>
+                    <a:bodyPr/>
+                    <a:lstStyle/>
+                    <a:p>
+                      <a:pPr marL="0" indent="0" algn="r">
+                        <a:buNone/>
+                      </a:pPr>
+                      <a:r>
+                        <a:rPr lang="en-US" sz="1200" dirty="0">
+                          <a:solidFill>
+                            <a:schemeClr val="tx1"/>
+                          </a:solidFill>
+                          <a:latin typeface="Consolas" pitchFamily="34" charset="0"/>
+                          <a:ea typeface="Consolas" pitchFamily="34" charset="-122"/>
+                          <a:cs typeface="Consolas" pitchFamily="34" charset="-120"/>
+                        </a:rPr>
+                        <a:t>1.161</a:t>
+                      </a:r>
+                      <a:endParaRPr lang="en-US" sz="1200" dirty="0">
+                        <a:latin typeface="Consolas" charset="0"/>
+                        <a:ea typeface="Consolas" charset="0"/>
+                        <a:cs typeface="Consolas" charset="0"/>
+                      </a:endParaRPr>
+                    </a:p>
+                  </a:txBody>
+                  <a:tcPr anchor="ctr">
+                    <a:lnL w="0" cap="flat" cmpd="sng" algn="ctr">
+                      <a:noFill/>
+                    </a:lnL>
+                    <a:lnR w="0" cap="flat" cmpd="sng" algn="ctr">
+                      <a:noFill/>
+                    </a:lnR>
+                    <a:lnT w="9525" cap="flat" cmpd="sng" algn="ctr">
+                      <a:solidFill>
+                        <a:srgbClr val="DCE2E7"/>
+                      </a:solidFill>
+                      <a:prstDash val="solid"/>
+                      <a:round/>
+                      <a:headEnd type="none" w="med" len="med"/>
+                      <a:tailEnd type="none" w="med" len="med"/>
+                    </a:lnT>
+                    <a:lnB w="9525" cap="flat" cmpd="sng" algn="ctr">
+                      <a:solidFill>
+                        <a:srgbClr val="DCE2E7"/>
+                      </a:solidFill>
+                      <a:prstDash val="solid"/>
+                      <a:round/>
+                      <a:headEnd type="none" w="med" len="med"/>
+                      <a:tailEnd type="none" w="med" len="med"/>
+                    </a:lnB>
+                  </a:tcPr>
+                </a:tc>
+                <a:tc>
+                  <a:txBody>
+                    <a:bodyPr/>
+                    <a:lstStyle/>
+                    <a:p>
+                      <a:pPr marL="0" indent="0" algn="r">
+                        <a:buNone/>
+                      </a:pPr>
+                      <a:r>
+                        <a:rPr lang="en-US" sz="1200" dirty="0">
+                          <a:solidFill>
+                            <a:schemeClr val="tx1"/>
+                          </a:solidFill>
+                          <a:latin typeface="Consolas" pitchFamily="34" charset="0"/>
+                          <a:ea typeface="Consolas" pitchFamily="34" charset="-122"/>
+                          <a:cs typeface="Consolas" pitchFamily="34" charset="-120"/>
+                        </a:rPr>
+                        <a:t>3,6 %</a:t>
+                      </a:r>
+                      <a:endParaRPr lang="en-US" sz="1200" dirty="0">
+                        <a:latin typeface="Consolas" charset="0"/>
+                        <a:ea typeface="Consolas" charset="0"/>
+                        <a:cs typeface="Consolas" charset="0"/>
+                      </a:endParaRPr>
+                    </a:p>
+                  </a:txBody>
+                  <a:tcPr anchor="ctr">
+                    <a:lnL w="0" cap="flat" cmpd="sng" algn="ctr">
+                      <a:noFill/>
+                    </a:lnL>
+                    <a:lnR w="0" cap="flat" cmpd="sng" algn="ctr">
+                      <a:noFill/>
+                    </a:lnR>
+                    <a:lnT w="9525" cap="flat" cmpd="sng" algn="ctr">
+                      <a:solidFill>
+                        <a:srgbClr val="DCE2E7"/>
+                      </a:solidFill>
+                      <a:prstDash val="solid"/>
+                      <a:round/>
+                      <a:headEnd type="none" w="med" len="med"/>
+                      <a:tailEnd type="none" w="med" len="med"/>
+                    </a:lnT>
+                    <a:lnB w="9525" cap="flat" cmpd="sng" algn="ctr">
+                      <a:solidFill>
+                        <a:srgbClr val="DCE2E7"/>
+                      </a:solidFill>
+                      <a:prstDash val="solid"/>
+                      <a:round/>
+                      <a:headEnd type="none" w="med" len="med"/>
+                      <a:tailEnd type="none" w="med" len="med"/>
+                    </a:lnB>
+                  </a:tcPr>
+                </a:tc>
+                <a:tc>
+                  <a:txBody>
+                    <a:bodyPr/>
+                    <a:lstStyle/>
+                    <a:p>
+                      <a:pPr marL="0" indent="0" algn="r">
+                        <a:buNone/>
+                      </a:pPr>
+                      <a:r>
+                        <a:rPr lang="en-US" sz="1200" dirty="0">
+                          <a:solidFill>
+                            <a:schemeClr val="tx1"/>
+                          </a:solidFill>
+                          <a:latin typeface="Consolas" pitchFamily="34" charset="0"/>
+                          <a:ea typeface="Consolas" pitchFamily="34" charset="-122"/>
+                          <a:cs typeface="Consolas" pitchFamily="34" charset="-120"/>
+                        </a:rPr>
+                        <a:t>18,8 M$</a:t>
+                      </a:r>
+                      <a:endParaRPr lang="en-US" sz="1200" dirty="0">
+                        <a:latin typeface="Consolas" charset="0"/>
+                        <a:ea typeface="Consolas" charset="0"/>
+                        <a:cs typeface="Consolas" charset="0"/>
+                      </a:endParaRPr>
+                    </a:p>
+                  </a:txBody>
+                  <a:tcPr anchor="ctr">
+                    <a:lnL w="0" cap="flat" cmpd="sng" algn="ctr">
+                      <a:noFill/>
+                    </a:lnL>
+                    <a:lnR w="0" cap="flat" cmpd="sng" algn="ctr">
+                      <a:noFill/>
+                    </a:lnR>
+                    <a:lnT w="9525" cap="flat" cmpd="sng" algn="ctr">
+                      <a:solidFill>
+                        <a:srgbClr val="DCE2E7"/>
+                      </a:solidFill>
+                      <a:prstDash val="solid"/>
+                      <a:round/>
+                      <a:headEnd type="none" w="med" len="med"/>
+                      <a:tailEnd type="none" w="med" len="med"/>
+                    </a:lnT>
+                    <a:lnB w="9525" cap="flat" cmpd="sng" algn="ctr">
+                      <a:solidFill>
+                        <a:srgbClr val="DCE2E7"/>
+                      </a:solidFill>
+                      <a:prstDash val="solid"/>
+                      <a:round/>
+                      <a:headEnd type="none" w="med" len="med"/>
+                      <a:tailEnd type="none" w="med" len="med"/>
+                    </a:lnB>
+                  </a:tcPr>
+                </a:tc>
+                <a:tc>
+                  <a:txBody>
+                    <a:bodyPr/>
+                    <a:lstStyle/>
+                    <a:p>
+                      <a:pPr marL="0" indent="0" algn="r">
+                        <a:buNone/>
+                      </a:pPr>
+                      <a:r>
+                        <a:rPr lang="en-US" sz="1200" dirty="0">
+                          <a:solidFill>
+                            <a:schemeClr val="tx1"/>
+                          </a:solidFill>
+                          <a:latin typeface="Consolas" pitchFamily="34" charset="0"/>
+                          <a:ea typeface="Consolas" pitchFamily="34" charset="-122"/>
+                          <a:cs typeface="Consolas" pitchFamily="34" charset="-120"/>
+                        </a:rPr>
+                        <a:t>72,1 %</a:t>
+                      </a:r>
+                      <a:endParaRPr lang="en-US" sz="1200" dirty="0">
+                        <a:latin typeface="Consolas" charset="0"/>
+                        <a:ea typeface="Consolas" charset="0"/>
+                        <a:cs typeface="Consolas" charset="0"/>
+                      </a:endParaRPr>
+                    </a:p>
+                  </a:txBody>
+                  <a:tcPr anchor="ctr">
+                    <a:lnL w="0" cap="flat" cmpd="sng" algn="ctr">
+                      <a:noFill/>
+                    </a:lnL>
+                    <a:lnR w="0" cap="flat" cmpd="sng" algn="ctr">
+                      <a:noFill/>
+                    </a:lnR>
+                    <a:lnT w="9525" cap="flat" cmpd="sng" algn="ctr">
+                      <a:solidFill>
+                        <a:srgbClr val="DCE2E7"/>
+                      </a:solidFill>
+                      <a:prstDash val="solid"/>
+                      <a:round/>
+                      <a:headEnd type="none" w="med" len="med"/>
+                      <a:tailEnd type="none" w="med" len="med"/>
+                    </a:lnT>
+                    <a:lnB w="9525" cap="flat" cmpd="sng" algn="ctr">
+                      <a:solidFill>
+                        <a:srgbClr val="DCE2E7"/>
+                      </a:solidFill>
+                      <a:prstDash val="solid"/>
+                      <a:round/>
+                      <a:headEnd type="none" w="med" len="med"/>
+                      <a:tailEnd type="none" w="med" len="med"/>
+                    </a:lnB>
+                  </a:tcPr>
+                </a:tc>
+                <a:extLst>
+                  <a:ext uri="{0D108BD9-81ED-4DB2-BD59-A6C34878D82A}">
+                    <a16:rowId xmlns:a16="http://schemas.microsoft.com/office/drawing/2014/main" val="10003"/>
+                  </a:ext>
+                </a:extLst>
+              </a:tr>
+            </a:tbl>
+          </a:graphicData>
+        </a:graphic>
+      </p:graphicFrame>
+      <p:sp>
+        <p:nvSpPr>
+          <p:cNvPr id="6" name="Tarjeta barras"/>
+          <p:cNvSpPr/>
+          <p:nvPr/>
+        </p:nvSpPr>
+        <p:spPr>
+          <a:xfrm>
+            <a:off x="5349240" y="1325880"/>
+            <a:ext cx="3337560" cy="2103120"/>
+          </a:xfrm>
+          <a:prstGeom prst="roundRect">
+            <a:avLst>
+              <a:gd name="adj" fmla="val 3043"/>
+            </a:avLst>
+          </a:prstGeom>
+          <a:solidFill>
+            <a:schemeClr val="bg1"/>
+          </a:solidFill>
+          <a:ln w="9525">
+            <a:solidFill>
+              <a:schemeClr val="accent5"/>
+            </a:solidFill>
+            <a:prstDash val="solid"/>
+          </a:ln>
+        </p:spPr>
+      </p:sp>
+      <p:sp>
+        <p:nvSpPr>
+          <p:cNvPr id="5" name="Titular barras"/>
+          <p:cNvSpPr txBox="1"/>
+          <p:nvPr/>
+        </p:nvSpPr>
+        <p:spPr>
+          <a:xfrm>
+            <a:off x="5532120" y="1444752"/>
+            <a:ext cx="3017520" cy="256032"/>
+          </a:xfrm>
+          <a:prstGeom prst="rect">
+            <a:avLst/>
+          </a:prstGeom>
+          <a:noFill/>
+          <a:ln/>
+        </p:spPr>
+        <p:txBody>
+          <a:bodyPr wrap="square" lIns="0" tIns="0" rIns="0" bIns="0" rtlCol="0" anchor="ctr"/>
+          <a:lstStyle/>
+          <a:p>
+            <a:pPr marL="0" indent="0">
+              <a:buNone/>
+            </a:pPr>
+            <a:r>
+              <a:rPr lang="en-US" sz="900" b="1" kern="0" spc="100" dirty="0">
+                <a:solidFill>
+                  <a:schemeClr val="tx2"/>
+                </a:solidFill>
+                <a:latin typeface="Calibri" pitchFamily="34" charset="0"/>
+                <a:ea typeface="Calibri" pitchFamily="34" charset="-122"/>
+                <a:cs typeface="Calibri" pitchFamily="34" charset="-120"/>
+              </a:rPr>
+              <a:t>TASA DE IMPAGO REAL · ESCALA 0-100 %</a:t>
+            </a:r>
+            <a:endParaRPr lang="en-US" sz="900" dirty="0"/>
+          </a:p>
+        </p:txBody>
+      </p:sp>
+      <p:sp>
+        <p:nvSpPr>
+          <p:cNvPr id="8" name="Etiqueta barra BAJO"/>
+          <p:cNvSpPr txBox="1"/>
+          <p:nvPr/>
+        </p:nvSpPr>
+        <p:spPr>
+          <a:xfrm>
+            <a:off x="5532120" y="1828800"/>
+            <a:ext cx="868680" cy="274320"/>
+          </a:xfrm>
+          <a:prstGeom prst="rect">
+            <a:avLst/>
+          </a:prstGeom>
+          <a:noFill/>
+          <a:ln/>
+        </p:spPr>
+        <p:txBody>
+          <a:bodyPr wrap="square" lIns="0" tIns="0" rIns="0" bIns="0" rtlCol="0" anchor="ctr"/>
+          <a:lstStyle/>
+          <a:p>
+            <a:pPr marL="0" indent="0">
+              <a:buNone/>
+            </a:pPr>
+            <a:r>
+              <a:rPr lang="en-US" sz="1000" b="1" dirty="0">
+                <a:solidFill>
+                  <a:schemeClr val="accent2"/>
+                </a:solidFill>
+                <a:latin typeface="Calibri" pitchFamily="34" charset="0"/>
+                <a:ea typeface="Calibri" pitchFamily="34" charset="-122"/>
+                <a:cs typeface="Calibri" pitchFamily="34" charset="-120"/>
+              </a:rPr>
+              <a:t>BAJO</a:t>
+            </a:r>
+            <a:endParaRPr lang="en-US" sz="1000" dirty="0"/>
+          </a:p>
+        </p:txBody>
+      </p:sp>
+      <p:sp>
+        <p:nvSpPr>
+          <p:cNvPr id="9" name="Pista BAJO"/>
+          <p:cNvSpPr/>
+          <p:nvPr/>
+        </p:nvSpPr>
+        <p:spPr>
+          <a:xfrm>
+            <a:off x="6446520" y="1847088"/>
+            <a:ext cx="2057400" cy="237744"/>
+          </a:xfrm>
+          <a:prstGeom prst="rect">
+            <a:avLst/>
+          </a:prstGeom>
+          <a:solidFill>
+            <a:schemeClr val="bg2"/>
+          </a:solidFill>
+          <a:ln w="12700">
+            <a:solidFill>
+              <a:schemeClr val="bg2"/>
+            </a:solidFill>
+            <a:prstDash val="solid"/>
+          </a:ln>
+        </p:spPr>
+      </p:sp>
+      <p:sp>
+        <p:nvSpPr>
+          <p:cNvPr id="10" name="Barra BAJO"/>
+          <p:cNvSpPr/>
+          <p:nvPr/>
+        </p:nvSpPr>
+        <p:spPr>
+          <a:xfrm>
+            <a:off x="6446520" y="1847088"/>
+            <a:ext cx="168707" cy="237744"/>
+          </a:xfrm>
+          <a:prstGeom prst="rect">
+            <a:avLst/>
+          </a:prstGeom>
+          <a:solidFill>
+            <a:schemeClr val="accent2"/>
+          </a:solidFill>
+          <a:ln w="12700">
+            <a:solidFill>
+              <a:schemeClr val="accent2"/>
+            </a:solidFill>
+            <a:prstDash val="solid"/>
+          </a:ln>
+        </p:spPr>
+      </p:sp>
+      <p:sp>
+        <p:nvSpPr>
+          <p:cNvPr id="11" name="Valor barra BAJO"/>
+          <p:cNvSpPr txBox="1"/>
+          <p:nvPr/>
+        </p:nvSpPr>
+        <p:spPr>
+          <a:xfrm>
+            <a:off x="6660947" y="1828800"/>
+            <a:ext cx="640080" cy="274320"/>
+          </a:xfrm>
+          <a:prstGeom prst="rect">
+            <a:avLst/>
+          </a:prstGeom>
+          <a:noFill/>
+          <a:ln/>
+        </p:spPr>
+        <p:txBody>
+          <a:bodyPr wrap="square" lIns="0" tIns="0" rIns="0" bIns="0" rtlCol="0" anchor="ctr"/>
+          <a:lstStyle/>
+          <a:p>
+            <a:pPr marL="0" indent="0">
+              <a:buNone/>
+            </a:pPr>
+            <a:r>
+              <a:rPr lang="en-US" sz="1000" dirty="0">
+                <a:solidFill>
+                  <a:schemeClr val="tx1"/>
+                </a:solidFill>
+                <a:latin typeface="Consolas" pitchFamily="34" charset="0"/>
+                <a:ea typeface="Consolas" pitchFamily="34" charset="-122"/>
+                <a:cs typeface="Consolas" pitchFamily="34" charset="-120"/>
+              </a:rPr>
+              <a:t>8,2 %</a:t>
+            </a:r>
+            <a:endParaRPr lang="en-US" sz="1000" dirty="0"/>
+          </a:p>
+        </p:txBody>
+      </p:sp>
+      <p:sp>
+        <p:nvSpPr>
+          <p:cNvPr id="12" name="Etiqueta barra MODERADO"/>
+          <p:cNvSpPr txBox="1"/>
+          <p:nvPr/>
+        </p:nvSpPr>
+        <p:spPr>
+          <a:xfrm>
+            <a:off x="5532120" y="2331720"/>
+            <a:ext cx="868680" cy="274320"/>
+          </a:xfrm>
+          <a:prstGeom prst="rect">
+            <a:avLst/>
+          </a:prstGeom>
+          <a:noFill/>
+          <a:ln/>
+        </p:spPr>
+        <p:txBody>
+          <a:bodyPr wrap="square" lIns="0" tIns="0" rIns="0" bIns="0" rtlCol="0" anchor="ctr"/>
+          <a:lstStyle/>
+          <a:p>
+            <a:pPr marL="0" indent="0">
+              <a:buNone/>
+            </a:pPr>
+            <a:r>
+              <a:rPr lang="en-US" sz="1000" b="1" dirty="0">
+                <a:solidFill>
+                  <a:schemeClr val="accent3"/>
+                </a:solidFill>
+                <a:latin typeface="Calibri" pitchFamily="34" charset="0"/>
+                <a:ea typeface="Calibri" pitchFamily="34" charset="-122"/>
+                <a:cs typeface="Calibri" pitchFamily="34" charset="-120"/>
+              </a:rPr>
+              <a:t>MODERADO</a:t>
+            </a:r>
+            <a:endParaRPr lang="en-US" sz="1000" dirty="0"/>
+          </a:p>
+        </p:txBody>
+      </p:sp>
+      <p:sp>
+        <p:nvSpPr>
+          <p:cNvPr id="13" name="Pista MODERADO"/>
+          <p:cNvSpPr/>
+          <p:nvPr/>
+        </p:nvSpPr>
+        <p:spPr>
+          <a:xfrm>
+            <a:off x="6446520" y="2350008"/>
+            <a:ext cx="2057400" cy="237744"/>
+          </a:xfrm>
+          <a:prstGeom prst="rect">
+            <a:avLst/>
+          </a:prstGeom>
+          <a:solidFill>
+            <a:schemeClr val="bg2"/>
+          </a:solidFill>
+          <a:ln w="12700">
+            <a:solidFill>
+              <a:schemeClr val="bg2"/>
+            </a:solidFill>
+            <a:prstDash val="solid"/>
+          </a:ln>
+        </p:spPr>
+      </p:sp>
+      <p:sp>
+        <p:nvSpPr>
+          <p:cNvPr id="14" name="Barra MODERADO"/>
+          <p:cNvSpPr/>
+          <p:nvPr/>
+        </p:nvSpPr>
+        <p:spPr>
+          <a:xfrm>
+            <a:off x="6446520" y="2350008"/>
+            <a:ext cx="818845" cy="237744"/>
+          </a:xfrm>
+          <a:prstGeom prst="rect">
+            <a:avLst/>
+          </a:prstGeom>
+          <a:solidFill>
+            <a:schemeClr val="accent3"/>
+          </a:solidFill>
+          <a:ln w="12700">
+            <a:solidFill>
+              <a:schemeClr val="accent3"/>
+            </a:solidFill>
+            <a:prstDash val="solid"/>
+          </a:ln>
+        </p:spPr>
+      </p:sp>
+      <p:sp>
+        <p:nvSpPr>
+          <p:cNvPr id="15" name="Valor barra MODERADO"/>
+          <p:cNvSpPr txBox="1"/>
+          <p:nvPr/>
+        </p:nvSpPr>
+        <p:spPr>
+          <a:xfrm>
+            <a:off x="7311085" y="2331720"/>
+            <a:ext cx="640080" cy="274320"/>
+          </a:xfrm>
+          <a:prstGeom prst="rect">
+            <a:avLst/>
+          </a:prstGeom>
+          <a:noFill/>
+          <a:ln/>
+        </p:spPr>
+        <p:txBody>
+          <a:bodyPr wrap="square" lIns="0" tIns="0" rIns="0" bIns="0" rtlCol="0" anchor="ctr"/>
+          <a:lstStyle/>
+          <a:p>
+            <a:pPr marL="0" indent="0">
+              <a:buNone/>
+            </a:pPr>
+            <a:r>
+              <a:rPr lang="en-US" sz="1000" dirty="0">
+                <a:solidFill>
+                  <a:schemeClr val="tx1"/>
+                </a:solidFill>
+                <a:latin typeface="Consolas" pitchFamily="34" charset="0"/>
+                <a:ea typeface="Consolas" pitchFamily="34" charset="-122"/>
+                <a:cs typeface="Consolas" pitchFamily="34" charset="-120"/>
+              </a:rPr>
+              <a:t>39,8 %</a:t>
+            </a:r>
+            <a:endParaRPr lang="en-US" sz="1000" dirty="0"/>
+          </a:p>
+        </p:txBody>
+      </p:sp>
+      <p:sp>
+        <p:nvSpPr>
+          <p:cNvPr id="16" name="Etiqueta barra CRÍTICO"/>
+          <p:cNvSpPr txBox="1"/>
+          <p:nvPr/>
+        </p:nvSpPr>
+        <p:spPr>
+          <a:xfrm>
+            <a:off x="5532120" y="2834640"/>
+            <a:ext cx="868680" cy="274320"/>
+          </a:xfrm>
+          <a:prstGeom prst="rect">
+            <a:avLst/>
+          </a:prstGeom>
+          <a:noFill/>
+          <a:ln/>
+        </p:spPr>
+        <p:txBody>
+          <a:bodyPr wrap="square" lIns="0" tIns="0" rIns="0" bIns="0" rtlCol="0" anchor="ctr"/>
+          <a:lstStyle/>
+          <a:p>
+            <a:pPr marL="0" indent="0">
+              <a:buNone/>
+            </a:pPr>
+            <a:r>
+              <a:rPr lang="en-US" sz="1000" b="1" dirty="0">
+                <a:solidFill>
+                  <a:schemeClr val="accent4"/>
+                </a:solidFill>
+                <a:latin typeface="Calibri" pitchFamily="34" charset="0"/>
+                <a:ea typeface="Calibri" pitchFamily="34" charset="-122"/>
+                <a:cs typeface="Calibri" pitchFamily="34" charset="-120"/>
+              </a:rPr>
+              <a:t>CRÍTICO</a:t>
+            </a:r>
+            <a:endParaRPr lang="en-US" sz="1000" dirty="0"/>
+          </a:p>
+        </p:txBody>
+      </p:sp>
+      <p:sp>
+        <p:nvSpPr>
+          <p:cNvPr id="17" name="Pista CRÍTICO"/>
+          <p:cNvSpPr/>
+          <p:nvPr/>
+        </p:nvSpPr>
+        <p:spPr>
+          <a:xfrm>
+            <a:off x="6446520" y="2852928"/>
+            <a:ext cx="2057400" cy="237744"/>
+          </a:xfrm>
+          <a:prstGeom prst="rect">
+            <a:avLst/>
+          </a:prstGeom>
+          <a:solidFill>
+            <a:schemeClr val="bg2"/>
+          </a:solidFill>
+          <a:ln w="12700">
+            <a:solidFill>
+              <a:schemeClr val="bg2"/>
+            </a:solidFill>
+            <a:prstDash val="solid"/>
+          </a:ln>
+        </p:spPr>
+      </p:sp>
+      <p:sp>
+        <p:nvSpPr>
+          <p:cNvPr id="18" name="Barra CRÍTICO"/>
+          <p:cNvSpPr/>
+          <p:nvPr/>
+        </p:nvSpPr>
+        <p:spPr>
+          <a:xfrm>
+            <a:off x="6446520" y="2852928"/>
+            <a:ext cx="1483385" cy="237744"/>
+          </a:xfrm>
+          <a:prstGeom prst="rect">
+            <a:avLst/>
+          </a:prstGeom>
+          <a:solidFill>
+            <a:schemeClr val="accent4"/>
+          </a:solidFill>
+          <a:ln w="12700">
+            <a:solidFill>
+              <a:schemeClr val="accent4"/>
+            </a:solidFill>
+            <a:prstDash val="solid"/>
+          </a:ln>
+        </p:spPr>
+      </p:sp>
+      <p:sp>
+        <p:nvSpPr>
+          <p:cNvPr id="19" name="Valor barra CRÍTICO"/>
+          <p:cNvSpPr txBox="1"/>
+          <p:nvPr/>
+        </p:nvSpPr>
+        <p:spPr>
+          <a:xfrm>
+            <a:off x="7975625" y="2834640"/>
+            <a:ext cx="640080" cy="274320"/>
+          </a:xfrm>
+          <a:prstGeom prst="rect">
+            <a:avLst/>
+          </a:prstGeom>
+          <a:noFill/>
+          <a:ln/>
+        </p:spPr>
+        <p:txBody>
+          <a:bodyPr wrap="square" lIns="0" tIns="0" rIns="0" bIns="0" rtlCol="0" anchor="ctr"/>
+          <a:lstStyle/>
+          <a:p>
+            <a:pPr marL="0" indent="0">
+              <a:buNone/>
+            </a:pPr>
+            <a:r>
+              <a:rPr lang="en-US" sz="1000" dirty="0">
+                <a:solidFill>
+                  <a:schemeClr val="tx1"/>
+                </a:solidFill>
+                <a:latin typeface="Consolas" pitchFamily="34" charset="0"/>
+                <a:ea typeface="Consolas" pitchFamily="34" charset="-122"/>
+                <a:cs typeface="Consolas" pitchFamily="34" charset="-120"/>
+              </a:rPr>
+              <a:t>72,1 %</a:t>
+            </a:r>
+            <a:endParaRPr lang="en-US" sz="1000" dirty="0"/>
+          </a:p>
+        </p:txBody>
+      </p:sp>
+      <p:sp>
+        <p:nvSpPr>
+          <p:cNvPr id="20" name="Dato AUC: el score ordena bien el riesgo"/>
+          <p:cNvSpPr/>
+          <p:nvPr/>
+        </p:nvSpPr>
+        <p:spPr>
+          <a:xfrm>
+            <a:off x="457200" y="3611880"/>
+            <a:ext cx="2651760" cy="868680"/>
+          </a:xfrm>
+          <a:prstGeom prst="roundRect">
+            <a:avLst>
+              <a:gd name="adj" fmla="val 7368"/>
+            </a:avLst>
+          </a:prstGeom>
+          <a:solidFill>
+            <a:schemeClr val="bg1"/>
+          </a:solidFill>
+          <a:ln w="9525">
+            <a:solidFill>
+              <a:schemeClr val="accent5"/>
+            </a:solidFill>
+            <a:prstDash val="solid"/>
+          </a:ln>
+        </p:spPr>
+      </p:sp>
+      <p:sp>
+        <p:nvSpPr>
+          <p:cNvPr id="21" name="Valor AUC: el score ordena bien el riesgo"/>
+          <p:cNvSpPr txBox="1"/>
+          <p:nvPr/>
+        </p:nvSpPr>
+        <p:spPr>
+          <a:xfrm>
+            <a:off x="640080" y="3675888"/>
+            <a:ext cx="2286000" cy="411480"/>
+          </a:xfrm>
+          <a:prstGeom prst="rect">
+            <a:avLst/>
+          </a:prstGeom>
+          <a:noFill/>
+          <a:ln/>
+        </p:spPr>
+        <p:txBody>
+          <a:bodyPr wrap="square" lIns="0" tIns="0" rIns="0" bIns="0" rtlCol="0" anchor="ctr"/>
+          <a:lstStyle/>
+          <a:p>
+            <a:pPr marL="0" indent="0">
+              <a:buNone/>
+            </a:pPr>
+            <a:r>
+              <a:rPr lang="en-US" sz="2000" dirty="0">
+                <a:solidFill>
+                  <a:schemeClr val="tx1"/>
+                </a:solidFill>
+                <a:latin typeface="Consolas" pitchFamily="34" charset="0"/>
+                <a:ea typeface="Consolas" pitchFamily="34" charset="-122"/>
+                <a:cs typeface="Consolas" pitchFamily="34" charset="-120"/>
+              </a:rPr>
+              <a:t>0,793</a:t>
+            </a:r>
+            <a:endParaRPr lang="en-US" sz="2000" dirty="0"/>
+          </a:p>
+        </p:txBody>
+      </p:sp>
+      <p:sp>
+        <p:nvSpPr>
+          <p:cNvPr id="22" name="Texto AUC: el score ordena bien el riesgo"/>
+          <p:cNvSpPr txBox="1"/>
+          <p:nvPr/>
+        </p:nvSpPr>
+        <p:spPr>
+          <a:xfrm>
+            <a:off x="640080" y="4087368"/>
+            <a:ext cx="2377440" cy="320040"/>
+          </a:xfrm>
+          <a:prstGeom prst="rect">
+            <a:avLst/>
+          </a:prstGeom>
+          <a:noFill/>
+          <a:ln/>
+        </p:spPr>
+        <p:txBody>
+          <a:bodyPr wrap="square" lIns="0" tIns="0" rIns="0" bIns="0" rtlCol="0" anchor="t"/>
+          <a:lstStyle/>
+          <a:p>
+            <a:pPr marL="0" indent="0">
+              <a:buNone/>
+            </a:pPr>
+            <a:r>
+              <a:rPr lang="en-US" sz="1100" dirty="0">
+                <a:solidFill>
+                  <a:schemeClr val="tx2"/>
+                </a:solidFill>
+                <a:latin typeface="Calibri" pitchFamily="34" charset="0"/>
+                <a:ea typeface="Calibri" pitchFamily="34" charset="-122"/>
+                <a:cs typeface="Calibri" pitchFamily="34" charset="-120"/>
+              </a:rPr>
+              <a:t>AUC: el score ordena bien el riesgo</a:t>
+            </a:r>
+            <a:endParaRPr lang="en-US" sz="1100" dirty="0"/>
+          </a:p>
+        </p:txBody>
+      </p:sp>
+      <p:sp>
+        <p:nvSpPr>
+          <p:cNvPr id="23" name="Dato la media de impago en CRÍTICO"/>
+          <p:cNvSpPr/>
+          <p:nvPr/>
+        </p:nvSpPr>
+        <p:spPr>
+          <a:xfrm>
+            <a:off x="3246120" y="3611880"/>
+            <a:ext cx="2651760" cy="868680"/>
+          </a:xfrm>
+          <a:prstGeom prst="roundRect">
+            <a:avLst>
+              <a:gd name="adj" fmla="val 7368"/>
+            </a:avLst>
+          </a:prstGeom>
+          <a:solidFill>
+            <a:schemeClr val="bg1"/>
+          </a:solidFill>
+          <a:ln w="9525">
+            <a:solidFill>
+              <a:schemeClr val="accent5"/>
+            </a:solidFill>
+            <a:prstDash val="solid"/>
+          </a:ln>
+        </p:spPr>
+      </p:sp>
+      <p:sp>
+        <p:nvSpPr>
+          <p:cNvPr id="24" name="Valor la media de impago en CRÍTICO"/>
+          <p:cNvSpPr txBox="1"/>
+          <p:nvPr/>
+        </p:nvSpPr>
+        <p:spPr>
+          <a:xfrm>
+            <a:off x="3429000" y="3675888"/>
+            <a:ext cx="2286000" cy="411480"/>
+          </a:xfrm>
+          <a:prstGeom prst="rect">
+            <a:avLst/>
+          </a:prstGeom>
+          <a:noFill/>
+          <a:ln/>
+        </p:spPr>
+        <p:txBody>
+          <a:bodyPr wrap="square" lIns="0" tIns="0" rIns="0" bIns="0" rtlCol="0" anchor="ctr"/>
+          <a:lstStyle/>
+          <a:p>
+            <a:pPr marL="0" indent="0">
+              <a:buNone/>
+            </a:pPr>
+            <a:r>
+              <a:rPr lang="en-US" sz="2000" dirty="0">
+                <a:solidFill>
+                  <a:schemeClr val="accent4"/>
+                </a:solidFill>
+                <a:latin typeface="Consolas" pitchFamily="34" charset="0"/>
+                <a:ea typeface="Consolas" pitchFamily="34" charset="-122"/>
+                <a:cs typeface="Consolas" pitchFamily="34" charset="-120"/>
+              </a:rPr>
+              <a:t>3,3×</a:t>
+            </a:r>
+            <a:endParaRPr lang="en-US" sz="2000" dirty="0"/>
+          </a:p>
+        </p:txBody>
+      </p:sp>
+      <p:sp>
+        <p:nvSpPr>
+          <p:cNvPr id="25" name="Texto la media de impago en CRÍTICO"/>
+          <p:cNvSpPr txBox="1"/>
+          <p:nvPr/>
+        </p:nvSpPr>
+        <p:spPr>
+          <a:xfrm>
+            <a:off x="3429000" y="4087368"/>
+            <a:ext cx="2377440" cy="320040"/>
+          </a:xfrm>
+          <a:prstGeom prst="rect">
+            <a:avLst/>
+          </a:prstGeom>
+          <a:noFill/>
+          <a:ln/>
+        </p:spPr>
+        <p:txBody>
+          <a:bodyPr wrap="square" lIns="0" tIns="0" rIns="0" bIns="0" rtlCol="0" anchor="t"/>
+          <a:lstStyle/>
+          <a:p>
+            <a:pPr marL="0" indent="0">
+              <a:buNone/>
+            </a:pPr>
+            <a:r>
+              <a:rPr lang="en-US" sz="1100" dirty="0">
+                <a:solidFill>
+                  <a:schemeClr val="tx2"/>
+                </a:solidFill>
+                <a:latin typeface="Calibri" pitchFamily="34" charset="0"/>
+                <a:ea typeface="Calibri" pitchFamily="34" charset="-122"/>
+                <a:cs typeface="Calibri" pitchFamily="34" charset="-120"/>
+              </a:rPr>
+              <a:t>la media de impago en CRÍTICO</a:t>
+            </a:r>
+            <a:endParaRPr lang="en-US" sz="1100" dirty="0"/>
+          </a:p>
+        </p:txBody>
+      </p:sp>
+      <p:sp>
+        <p:nvSpPr>
+          <p:cNvPr id="26" name="Dato de los impagos caen en MODERADO + CRÍTICO"/>
+          <p:cNvSpPr/>
+          <p:nvPr/>
+        </p:nvSpPr>
+        <p:spPr>
+          <a:xfrm>
+            <a:off x="6035040" y="3611880"/>
+            <a:ext cx="2651760" cy="868680"/>
+          </a:xfrm>
+          <a:prstGeom prst="roundRect">
+            <a:avLst>
+              <a:gd name="adj" fmla="val 7368"/>
+            </a:avLst>
+          </a:prstGeom>
+          <a:solidFill>
+            <a:schemeClr val="bg1"/>
+          </a:solidFill>
+          <a:ln w="9525">
+            <a:solidFill>
+              <a:schemeClr val="accent5"/>
+            </a:solidFill>
+            <a:prstDash val="solid"/>
+          </a:ln>
+        </p:spPr>
+      </p:sp>
+      <p:sp>
+        <p:nvSpPr>
+          <p:cNvPr id="27" name="Valor de los impagos caen en MODERADO + CRÍTICO"/>
+          <p:cNvSpPr txBox="1"/>
+          <p:nvPr/>
+        </p:nvSpPr>
+        <p:spPr>
+          <a:xfrm>
+            <a:off x="6217920" y="3675888"/>
+            <a:ext cx="2286000" cy="411480"/>
+          </a:xfrm>
+          <a:prstGeom prst="rect">
+            <a:avLst/>
+          </a:prstGeom>
+          <a:noFill/>
+          <a:ln/>
+        </p:spPr>
+        <p:txBody>
+          <a:bodyPr wrap="square" lIns="0" tIns="0" rIns="0" bIns="0" rtlCol="0" anchor="ctr"/>
+          <a:lstStyle/>
+          <a:p>
+            <a:pPr marL="0" indent="0">
+              <a:buNone/>
+            </a:pPr>
+            <a:r>
+              <a:rPr lang="en-US" sz="2000" dirty="0">
+                <a:solidFill>
+                  <a:schemeClr val="tx1"/>
+                </a:solidFill>
+                <a:latin typeface="Consolas" pitchFamily="34" charset="0"/>
+                <a:ea typeface="Consolas" pitchFamily="34" charset="-122"/>
+                <a:cs typeface="Consolas" pitchFamily="34" charset="-120"/>
+              </a:rPr>
+              <a:t>77 %</a:t>
+            </a:r>
+            <a:endParaRPr lang="en-US" sz="2000" dirty="0"/>
+          </a:p>
+        </p:txBody>
+      </p:sp>
+      <p:sp>
+        <p:nvSpPr>
+          <p:cNvPr id="28" name="Texto de los impagos caen en MODERADO + CRÍTICO"/>
+          <p:cNvSpPr txBox="1"/>
+          <p:nvPr/>
+        </p:nvSpPr>
+        <p:spPr>
+          <a:xfrm>
+            <a:off x="6217920" y="4087368"/>
+            <a:ext cx="2377440" cy="320040"/>
+          </a:xfrm>
+          <a:prstGeom prst="rect">
+            <a:avLst/>
+          </a:prstGeom>
+          <a:noFill/>
+          <a:ln/>
+        </p:spPr>
+        <p:txBody>
+          <a:bodyPr wrap="square" lIns="0" tIns="0" rIns="0" bIns="0" rtlCol="0" anchor="t"/>
+          <a:lstStyle/>
+          <a:p>
+            <a:pPr marL="0" indent="0">
+              <a:buNone/>
+            </a:pPr>
+            <a:r>
+              <a:rPr lang="en-US" sz="1100" dirty="0">
+                <a:solidFill>
+                  <a:schemeClr val="tx2"/>
+                </a:solidFill>
+                <a:latin typeface="Calibri" pitchFamily="34" charset="0"/>
+                <a:ea typeface="Calibri" pitchFamily="34" charset="-122"/>
+                <a:cs typeface="Calibri" pitchFamily="34" charset="-120"/>
+              </a:rPr>
+              <a:t>de los impagos caen en MODERADO + CRÍTICO</a:t>
+            </a:r>
+            <a:endParaRPr lang="en-US" sz="1100" dirty="0"/>
+          </a:p>
+        </p:txBody>
+      </p:sp>
+      <p:sp>
+        <p:nvSpPr>
+          <p:cNvPr id="29" name="Slide Number Placeholder 0"/>
+          <p:cNvSpPr>
+            <a:spLocks noGrp="1"/>
+          </p:cNvSpPr>
+          <p:nvPr>
+            <p:ph type="sldNum" sz="quarter" idx="4294967295"/>
+          </p:nvPr>
+        </p:nvSpPr>
+        <p:spPr>
+          <a:xfrm>
+            <a:off x="8229600" y="4773168"/>
+            <a:ext cx="457200" cy="228600"/>
+          </a:xfrm>
+          <a:prstGeom prst="rect">
+            <a:avLst/>
+          </a:prstGeom>
+          <a:extLst>
+            <a:ext uri="{C572A759-6A51-4108-AA02-DFA0A04FC94B}">
+              <ma14:wrappingTextBoxFlag xmlns:ma14="http://schemas.microsoft.com/office/mac/drawingml/2011/main" xmlns="" val="0"/>
+            </a:ext>
+          </a:extLst>
+        </p:spPr>
+        <p:txBody>
+          <a:bodyPr/>
+          <a:lstStyle>
+            <a:lvl1pPr>
+              <a:defRPr sz="900">
+                <a:solidFill>
+                  <a:schemeClr val="tx2"/>
+                </a:solidFill>
+                <a:latin typeface="Calibri"/>
+                <a:ea typeface="Calibri"/>
+                <a:cs typeface="Calibri"/>
+              </a:defRPr>
+            </a:lvl1pPr>
+          </a:lstStyle>
+          <a:p>
+            <a:pPr algn="r"/>
+            <a:fld id="{F7021451-1387-4CA6-816F-3879F97B5CBC}" type="slidenum">
+              <a:rPr lang="en-US" b="0"/>
+              <a:t>6</a:t>
+            </a:fld>
+            <a:endParaRPr lang="en-US"/>
+          </a:p>
+        </p:txBody>
+      </p:sp>
+    </p:spTree>
+  </p:cSld>
+  <p:clrMapOvr>
+    <a:masterClrMapping/>
+  </p:clrMapOvr>
+</p:sld>
+</file>
+
+<file path=ppt/slides/slide7.xml><?xml version="1.0" encoding="utf-8"?>
+<p:sld xmlns:a="http://schemas.openxmlformats.org/drawingml/2006/main" xmlns:r="http://schemas.openxmlformats.org/officeDocument/2006/relationships" xmlns:p="http://schemas.openxmlformats.org/presentationml/2006/main">
+  <p:cSld name="Slide 7">
+    <p:spTree>
+      <p:nvGrpSpPr>
+        <p:cNvPr id="1" name=""/>
+        <p:cNvGrpSpPr/>
+        <p:nvPr/>
+      </p:nvGrpSpPr>
+      <p:grpSpPr>
+        <a:xfrm>
+          <a:off x="0" y="0"/>
+          <a:ext cx="0" cy="0"/>
+          <a:chOff x="0" y="0"/>
+          <a:chExt cx="0" cy="0"/>
+        </a:xfrm>
+      </p:grpSpPr>
+      <p:sp>
+        <p:nvSpPr>
+          <p:cNvPr id="2" name="Text 0"/>
+          <p:cNvSpPr>
+            <a:spLocks noGrp="1"/>
+          </p:cNvSpPr>
+          <p:nvPr>
+            <p:ph type="body" idx="100" hasCustomPrompt="1"/>
+          </p:nvPr>
+        </p:nvSpPr>
+        <p:spPr>
+          <a:xfrm>
+            <a:off x="457200" y="292608"/>
+            <a:ext cx="8229600" cy="256032"/>
+          </a:xfrm>
+          <a:prstGeom prst="rect">
+            <a:avLst/>
+          </a:prstGeom>
+          <a:noFill/>
+          <a:ln/>
+        </p:spPr>
+        <p:txBody>
+          <a:bodyPr wrap="square" lIns="0" tIns="0" rIns="0" bIns="0" rtlCol="0" anchor="ctr"/>
+          <a:lstStyle/>
+          <a:p>
+            <a:pPr marL="0" indent="0">
+              <a:buNone/>
+            </a:pPr>
+            <a:r>
+              <a:rPr lang="en-US" sz="1100" b="1" kern="0" spc="200" dirty="0">
+                <a:solidFill>
+                  <a:schemeClr val="accent1"/>
+                </a:solidFill>
+                <a:latin typeface="Calibri" pitchFamily="34" charset="0"/>
+                <a:ea typeface="Calibri" pitchFamily="34" charset="-122"/>
+                <a:cs typeface="Calibri" pitchFamily="34" charset="-120"/>
+              </a:rPr>
+              <a:t>EL AGENTE EN ACCIÓN · 5 DE LOS 20 PRÉSTAMOS ANALIZADOS</a:t>
+            </a:r>
+            <a:endParaRPr lang="en-US" sz="1100" dirty="0"/>
+          </a:p>
+        </p:txBody>
+      </p:sp>
+      <p:sp>
+        <p:nvSpPr>
+          <p:cNvPr id="3" name="Text 0"/>
+          <p:cNvSpPr>
+            <a:spLocks noGrp="1"/>
+          </p:cNvSpPr>
+          <p:nvPr>
+            <p:ph type="title" idx="101" hasCustomPrompt="1"/>
+          </p:nvPr>
+        </p:nvSpPr>
+        <p:spPr>
+          <a:xfrm>
+            <a:off x="457200" y="548640"/>
+            <a:ext cx="8229600" cy="566928"/>
+          </a:xfrm>
+          <a:prstGeom prst="rect">
+            <a:avLst/>
+          </a:prstGeom>
+          <a:noFill/>
+          <a:ln/>
+        </p:spPr>
+        <p:txBody>
+          <a:bodyPr wrap="square" lIns="0" tIns="0" rIns="0" bIns="0" rtlCol="0" anchor="ctr"/>
+          <a:lstStyle/>
+          <a:p>
+            <a:pPr marL="0" indent="0" algn="l">
+              <a:buNone/>
+            </a:pPr>
+            <a:r>
+              <a:rPr lang="en-US" sz="2600" b="1" dirty="0">
+                <a:solidFill>
+                  <a:schemeClr val="tx1"/>
+                </a:solidFill>
+                <a:latin typeface="Cambria" pitchFamily="34" charset="0"/>
+                <a:ea typeface="Cambria" pitchFamily="34" charset="-122"/>
+                <a:cs typeface="Cambria" pitchFamily="34" charset="-120"/>
+              </a:rPr>
+              <a:t>«Analiza los 20 préstamos de mayor importe»</a:t>
+            </a:r>
+            <a:endParaRPr lang="en-US" sz="2600" dirty="0"/>
+          </a:p>
+        </p:txBody>
+      </p:sp>
+      <p:sp>
+        <p:nvSpPr>
+          <p:cNvPr id="4" name="Resumen CRÍTICO"/>
+          <p:cNvSpPr/>
+          <p:nvPr/>
+        </p:nvSpPr>
+        <p:spPr>
+          <a:xfrm>
+            <a:off x="457200" y="1298448"/>
+            <a:ext cx="2651760" cy="749808"/>
+          </a:xfrm>
+          <a:prstGeom prst="roundRect">
+            <a:avLst>
+              <a:gd name="adj" fmla="val 8537"/>
+            </a:avLst>
+          </a:prstGeom>
+          <a:solidFill>
+            <a:schemeClr val="bg1"/>
+          </a:solidFill>
+          <a:ln w="9525">
+            <a:solidFill>
+              <a:schemeClr val="accent5"/>
+            </a:solidFill>
+            <a:prstDash val="solid"/>
+          </a:ln>
+        </p:spPr>
+      </p:sp>
+      <p:sp>
+        <p:nvSpPr>
+          <p:cNvPr id="5" name="Número CRÍTICO"/>
+          <p:cNvSpPr txBox="1"/>
+          <p:nvPr/>
+        </p:nvSpPr>
+        <p:spPr>
+          <a:xfrm>
+            <a:off x="640080" y="1353312"/>
+            <a:ext cx="548640" cy="640080"/>
+          </a:xfrm>
+          <a:prstGeom prst="rect">
+            <a:avLst/>
+          </a:prstGeom>
+          <a:noFill/>
+          <a:ln/>
+        </p:spPr>
+        <p:txBody>
+          <a:bodyPr wrap="square" lIns="0" tIns="0" rIns="0" bIns="0" rtlCol="0" anchor="ctr"/>
+          <a:lstStyle/>
+          <a:p>
+            <a:pPr marL="0" indent="0">
+              <a:buNone/>
+            </a:pPr>
+            <a:r>
+              <a:rPr lang="en-US" sz="2600" dirty="0">
+                <a:solidFill>
+                  <a:schemeClr val="accent4"/>
+                </a:solidFill>
+                <a:latin typeface="Consolas" pitchFamily="34" charset="0"/>
+                <a:ea typeface="Consolas" pitchFamily="34" charset="-122"/>
+                <a:cs typeface="Consolas" pitchFamily="34" charset="-120"/>
+              </a:rPr>
+              <a:t>2</a:t>
+            </a:r>
+            <a:endParaRPr lang="en-US" sz="2600" dirty="0"/>
+          </a:p>
+        </p:txBody>
+      </p:sp>
+      <p:sp>
+        <p:nvSpPr>
+          <p:cNvPr id="6" name="Texto CRÍTICO"/>
+          <p:cNvSpPr txBox="1"/>
+          <p:nvPr/>
+        </p:nvSpPr>
+        <p:spPr>
+          <a:xfrm>
+            <a:off x="1234440" y="1353312"/>
+            <a:ext cx="1783080" cy="640080"/>
+          </a:xfrm>
+          <a:prstGeom prst="rect">
+            <a:avLst/>
+          </a:prstGeom>
+          <a:noFill/>
+          <a:ln/>
+        </p:spPr>
+        <p:txBody>
+          <a:bodyPr wrap="square" lIns="0" tIns="0" rIns="0" bIns="0" rtlCol="0" anchor="ctr"/>
+          <a:lstStyle/>
+          <a:p>
+            <a:pPr marL="0" indent="0">
+              <a:buNone/>
+            </a:pPr>
+            <a:r>
+              <a:rPr lang="en-US" sz="1100" b="1" dirty="0">
+                <a:solidFill>
+                  <a:schemeClr val="accent4"/>
+                </a:solidFill>
+                <a:latin typeface="Calibri" pitchFamily="34" charset="0"/>
+                <a:ea typeface="Calibri" pitchFamily="34" charset="-122"/>
+                <a:cs typeface="Calibri" pitchFamily="34" charset="-120"/>
+              </a:rPr>
+              <a:t>CRÍTICO</a:t>
+            </a:r>
+            <a:endParaRPr lang="en-US" sz="1100" dirty="0"/>
+          </a:p>
+          <a:p>
+            <a:pPr marL="0" indent="0">
+              <a:buNone/>
+            </a:pPr>
+            <a:r>
+              <a:rPr lang="en-US" sz="1100" dirty="0">
+                <a:solidFill>
+                  <a:schemeClr val="tx2"/>
+                </a:solidFill>
+                <a:latin typeface="Calibri" pitchFamily="34" charset="0"/>
+                <a:ea typeface="Calibri" pitchFamily="34" charset="-122"/>
+                <a:cs typeface="Calibri" pitchFamily="34" charset="-120"/>
+              </a:rPr>
+              <a:t>70.000 $ · 2 de 2 impagaron</a:t>
+            </a:r>
+            <a:endParaRPr lang="en-US" sz="1100" dirty="0"/>
+          </a:p>
+        </p:txBody>
+      </p:sp>
+      <p:sp>
+        <p:nvSpPr>
+          <p:cNvPr id="7" name="Resumen MODERADO"/>
+          <p:cNvSpPr/>
+          <p:nvPr/>
+        </p:nvSpPr>
+        <p:spPr>
+          <a:xfrm>
+            <a:off x="3246120" y="1298448"/>
+            <a:ext cx="2651760" cy="749808"/>
+          </a:xfrm>
+          <a:prstGeom prst="roundRect">
+            <a:avLst>
+              <a:gd name="adj" fmla="val 8537"/>
+            </a:avLst>
+          </a:prstGeom>
+          <a:solidFill>
+            <a:schemeClr val="bg1"/>
+          </a:solidFill>
+          <a:ln w="9525">
+            <a:solidFill>
+              <a:schemeClr val="accent5"/>
+            </a:solidFill>
+            <a:prstDash val="solid"/>
+          </a:ln>
+        </p:spPr>
+      </p:sp>
+      <p:sp>
+        <p:nvSpPr>
+          <p:cNvPr id="8" name="Número MODERADO"/>
+          <p:cNvSpPr txBox="1"/>
+          <p:nvPr/>
+        </p:nvSpPr>
+        <p:spPr>
+          <a:xfrm>
+            <a:off x="3429000" y="1353312"/>
+            <a:ext cx="548640" cy="640080"/>
+          </a:xfrm>
+          <a:prstGeom prst="rect">
+            <a:avLst/>
+          </a:prstGeom>
+          <a:noFill/>
+          <a:ln/>
+        </p:spPr>
+        <p:txBody>
+          <a:bodyPr wrap="square" lIns="0" tIns="0" rIns="0" bIns="0" rtlCol="0" anchor="ctr"/>
+          <a:lstStyle/>
+          <a:p>
+            <a:pPr marL="0" indent="0">
+              <a:buNone/>
+            </a:pPr>
+            <a:r>
+              <a:rPr lang="en-US" sz="2600" dirty="0">
+                <a:solidFill>
+                  <a:schemeClr val="accent3"/>
+                </a:solidFill>
+                <a:latin typeface="Consolas" pitchFamily="34" charset="0"/>
+                <a:ea typeface="Consolas" pitchFamily="34" charset="-122"/>
+                <a:cs typeface="Consolas" pitchFamily="34" charset="-120"/>
+              </a:rPr>
+              <a:t>10</a:t>
+            </a:r>
+            <a:endParaRPr lang="en-US" sz="2600" dirty="0"/>
+          </a:p>
+        </p:txBody>
+      </p:sp>
+      <p:sp>
+        <p:nvSpPr>
+          <p:cNvPr id="9" name="Texto MODERADO"/>
+          <p:cNvSpPr txBox="1"/>
+          <p:nvPr/>
+        </p:nvSpPr>
+        <p:spPr>
+          <a:xfrm>
+            <a:off x="4023360" y="1353312"/>
+            <a:ext cx="1783080" cy="640080"/>
+          </a:xfrm>
+          <a:prstGeom prst="rect">
+            <a:avLst/>
+          </a:prstGeom>
+          <a:noFill/>
+          <a:ln/>
+        </p:spPr>
+        <p:txBody>
+          <a:bodyPr wrap="square" lIns="0" tIns="0" rIns="0" bIns="0" rtlCol="0" anchor="ctr"/>
+          <a:lstStyle/>
+          <a:p>
+            <a:pPr marL="0" indent="0">
+              <a:buNone/>
+            </a:pPr>
+            <a:r>
+              <a:rPr lang="en-US" sz="1100" b="1" dirty="0">
+                <a:solidFill>
+                  <a:schemeClr val="accent3"/>
+                </a:solidFill>
+                <a:latin typeface="Calibri" pitchFamily="34" charset="0"/>
+                <a:ea typeface="Calibri" pitchFamily="34" charset="-122"/>
+                <a:cs typeface="Calibri" pitchFamily="34" charset="-120"/>
+              </a:rPr>
+              <a:t>MODERADO</a:t>
+            </a:r>
+            <a:endParaRPr lang="en-US" sz="1100" dirty="0"/>
+          </a:p>
+          <a:p>
+            <a:pPr marL="0" indent="0">
+              <a:buNone/>
+            </a:pPr>
+            <a:r>
+              <a:rPr lang="en-US" sz="1100" dirty="0">
+                <a:solidFill>
+                  <a:schemeClr val="tx2"/>
+                </a:solidFill>
+                <a:latin typeface="Calibri" pitchFamily="34" charset="0"/>
+                <a:ea typeface="Calibri" pitchFamily="34" charset="-122"/>
+                <a:cs typeface="Calibri" pitchFamily="34" charset="-120"/>
+              </a:rPr>
+              <a:t>350.000 $ · 8 de 10 impagaron</a:t>
+            </a:r>
+            <a:endParaRPr lang="en-US" sz="1100" dirty="0"/>
+          </a:p>
+        </p:txBody>
+      </p:sp>
+      <p:sp>
+        <p:nvSpPr>
+          <p:cNvPr id="10" name="Resumen BAJO"/>
+          <p:cNvSpPr/>
+          <p:nvPr/>
+        </p:nvSpPr>
+        <p:spPr>
+          <a:xfrm>
+            <a:off x="6035040" y="1298448"/>
+            <a:ext cx="2651760" cy="749808"/>
+          </a:xfrm>
+          <a:prstGeom prst="roundRect">
+            <a:avLst>
+              <a:gd name="adj" fmla="val 8537"/>
+            </a:avLst>
+          </a:prstGeom>
+          <a:solidFill>
+            <a:schemeClr val="bg1"/>
+          </a:solidFill>
+          <a:ln w="9525">
+            <a:solidFill>
+              <a:schemeClr val="accent5"/>
+            </a:solidFill>
+            <a:prstDash val="solid"/>
+          </a:ln>
+        </p:spPr>
+      </p:sp>
+      <p:sp>
+        <p:nvSpPr>
+          <p:cNvPr id="11" name="Número BAJO"/>
+          <p:cNvSpPr txBox="1"/>
+          <p:nvPr/>
+        </p:nvSpPr>
+        <p:spPr>
+          <a:xfrm>
+            <a:off x="6217920" y="1353312"/>
+            <a:ext cx="548640" cy="640080"/>
+          </a:xfrm>
+          <a:prstGeom prst="rect">
+            <a:avLst/>
+          </a:prstGeom>
+          <a:noFill/>
+          <a:ln/>
+        </p:spPr>
+        <p:txBody>
+          <a:bodyPr wrap="square" lIns="0" tIns="0" rIns="0" bIns="0" rtlCol="0" anchor="ctr"/>
+          <a:lstStyle/>
+          <a:p>
+            <a:pPr marL="0" indent="0">
+              <a:buNone/>
+            </a:pPr>
+            <a:r>
+              <a:rPr lang="en-US" sz="2600" dirty="0">
+                <a:solidFill>
+                  <a:schemeClr val="accent2"/>
+                </a:solidFill>
+                <a:latin typeface="Consolas" pitchFamily="34" charset="0"/>
+                <a:ea typeface="Consolas" pitchFamily="34" charset="-122"/>
+                <a:cs typeface="Consolas" pitchFamily="34" charset="-120"/>
+              </a:rPr>
+              <a:t>8</a:t>
+            </a:r>
+            <a:endParaRPr lang="en-US" sz="2600" dirty="0"/>
+          </a:p>
+        </p:txBody>
+      </p:sp>
+      <p:sp>
+        <p:nvSpPr>
+          <p:cNvPr id="12" name="Texto BAJO"/>
+          <p:cNvSpPr txBox="1"/>
+          <p:nvPr/>
+        </p:nvSpPr>
+        <p:spPr>
+          <a:xfrm>
+            <a:off x="6812280" y="1353312"/>
+            <a:ext cx="1783080" cy="640080"/>
+          </a:xfrm>
+          <a:prstGeom prst="rect">
+            <a:avLst/>
+          </a:prstGeom>
+          <a:noFill/>
+          <a:ln/>
+        </p:spPr>
+        <p:txBody>
+          <a:bodyPr wrap="square" lIns="0" tIns="0" rIns="0" bIns="0" rtlCol="0" anchor="ctr"/>
+          <a:lstStyle/>
+          <a:p>
+            <a:pPr marL="0" indent="0">
+              <a:buNone/>
+            </a:pPr>
+            <a:r>
+              <a:rPr lang="en-US" sz="1100" b="1" dirty="0">
+                <a:solidFill>
+                  <a:schemeClr val="accent2"/>
+                </a:solidFill>
+                <a:latin typeface="Calibri" pitchFamily="34" charset="0"/>
+                <a:ea typeface="Calibri" pitchFamily="34" charset="-122"/>
+                <a:cs typeface="Calibri" pitchFamily="34" charset="-120"/>
+              </a:rPr>
+              <a:t>BAJO</a:t>
+            </a:r>
+            <a:endParaRPr lang="en-US" sz="1100" dirty="0"/>
+          </a:p>
+          <a:p>
+            <a:pPr marL="0" indent="0">
+              <a:buNone/>
+            </a:pPr>
+            <a:r>
+              <a:rPr lang="en-US" sz="1100" dirty="0">
+                <a:solidFill>
+                  <a:schemeClr val="tx2"/>
+                </a:solidFill>
+                <a:latin typeface="Calibri" pitchFamily="34" charset="0"/>
+                <a:ea typeface="Calibri" pitchFamily="34" charset="-122"/>
+                <a:cs typeface="Calibri" pitchFamily="34" charset="-120"/>
+              </a:rPr>
+              <a:t>280.000 $ · 2 de 8 impagaron</a:t>
+            </a:r>
+            <a:endParaRPr lang="en-US" sz="1100" dirty="0"/>
+          </a:p>
+        </p:txBody>
+      </p:sp>
+      <p:sp>
+        <p:nvSpPr>
+          <p:cNvPr id="13" name="Tarjeta tabla agente"/>
+          <p:cNvSpPr/>
+          <p:nvPr/>
+        </p:nvSpPr>
+        <p:spPr>
+          <a:xfrm>
+            <a:off x="457200" y="2176272"/>
+            <a:ext cx="8229600" cy="2468880"/>
+          </a:xfrm>
+          <a:prstGeom prst="roundRect">
+            <a:avLst>
+              <a:gd name="adj" fmla="val 2593"/>
+            </a:avLst>
+          </a:prstGeom>
+          <a:solidFill>
+            <a:schemeClr val="bg1"/>
+          </a:solidFill>
+          <a:ln w="9525">
+            <a:solidFill>
+              <a:schemeClr val="accent5"/>
+            </a:solidFill>
+            <a:prstDash val="solid"/>
+          </a:ln>
+        </p:spPr>
+      </p:sp>
+      <p:graphicFrame>
+        <p:nvGraphicFramePr>
+          <p:cNvPr id="14" name="Tabla agente"/>
+          <p:cNvGraphicFramePr>
+            <a:graphicFrameLocks noGrp="1"/>
+          </p:cNvGraphicFramePr>
+          <p:nvPr>
+            <p:extLst>
+              <p:ext uri="{D42A27DB-BD31-4B8C-83A1-F6EECF244321}">
+                <p14:modId xmlns:p14="http://schemas.microsoft.com/office/powerpoint/2010/main" val="1579011935"/>
+              </p:ext>
+            </p:extLst>
+          </p:nvPr>
+        </p:nvGraphicFramePr>
+        <p:xfrm>
+          <a:off x="566928" y="2258568"/>
+          <a:ext cx="8010144" cy="2176272"/>
+        </p:xfrm>
+        <a:graphic>
+          <a:graphicData uri="http://schemas.openxmlformats.org/drawingml/2006/table">
+            <a:tbl>
+              <a:tblPr/>
+              <a:tblGrid>
+                <a:gridCol w="457200">
+                  <a:extLst>
+                    <a:ext uri="{9D8B030D-6E8A-4147-A177-3AD203B41FA5}">
+                      <a16:colId xmlns:a16="http://schemas.microsoft.com/office/drawing/2014/main" val="20000"/>
+                    </a:ext>
+                  </a:extLst>
+                </a:gridCol>
+                <a:gridCol w="1234440">
+                  <a:extLst>
+                    <a:ext uri="{9D8B030D-6E8A-4147-A177-3AD203B41FA5}">
+                      <a16:colId xmlns:a16="http://schemas.microsoft.com/office/drawing/2014/main" val="20001"/>
+                    </a:ext>
+                  </a:extLst>
+                </a:gridCol>
+                <a:gridCol w="640080">
+                  <a:extLst>
+                    <a:ext uri="{9D8B030D-6E8A-4147-A177-3AD203B41FA5}">
+                      <a16:colId xmlns:a16="http://schemas.microsoft.com/office/drawing/2014/main" val="20002"/>
+                    </a:ext>
+                  </a:extLst>
+                </a:gridCol>
+                <a:gridCol w="685800">
+                  <a:extLst>
+                    <a:ext uri="{9D8B030D-6E8A-4147-A177-3AD203B41FA5}">
+                      <a16:colId xmlns:a16="http://schemas.microsoft.com/office/drawing/2014/main" val="20003"/>
+                    </a:ext>
+                  </a:extLst>
+                </a:gridCol>
+                <a:gridCol w="1005840">
+                  <a:extLst>
+                    <a:ext uri="{9D8B030D-6E8A-4147-A177-3AD203B41FA5}">
+                      <a16:colId xmlns:a16="http://schemas.microsoft.com/office/drawing/2014/main" val="20004"/>
+                    </a:ext>
+                  </a:extLst>
+                </a:gridCol>
+                <a:gridCol w="2980944">
+                  <a:extLst>
+                    <a:ext uri="{9D8B030D-6E8A-4147-A177-3AD203B41FA5}">
+                      <a16:colId xmlns:a16="http://schemas.microsoft.com/office/drawing/2014/main" val="20005"/>
+                    </a:ext>
+                  </a:extLst>
+                </a:gridCol>
+                <a:gridCol w="1005840">
+                  <a:extLst>
+                    <a:ext uri="{9D8B030D-6E8A-4147-A177-3AD203B41FA5}">
+                      <a16:colId xmlns:a16="http://schemas.microsoft.com/office/drawing/2014/main" val="20006"/>
+                    </a:ext>
+                  </a:extLst>
+                </a:gridCol>
+              </a:tblGrid>
+              <a:tr h="274320">
+                <a:tc>
+                  <a:txBody>
+                    <a:bodyPr/>
+                    <a:lstStyle/>
+                    <a:p>
+                      <a:pPr marL="0" indent="0" algn="l">
+                        <a:buNone/>
+                      </a:pPr>
+                      <a:r>
+                        <a:rPr lang="en-US" sz="850" b="1" dirty="0">
+                          <a:solidFill>
+                            <a:schemeClr val="tx2"/>
+                          </a:solidFill>
+                          <a:latin typeface="Calibri" pitchFamily="34" charset="0"/>
+                          <a:ea typeface="Calibri" pitchFamily="34" charset="-122"/>
+                          <a:cs typeface="Calibri" pitchFamily="34" charset="-120"/>
+                        </a:rPr>
+                        <a:t>ID</a:t>
+                      </a:r>
+                      <a:endParaRPr lang="en-US" sz="850" dirty="0">
+                        <a:latin typeface="Calibri" charset="0"/>
+                        <a:ea typeface="Calibri" charset="0"/>
+                        <a:cs typeface="Calibri" charset="0"/>
+                      </a:endParaRPr>
+                    </a:p>
+                  </a:txBody>
+                  <a:tcPr anchor="ctr">
                     <a:lnL w="0" cap="flat" cmpd="sng" algn="ctr">
                       <a:noFill/>
                     </a:lnL>
@@ -8252,28 +10221,28 @@
                     <a:bodyPr/>
                     <a:lstStyle/>
                     <a:p>
-                      <a:pPr algn="r" indent="0" marL="0">
+                      <a:pPr marL="0" indent="0" algn="l">
                         <a:buNone/>
                       </a:pPr>
                       <a:r>
-                        <a:rPr lang="en-US" sz="1200" dirty="0">
+                        <a:rPr lang="en-US" sz="850" b="1" dirty="0">
                           <a:solidFill>
-                            <a:schemeClr val="tx1"/>
+                            <a:schemeClr val="tx2"/>
                           </a:solidFill>
-                          <a:latin typeface="Consolas" pitchFamily="34" charset="0"/>
-                          <a:ea typeface="Consolas" pitchFamily="34" charset="-122"/>
-                          <a:cs typeface="Consolas" pitchFamily="34" charset="-120"/>
+                          <a:latin typeface="Calibri" pitchFamily="34" charset="0"/>
+                          <a:ea typeface="Calibri" pitchFamily="34" charset="-122"/>
+                          <a:cs typeface="Calibri" pitchFamily="34" charset="-120"/>
                         </a:rPr>
-                        <a:t>19.746</a:t>
+                        <a:t>FINALIDAD</a:t>
                       </a:r>
-                      <a:endParaRPr lang="en-US" sz="1200" dirty="0">
-                        <a:latin typeface="Consolas" charset="0"/>
-                        <a:ea typeface="Consolas" charset="0"/>
-                        <a:cs typeface="Consolas" charset="0"/>
+                      <a:endParaRPr lang="en-US" sz="850" dirty="0">
+                        <a:latin typeface="Calibri" charset="0"/>
+                        <a:ea typeface="Calibri" charset="0"/>
+                        <a:cs typeface="Calibri" charset="0"/>
                       </a:endParaRPr>
                     </a:p>
                   </a:txBody>
-                  <a:tcPr marL="91440" marR="91440" marT="45720" marB="45720" anchor="ctr">
+                  <a:tcPr anchor="ctr">
                     <a:lnL w="0" cap="flat" cmpd="sng" algn="ctr">
                       <a:noFill/>
                     </a:lnL>
@@ -8299,28 +10268,28 @@
                     <a:bodyPr/>
                     <a:lstStyle/>
                     <a:p>
-                      <a:pPr algn="r" indent="0" marL="0">
+                      <a:pPr marL="0" indent="0" algn="l">
                         <a:buNone/>
                       </a:pPr>
                       <a:r>
-                        <a:rPr lang="en-US" sz="1200" dirty="0">
+                        <a:rPr lang="en-US" sz="850" b="1" dirty="0">
                           <a:solidFill>
-                            <a:schemeClr val="tx1"/>
+                            <a:schemeClr val="tx2"/>
                           </a:solidFill>
-                          <a:latin typeface="Consolas" pitchFamily="34" charset="0"/>
-                          <a:ea typeface="Consolas" pitchFamily="34" charset="-122"/>
-                          <a:cs typeface="Consolas" pitchFamily="34" charset="-120"/>
+                          <a:latin typeface="Calibri" pitchFamily="34" charset="0"/>
+                          <a:ea typeface="Calibri" pitchFamily="34" charset="-122"/>
+                          <a:cs typeface="Calibri" pitchFamily="34" charset="-120"/>
                         </a:rPr>
-                        <a:t>60,6 %</a:t>
+                        <a:t>GRADO</a:t>
                       </a:r>
-                      <a:endParaRPr lang="en-US" sz="1200" dirty="0">
-                        <a:latin typeface="Consolas" charset="0"/>
-                        <a:ea typeface="Consolas" charset="0"/>
-                        <a:cs typeface="Consolas" charset="0"/>
+                      <a:endParaRPr lang="en-US" sz="850" dirty="0">
+                        <a:latin typeface="Calibri" charset="0"/>
+                        <a:ea typeface="Calibri" charset="0"/>
+                        <a:cs typeface="Calibri" charset="0"/>
                       </a:endParaRPr>
                     </a:p>
                   </a:txBody>
-                  <a:tcPr marL="91440" marR="91440" marT="45720" marB="45720" anchor="ctr">
+                  <a:tcPr anchor="ctr">
                     <a:lnL w="0" cap="flat" cmpd="sng" algn="ctr">
                       <a:noFill/>
                     </a:lnL>
@@ -8346,28 +10315,28 @@
                     <a:bodyPr/>
                     <a:lstStyle/>
                     <a:p>
-                      <a:pPr algn="r" indent="0" marL="0">
+                      <a:pPr marL="0" indent="0" algn="r">
                         <a:buNone/>
                       </a:pPr>
                       <a:r>
-                        <a:rPr lang="en-US" sz="1200" dirty="0">
+                        <a:rPr lang="en-US" sz="850" b="1" dirty="0">
                           <a:solidFill>
-                            <a:schemeClr val="tx1"/>
+                            <a:schemeClr val="tx2"/>
                           </a:solidFill>
-                          <a:latin typeface="Consolas" pitchFamily="34" charset="0"/>
-                          <a:ea typeface="Consolas" pitchFamily="34" charset="-122"/>
-                          <a:cs typeface="Consolas" pitchFamily="34" charset="-120"/>
+                          <a:latin typeface="Calibri" pitchFamily="34" charset="0"/>
+                          <a:ea typeface="Calibri" pitchFamily="34" charset="-122"/>
+                          <a:cs typeface="Calibri" pitchFamily="34" charset="-120"/>
                         </a:rPr>
-                        <a:t>161,3 M$</a:t>
+                        <a:t>SCORE</a:t>
                       </a:r>
-                      <a:endParaRPr lang="en-US" sz="1200" dirty="0">
-                        <a:latin typeface="Consolas" charset="0"/>
-                        <a:ea typeface="Consolas" charset="0"/>
-                        <a:cs typeface="Consolas" charset="0"/>
+                      <a:endParaRPr lang="en-US" sz="850" dirty="0">
+                        <a:latin typeface="Calibri" charset="0"/>
+                        <a:ea typeface="Calibri" charset="0"/>
+                        <a:cs typeface="Calibri" charset="0"/>
                       </a:endParaRPr>
                     </a:p>
                   </a:txBody>
-                  <a:tcPr marL="91440" marR="91440" marT="45720" marB="45720" anchor="ctr">
+                  <a:tcPr anchor="ctr">
                     <a:lnL w="0" cap="flat" cmpd="sng" algn="ctr">
                       <a:noFill/>
                     </a:lnL>
@@ -8393,77 +10362,28 @@
                     <a:bodyPr/>
                     <a:lstStyle/>
                     <a:p>
-                      <a:pPr algn="r" indent="0" marL="0">
+                      <a:pPr marL="0" indent="0" algn="l">
                         <a:buNone/>
                       </a:pPr>
                       <a:r>
-                        <a:rPr lang="en-US" sz="1200" dirty="0">
+                        <a:rPr lang="en-US" sz="850" b="1" dirty="0">
                           <a:solidFill>
-                            <a:schemeClr val="tx1"/>
-                          </a:solidFill>
-                          <a:latin typeface="Consolas" pitchFamily="34" charset="0"/>
-                          <a:ea typeface="Consolas" pitchFamily="34" charset="-122"/>
-                          <a:cs typeface="Consolas" pitchFamily="34" charset="-120"/>
-                        </a:rPr>
-                        <a:t>8,2 %</a:t>
-                      </a:r>
-                      <a:endParaRPr lang="en-US" sz="1200" dirty="0">
-                        <a:latin typeface="Consolas" charset="0"/>
-                        <a:ea typeface="Consolas" charset="0"/>
-                        <a:cs typeface="Consolas" charset="0"/>
-                      </a:endParaRPr>
-                    </a:p>
-                  </a:txBody>
-                  <a:tcPr marL="91440" marR="91440" marT="45720" marB="45720" anchor="ctr">
-                    <a:lnL w="0" cap="flat" cmpd="sng" algn="ctr">
-                      <a:noFill/>
-                    </a:lnL>
-                    <a:lnR w="0" cap="flat" cmpd="sng" algn="ctr">
-                      <a:noFill/>
-                    </a:lnR>
-                    <a:lnT w="0" cap="flat" cmpd="sng" algn="ctr">
-                      <a:noFill/>
-                    </a:lnT>
-                    <a:lnB w="9525" cap="flat" cmpd="sng" algn="ctr">
-                      <a:solidFill>
-                        <a:srgbClr val="DCE2E7"/>
-                      </a:solidFill>
-                      <a:prstDash val="solid"/>
-                      <a:round/>
-                      <a:headEnd type="none" w="med" len="med"/>
-                      <a:tailEnd type="none" w="med" len="med"/>
-                    </a:lnB>
-                  </a:tcPr>
-                </a:tc>
-              </a:tr>
-              <a:tr h="438912">
-                <a:tc>
-                  <a:txBody>
-                    <a:bodyPr/>
-                    <a:lstStyle/>
-                    <a:p>
-                      <a:pPr indent="0" marL="0">
-                        <a:buNone/>
-                      </a:pPr>
-                      <a:r>
-                        <a:rPr lang="en-US" sz="1200" b="1" dirty="0">
-                          <a:solidFill>
-                            <a:schemeClr val="accent3"/>
+                            <a:schemeClr val="tx2"/>
                           </a:solidFill>
                           <a:latin typeface="Calibri" pitchFamily="34" charset="0"/>
                           <a:ea typeface="Calibri" pitchFamily="34" charset="-122"/>
                           <a:cs typeface="Calibri" pitchFamily="34" charset="-120"/>
                         </a:rPr>
-                        <a:t>MODERADO</a:t>
+                        <a:t>CATEGORÍA</a:t>
                       </a:r>
-                      <a:endParaRPr lang="en-US" sz="1200" dirty="0">
+                      <a:endParaRPr lang="en-US" sz="850" dirty="0">
                         <a:latin typeface="Calibri" charset="0"/>
                         <a:ea typeface="Calibri" charset="0"/>
                         <a:cs typeface="Calibri" charset="0"/>
                       </a:endParaRPr>
                     </a:p>
                   </a:txBody>
-                  <a:tcPr marL="91440" marR="91440" marT="45720" marB="45720" anchor="ctr">
+                  <a:tcPr anchor="ctr">
                     <a:lnL w="0" cap="flat" cmpd="sng" algn="ctr">
                       <a:noFill/>
                     </a:lnL>
@@ -8489,28 +10409,28 @@
                     <a:bodyPr/>
                     <a:lstStyle/>
                     <a:p>
-                      <a:pPr algn="r" indent="0" marL="0">
+                      <a:pPr marL="0" indent="0" algn="l">
                         <a:buNone/>
                       </a:pPr>
                       <a:r>
-                        <a:rPr lang="en-US" sz="1200" dirty="0">
+                        <a:rPr lang="en-US" sz="850" b="1" dirty="0">
                           <a:solidFill>
-                            <a:schemeClr val="tx1"/>
+                            <a:schemeClr val="tx2"/>
                           </a:solidFill>
-                          <a:latin typeface="Consolas" pitchFamily="34" charset="0"/>
-                          <a:ea typeface="Consolas" pitchFamily="34" charset="-122"/>
-                          <a:cs typeface="Consolas" pitchFamily="34" charset="-120"/>
+                          <a:latin typeface="Calibri" pitchFamily="34" charset="0"/>
+                          <a:ea typeface="Calibri" pitchFamily="34" charset="-122"/>
+                          <a:cs typeface="Calibri" pitchFamily="34" charset="-120"/>
                         </a:rPr>
-                        <a:t>11.674</a:t>
+                        <a:t>ACCIÓN PROPUESTA</a:t>
                       </a:r>
-                      <a:endParaRPr lang="en-US" sz="1200" dirty="0">
-                        <a:latin typeface="Consolas" charset="0"/>
-                        <a:ea typeface="Consolas" charset="0"/>
-                        <a:cs typeface="Consolas" charset="0"/>
+                      <a:endParaRPr lang="en-US" sz="850" dirty="0">
+                        <a:latin typeface="Calibri" charset="0"/>
+                        <a:ea typeface="Calibri" charset="0"/>
+                        <a:cs typeface="Calibri" charset="0"/>
                       </a:endParaRPr>
                     </a:p>
                   </a:txBody>
-                  <a:tcPr marL="91440" marR="91440" marT="45720" marB="45720" anchor="ctr">
+                  <a:tcPr anchor="ctr">
                     <a:lnL w="0" cap="flat" cmpd="sng" algn="ctr">
                       <a:noFill/>
                     </a:lnL>
@@ -8536,28 +10456,28 @@
                     <a:bodyPr/>
                     <a:lstStyle/>
                     <a:p>
-                      <a:pPr algn="r" indent="0" marL="0">
+                      <a:pPr marL="0" indent="0" algn="l">
                         <a:buNone/>
                       </a:pPr>
                       <a:r>
-                        <a:rPr lang="en-US" sz="1200" dirty="0">
+                        <a:rPr lang="en-US" sz="850" b="1" dirty="0">
                           <a:solidFill>
-                            <a:schemeClr val="tx1"/>
+                            <a:schemeClr val="tx2"/>
                           </a:solidFill>
-                          <a:latin typeface="Consolas" pitchFamily="34" charset="0"/>
-                          <a:ea typeface="Consolas" pitchFamily="34" charset="-122"/>
-                          <a:cs typeface="Consolas" pitchFamily="34" charset="-120"/>
+                          <a:latin typeface="Calibri" pitchFamily="34" charset="0"/>
+                          <a:ea typeface="Calibri" pitchFamily="34" charset="-122"/>
+                          <a:cs typeface="Calibri" pitchFamily="34" charset="-120"/>
                         </a:rPr>
-                        <a:t>35,8 %</a:t>
+                        <a:t>IMPAGO REAL</a:t>
                       </a:r>
-                      <a:endParaRPr lang="en-US" sz="1200" dirty="0">
-                        <a:latin typeface="Consolas" charset="0"/>
-                        <a:ea typeface="Consolas" charset="0"/>
-                        <a:cs typeface="Consolas" charset="0"/>
+                      <a:endParaRPr lang="en-US" sz="850" dirty="0">
+                        <a:latin typeface="Calibri" charset="0"/>
+                        <a:ea typeface="Calibri" charset="0"/>
+                        <a:cs typeface="Calibri" charset="0"/>
                       </a:endParaRPr>
                     </a:p>
                   </a:txBody>
-                  <a:tcPr marL="91440" marR="91440" marT="45720" marB="45720" anchor="ctr">
+                  <a:tcPr anchor="ctr">
                     <a:lnL w="0" cap="flat" cmpd="sng" algn="ctr">
                       <a:noFill/>
                     </a:lnL>
@@ -8578,2016 +10498,11 @@
                     </a:lnB>
                   </a:tcPr>
                 </a:tc>
-                <a:tc>
-                  <a:txBody>
-                    <a:bodyPr/>
-                    <a:lstStyle/>
-                    <a:p>
-                      <a:pPr algn="r" indent="0" marL="0">
-                        <a:buNone/>
-                      </a:pPr>
-                      <a:r>
-                        <a:rPr lang="en-US" sz="1200" dirty="0">
-                          <a:solidFill>
-                            <a:schemeClr val="tx1"/>
-                          </a:solidFill>
-                          <a:latin typeface="Consolas" pitchFamily="34" charset="0"/>
-                          <a:ea typeface="Consolas" pitchFamily="34" charset="-122"/>
-                          <a:cs typeface="Consolas" pitchFamily="34" charset="-120"/>
-                        </a:rPr>
-                        <a:t>132,4 M$</a:t>
-                      </a:r>
-                      <a:endParaRPr lang="en-US" sz="1200" dirty="0">
-                        <a:latin typeface="Consolas" charset="0"/>
-                        <a:ea typeface="Consolas" charset="0"/>
-                        <a:cs typeface="Consolas" charset="0"/>
-                      </a:endParaRPr>
-                    </a:p>
-                  </a:txBody>
-                  <a:tcPr marL="91440" marR="91440" marT="45720" marB="45720" anchor="ctr">
-                    <a:lnL w="0" cap="flat" cmpd="sng" algn="ctr">
-                      <a:noFill/>
-                    </a:lnL>
-                    <a:lnR w="0" cap="flat" cmpd="sng" algn="ctr">
-                      <a:noFill/>
-                    </a:lnR>
-                    <a:lnT w="0" cap="flat" cmpd="sng" algn="ctr">
-                      <a:noFill/>
-                    </a:lnT>
-                    <a:lnB w="9525" cap="flat" cmpd="sng" algn="ctr">
-                      <a:solidFill>
-                        <a:srgbClr val="DCE2E7"/>
-                      </a:solidFill>
-                      <a:prstDash val="solid"/>
-                      <a:round/>
-                      <a:headEnd type="none" w="med" len="med"/>
-                      <a:tailEnd type="none" w="med" len="med"/>
-                    </a:lnB>
-                  </a:tcPr>
-                </a:tc>
-                <a:tc>
-                  <a:txBody>
-                    <a:bodyPr/>
-                    <a:lstStyle/>
-                    <a:p>
-                      <a:pPr algn="r" indent="0" marL="0">
-                        <a:buNone/>
-                      </a:pPr>
-                      <a:r>
-                        <a:rPr lang="en-US" sz="1200" dirty="0">
-                          <a:solidFill>
-                            <a:schemeClr val="tx1"/>
-                          </a:solidFill>
-                          <a:latin typeface="Consolas" pitchFamily="34" charset="0"/>
-                          <a:ea typeface="Consolas" pitchFamily="34" charset="-122"/>
-                          <a:cs typeface="Consolas" pitchFamily="34" charset="-120"/>
-                        </a:rPr>
-                        <a:t>39,8 %</a:t>
-                      </a:r>
-                      <a:endParaRPr lang="en-US" sz="1200" dirty="0">
-                        <a:latin typeface="Consolas" charset="0"/>
-                        <a:ea typeface="Consolas" charset="0"/>
-                        <a:cs typeface="Consolas" charset="0"/>
-                      </a:endParaRPr>
-                    </a:p>
-                  </a:txBody>
-                  <a:tcPr marL="91440" marR="91440" marT="45720" marB="45720" anchor="ctr">
-                    <a:lnL w="0" cap="flat" cmpd="sng" algn="ctr">
-                      <a:noFill/>
-                    </a:lnL>
-                    <a:lnR w="0" cap="flat" cmpd="sng" algn="ctr">
-                      <a:noFill/>
-                    </a:lnR>
-                    <a:lnT w="0" cap="flat" cmpd="sng" algn="ctr">
-                      <a:noFill/>
-                    </a:lnT>
-                    <a:lnB w="9525" cap="flat" cmpd="sng" algn="ctr">
-                      <a:solidFill>
-                        <a:srgbClr val="DCE2E7"/>
-                      </a:solidFill>
-                      <a:prstDash val="solid"/>
-                      <a:round/>
-                      <a:headEnd type="none" w="med" len="med"/>
-                      <a:tailEnd type="none" w="med" len="med"/>
-                    </a:lnB>
-                  </a:tcPr>
-                </a:tc>
-              </a:tr>
-              <a:tr h="438912">
-                <a:tc>
-                  <a:txBody>
-                    <a:bodyPr/>
-                    <a:lstStyle/>
-                    <a:p>
-                      <a:pPr indent="0" marL="0">
-                        <a:buNone/>
-                      </a:pPr>
-                      <a:r>
-                        <a:rPr lang="en-US" sz="1200" b="1" dirty="0">
-                          <a:solidFill>
-                            <a:schemeClr val="accent4"/>
-                          </a:solidFill>
-                          <a:latin typeface="Calibri" pitchFamily="34" charset="0"/>
-                          <a:ea typeface="Calibri" pitchFamily="34" charset="-122"/>
-                          <a:cs typeface="Calibri" pitchFamily="34" charset="-120"/>
-                        </a:rPr>
-                        <a:t>CRÍTICO</a:t>
-                      </a:r>
-                      <a:endParaRPr lang="en-US" sz="1200" dirty="0">
-                        <a:latin typeface="Calibri" charset="0"/>
-                        <a:ea typeface="Calibri" charset="0"/>
-                        <a:cs typeface="Calibri" charset="0"/>
-                      </a:endParaRPr>
-                    </a:p>
-                  </a:txBody>
-                  <a:tcPr marL="91440" marR="91440" marT="45720" marB="45720" anchor="ctr">
-                    <a:lnL w="0" cap="flat" cmpd="sng" algn="ctr">
-                      <a:noFill/>
-                    </a:lnL>
-                    <a:lnR w="0" cap="flat" cmpd="sng" algn="ctr">
-                      <a:noFill/>
-                    </a:lnR>
-                    <a:lnT w="0" cap="flat" cmpd="sng" algn="ctr">
-                      <a:noFill/>
-                    </a:lnT>
-                    <a:lnB w="9525" cap="flat" cmpd="sng" algn="ctr">
-                      <a:solidFill>
-                        <a:srgbClr val="DCE2E7"/>
-                      </a:solidFill>
-                      <a:prstDash val="solid"/>
-                      <a:round/>
-                      <a:headEnd type="none" w="med" len="med"/>
-                      <a:tailEnd type="none" w="med" len="med"/>
-                    </a:lnB>
-                  </a:tcPr>
-                </a:tc>
-                <a:tc>
-                  <a:txBody>
-                    <a:bodyPr/>
-                    <a:lstStyle/>
-                    <a:p>
-                      <a:pPr algn="r" indent="0" marL="0">
-                        <a:buNone/>
-                      </a:pPr>
-                      <a:r>
-                        <a:rPr lang="en-US" sz="1200" dirty="0">
-                          <a:solidFill>
-                            <a:schemeClr val="tx1"/>
-                          </a:solidFill>
-                          <a:latin typeface="Consolas" pitchFamily="34" charset="0"/>
-                          <a:ea typeface="Consolas" pitchFamily="34" charset="-122"/>
-                          <a:cs typeface="Consolas" pitchFamily="34" charset="-120"/>
-                        </a:rPr>
-                        <a:t>1.161</a:t>
-                      </a:r>
-                      <a:endParaRPr lang="en-US" sz="1200" dirty="0">
-                        <a:latin typeface="Consolas" charset="0"/>
-                        <a:ea typeface="Consolas" charset="0"/>
-                        <a:cs typeface="Consolas" charset="0"/>
-                      </a:endParaRPr>
-                    </a:p>
-                  </a:txBody>
-                  <a:tcPr marL="91440" marR="91440" marT="45720" marB="45720" anchor="ctr">
-                    <a:lnL w="0" cap="flat" cmpd="sng" algn="ctr">
-                      <a:noFill/>
-                    </a:lnL>
-                    <a:lnR w="0" cap="flat" cmpd="sng" algn="ctr">
-                      <a:noFill/>
-                    </a:lnR>
-                    <a:lnT w="0" cap="flat" cmpd="sng" algn="ctr">
-                      <a:noFill/>
-                    </a:lnT>
-                    <a:lnB w="9525" cap="flat" cmpd="sng" algn="ctr">
-                      <a:solidFill>
-                        <a:srgbClr val="DCE2E7"/>
-                      </a:solidFill>
-                      <a:prstDash val="solid"/>
-                      <a:round/>
-                      <a:headEnd type="none" w="med" len="med"/>
-                      <a:tailEnd type="none" w="med" len="med"/>
-                    </a:lnB>
-                  </a:tcPr>
-                </a:tc>
-                <a:tc>
-                  <a:txBody>
-                    <a:bodyPr/>
-                    <a:lstStyle/>
-                    <a:p>
-                      <a:pPr algn="r" indent="0" marL="0">
-                        <a:buNone/>
-                      </a:pPr>
-                      <a:r>
-                        <a:rPr lang="en-US" sz="1200" dirty="0">
-                          <a:solidFill>
-                            <a:schemeClr val="tx1"/>
-                          </a:solidFill>
-                          <a:latin typeface="Consolas" pitchFamily="34" charset="0"/>
-                          <a:ea typeface="Consolas" pitchFamily="34" charset="-122"/>
-                          <a:cs typeface="Consolas" pitchFamily="34" charset="-120"/>
-                        </a:rPr>
-                        <a:t>3,6 %</a:t>
-                      </a:r>
-                      <a:endParaRPr lang="en-US" sz="1200" dirty="0">
-                        <a:latin typeface="Consolas" charset="0"/>
-                        <a:ea typeface="Consolas" charset="0"/>
-                        <a:cs typeface="Consolas" charset="0"/>
-                      </a:endParaRPr>
-                    </a:p>
-                  </a:txBody>
-                  <a:tcPr marL="91440" marR="91440" marT="45720" marB="45720" anchor="ctr">
-                    <a:lnL w="0" cap="flat" cmpd="sng" algn="ctr">
-                      <a:noFill/>
-                    </a:lnL>
-                    <a:lnR w="0" cap="flat" cmpd="sng" algn="ctr">
-                      <a:noFill/>
-                    </a:lnR>
-                    <a:lnT w="0" cap="flat" cmpd="sng" algn="ctr">
-                      <a:noFill/>
-                    </a:lnT>
-                    <a:lnB w="9525" cap="flat" cmpd="sng" algn="ctr">
-                      <a:solidFill>
-                        <a:srgbClr val="DCE2E7"/>
-                      </a:solidFill>
-                      <a:prstDash val="solid"/>
-                      <a:round/>
-                      <a:headEnd type="none" w="med" len="med"/>
-                      <a:tailEnd type="none" w="med" len="med"/>
-                    </a:lnB>
-                  </a:tcPr>
-                </a:tc>
-                <a:tc>
-                  <a:txBody>
-                    <a:bodyPr/>
-                    <a:lstStyle/>
-                    <a:p>
-                      <a:pPr algn="r" indent="0" marL="0">
-                        <a:buNone/>
-                      </a:pPr>
-                      <a:r>
-                        <a:rPr lang="en-US" sz="1200" dirty="0">
-                          <a:solidFill>
-                            <a:schemeClr val="tx1"/>
-                          </a:solidFill>
-                          <a:latin typeface="Consolas" pitchFamily="34" charset="0"/>
-                          <a:ea typeface="Consolas" pitchFamily="34" charset="-122"/>
-                          <a:cs typeface="Consolas" pitchFamily="34" charset="-120"/>
-                        </a:rPr>
-                        <a:t>18,8 M$</a:t>
-                      </a:r>
-                      <a:endParaRPr lang="en-US" sz="1200" dirty="0">
-                        <a:latin typeface="Consolas" charset="0"/>
-                        <a:ea typeface="Consolas" charset="0"/>
-                        <a:cs typeface="Consolas" charset="0"/>
-                      </a:endParaRPr>
-                    </a:p>
-                  </a:txBody>
-                  <a:tcPr marL="91440" marR="91440" marT="45720" marB="45720" anchor="ctr">
-                    <a:lnL w="0" cap="flat" cmpd="sng" algn="ctr">
-                      <a:noFill/>
-                    </a:lnL>
-                    <a:lnR w="0" cap="flat" cmpd="sng" algn="ctr">
-                      <a:noFill/>
-                    </a:lnR>
-                    <a:lnT w="0" cap="flat" cmpd="sng" algn="ctr">
-                      <a:noFill/>
-                    </a:lnT>
-                    <a:lnB w="9525" cap="flat" cmpd="sng" algn="ctr">
-                      <a:solidFill>
-                        <a:srgbClr val="DCE2E7"/>
-                      </a:solidFill>
-                      <a:prstDash val="solid"/>
-                      <a:round/>
-                      <a:headEnd type="none" w="med" len="med"/>
-                      <a:tailEnd type="none" w="med" len="med"/>
-                    </a:lnB>
-                  </a:tcPr>
-                </a:tc>
-                <a:tc>
-                  <a:txBody>
-                    <a:bodyPr/>
-                    <a:lstStyle/>
-                    <a:p>
-                      <a:pPr algn="r" indent="0" marL="0">
-                        <a:buNone/>
-                      </a:pPr>
-                      <a:r>
-                        <a:rPr lang="en-US" sz="1200" dirty="0">
-                          <a:solidFill>
-                            <a:schemeClr val="tx1"/>
-                          </a:solidFill>
-                          <a:latin typeface="Consolas" pitchFamily="34" charset="0"/>
-                          <a:ea typeface="Consolas" pitchFamily="34" charset="-122"/>
-                          <a:cs typeface="Consolas" pitchFamily="34" charset="-120"/>
-                        </a:rPr>
-                        <a:t>72,1 %</a:t>
-                      </a:r>
-                      <a:endParaRPr lang="en-US" sz="1200" dirty="0">
-                        <a:latin typeface="Consolas" charset="0"/>
-                        <a:ea typeface="Consolas" charset="0"/>
-                        <a:cs typeface="Consolas" charset="0"/>
-                      </a:endParaRPr>
-                    </a:p>
-                  </a:txBody>
-                  <a:tcPr marL="91440" marR="91440" marT="45720" marB="45720" anchor="ctr">
-                    <a:lnL w="0" cap="flat" cmpd="sng" algn="ctr">
-                      <a:noFill/>
-                    </a:lnL>
-                    <a:lnR w="0" cap="flat" cmpd="sng" algn="ctr">
-                      <a:noFill/>
-                    </a:lnR>
-                    <a:lnT w="0" cap="flat" cmpd="sng" algn="ctr">
-                      <a:noFill/>
-                    </a:lnT>
-                    <a:lnB w="9525" cap="flat" cmpd="sng" algn="ctr">
-                      <a:solidFill>
-                        <a:srgbClr val="DCE2E7"/>
-                      </a:solidFill>
-                      <a:prstDash val="solid"/>
-                      <a:round/>
-                      <a:headEnd type="none" w="med" len="med"/>
-                      <a:tailEnd type="none" w="med" len="med"/>
-                    </a:lnB>
-                  </a:tcPr>
-                </a:tc>
-              </a:tr>
-            </a:tbl>
-          </a:graphicData>
-        </a:graphic>
-      </p:graphicFrame>
-      <p:sp>
-        <p:nvSpPr>
-          <p:cNvPr id="6" name="Tarjeta barras"/>
-          <p:cNvSpPr/>
-          <p:nvPr/>
-        </p:nvSpPr>
-        <p:spPr>
-          <a:xfrm>
-            <a:off x="5349240" y="1325880"/>
-            <a:ext cx="3337560" cy="2103120"/>
-          </a:xfrm>
-          <a:prstGeom prst="roundRect">
-            <a:avLst>
-              <a:gd name="adj" fmla="val 3043"/>
-            </a:avLst>
-          </a:prstGeom>
-          <a:solidFill>
-            <a:schemeClr val="bg1"/>
-          </a:solidFill>
-          <a:ln w="9525">
-            <a:solidFill>
-              <a:schemeClr val="accent5"/>
-            </a:solidFill>
-            <a:prstDash val="solid"/>
-          </a:ln>
-        </p:spPr>
-      </p:sp>
-      <p:sp>
-        <p:nvSpPr>
-          <p:cNvPr id="7" name="Titular barras"/>
-          <p:cNvSpPr txBox="1"/>
-          <p:nvPr/>
-        </p:nvSpPr>
-        <p:spPr>
-          <a:xfrm>
-            <a:off x="5532120" y="1444752"/>
-            <a:ext cx="3017520" cy="256032"/>
-          </a:xfrm>
-          <a:prstGeom prst="rect">
-            <a:avLst/>
-          </a:prstGeom>
-          <a:noFill/>
-          <a:ln/>
-        </p:spPr>
-        <p:txBody>
-          <a:bodyPr wrap="square" lIns="0" tIns="0" rIns="0" bIns="0" rtlCol="0" anchor="ctr"/>
-          <a:lstStyle/>
-          <a:p>
-            <a:pPr indent="0" marL="0">
-              <a:buNone/>
-            </a:pPr>
-            <a:r>
-              <a:rPr lang="en-US" sz="900" b="1" spc="100" kern="0" dirty="0">
-                <a:solidFill>
-                  <a:schemeClr val="tx2"/>
-                </a:solidFill>
-                <a:latin typeface="Calibri" pitchFamily="34" charset="0"/>
-                <a:ea typeface="Calibri" pitchFamily="34" charset="-122"/>
-                <a:cs typeface="Calibri" pitchFamily="34" charset="-120"/>
-              </a:rPr>
-              <a:t>TASA DE IMPAGO REAL · ESCALA 0-100 %</a:t>
-            </a:r>
-            <a:endParaRPr lang="en-US" sz="900" dirty="0"/>
-          </a:p>
-        </p:txBody>
-      </p:sp>
-      <p:sp>
-        <p:nvSpPr>
-          <p:cNvPr id="8" name="Etiqueta barra BAJO"/>
-          <p:cNvSpPr txBox="1"/>
-          <p:nvPr/>
-        </p:nvSpPr>
-        <p:spPr>
-          <a:xfrm>
-            <a:off x="5532120" y="1828800"/>
-            <a:ext cx="868680" cy="274320"/>
-          </a:xfrm>
-          <a:prstGeom prst="rect">
-            <a:avLst/>
-          </a:prstGeom>
-          <a:noFill/>
-          <a:ln/>
-        </p:spPr>
-        <p:txBody>
-          <a:bodyPr wrap="square" lIns="0" tIns="0" rIns="0" bIns="0" rtlCol="0" anchor="ctr"/>
-          <a:lstStyle/>
-          <a:p>
-            <a:pPr indent="0" marL="0">
-              <a:buNone/>
-            </a:pPr>
-            <a:r>
-              <a:rPr lang="en-US" sz="1000" b="1" dirty="0">
-                <a:solidFill>
-                  <a:schemeClr val="accent2"/>
-                </a:solidFill>
-                <a:latin typeface="Calibri" pitchFamily="34" charset="0"/>
-                <a:ea typeface="Calibri" pitchFamily="34" charset="-122"/>
-                <a:cs typeface="Calibri" pitchFamily="34" charset="-120"/>
-              </a:rPr>
-              <a:t>BAJO</a:t>
-            </a:r>
-            <a:endParaRPr lang="en-US" sz="1000" dirty="0"/>
-          </a:p>
-        </p:txBody>
-      </p:sp>
-      <p:sp>
-        <p:nvSpPr>
-          <p:cNvPr id="9" name="Pista BAJO"/>
-          <p:cNvSpPr/>
-          <p:nvPr/>
-        </p:nvSpPr>
-        <p:spPr>
-          <a:xfrm>
-            <a:off x="6446520" y="1847088"/>
-            <a:ext cx="2057400" cy="237744"/>
-          </a:xfrm>
-          <a:prstGeom prst="rect">
-            <a:avLst/>
-          </a:prstGeom>
-          <a:solidFill>
-            <a:schemeClr val="bg2"/>
-          </a:solidFill>
-          <a:ln w="12700">
-            <a:solidFill>
-              <a:schemeClr val="bg2"/>
-            </a:solidFill>
-            <a:prstDash val="solid"/>
-          </a:ln>
-        </p:spPr>
-      </p:sp>
-      <p:sp>
-        <p:nvSpPr>
-          <p:cNvPr id="10" name="Barra BAJO"/>
-          <p:cNvSpPr/>
-          <p:nvPr/>
-        </p:nvSpPr>
-        <p:spPr>
-          <a:xfrm>
-            <a:off x="6446520" y="1847088"/>
-            <a:ext cx="168707" cy="237744"/>
-          </a:xfrm>
-          <a:prstGeom prst="rect">
-            <a:avLst/>
-          </a:prstGeom>
-          <a:solidFill>
-            <a:schemeClr val="accent2"/>
-          </a:solidFill>
-          <a:ln w="12700">
-            <a:solidFill>
-              <a:schemeClr val="accent2"/>
-            </a:solidFill>
-            <a:prstDash val="solid"/>
-          </a:ln>
-        </p:spPr>
-      </p:sp>
-      <p:sp>
-        <p:nvSpPr>
-          <p:cNvPr id="11" name="Valor barra BAJO"/>
-          <p:cNvSpPr txBox="1"/>
-          <p:nvPr/>
-        </p:nvSpPr>
-        <p:spPr>
-          <a:xfrm>
-            <a:off x="6660947" y="1828800"/>
-            <a:ext cx="640080" cy="274320"/>
-          </a:xfrm>
-          <a:prstGeom prst="rect">
-            <a:avLst/>
-          </a:prstGeom>
-          <a:noFill/>
-          <a:ln/>
-        </p:spPr>
-        <p:txBody>
-          <a:bodyPr wrap="square" lIns="0" tIns="0" rIns="0" bIns="0" rtlCol="0" anchor="ctr"/>
-          <a:lstStyle/>
-          <a:p>
-            <a:pPr indent="0" marL="0">
-              <a:buNone/>
-            </a:pPr>
-            <a:r>
-              <a:rPr lang="en-US" sz="1000" dirty="0">
-                <a:solidFill>
-                  <a:schemeClr val="tx1"/>
-                </a:solidFill>
-                <a:latin typeface="Consolas" pitchFamily="34" charset="0"/>
-                <a:ea typeface="Consolas" pitchFamily="34" charset="-122"/>
-                <a:cs typeface="Consolas" pitchFamily="34" charset="-120"/>
-              </a:rPr>
-              <a:t>8,2 %</a:t>
-            </a:r>
-            <a:endParaRPr lang="en-US" sz="1000" dirty="0"/>
-          </a:p>
-        </p:txBody>
-      </p:sp>
-      <p:sp>
-        <p:nvSpPr>
-          <p:cNvPr id="12" name="Etiqueta barra MODERADO"/>
-          <p:cNvSpPr txBox="1"/>
-          <p:nvPr/>
-        </p:nvSpPr>
-        <p:spPr>
-          <a:xfrm>
-            <a:off x="5532120" y="2331720"/>
-            <a:ext cx="868680" cy="274320"/>
-          </a:xfrm>
-          <a:prstGeom prst="rect">
-            <a:avLst/>
-          </a:prstGeom>
-          <a:noFill/>
-          <a:ln/>
-        </p:spPr>
-        <p:txBody>
-          <a:bodyPr wrap="square" lIns="0" tIns="0" rIns="0" bIns="0" rtlCol="0" anchor="ctr"/>
-          <a:lstStyle/>
-          <a:p>
-            <a:pPr indent="0" marL="0">
-              <a:buNone/>
-            </a:pPr>
-            <a:r>
-              <a:rPr lang="en-US" sz="1000" b="1" dirty="0">
-                <a:solidFill>
-                  <a:schemeClr val="accent3"/>
-                </a:solidFill>
-                <a:latin typeface="Calibri" pitchFamily="34" charset="0"/>
-                <a:ea typeface="Calibri" pitchFamily="34" charset="-122"/>
-                <a:cs typeface="Calibri" pitchFamily="34" charset="-120"/>
-              </a:rPr>
-              <a:t>MODERADO</a:t>
-            </a:r>
-            <a:endParaRPr lang="en-US" sz="1000" dirty="0"/>
-          </a:p>
-        </p:txBody>
-      </p:sp>
-      <p:sp>
-        <p:nvSpPr>
-          <p:cNvPr id="13" name="Pista MODERADO"/>
-          <p:cNvSpPr/>
-          <p:nvPr/>
-        </p:nvSpPr>
-        <p:spPr>
-          <a:xfrm>
-            <a:off x="6446520" y="2350008"/>
-            <a:ext cx="2057400" cy="237744"/>
-          </a:xfrm>
-          <a:prstGeom prst="rect">
-            <a:avLst/>
-          </a:prstGeom>
-          <a:solidFill>
-            <a:schemeClr val="bg2"/>
-          </a:solidFill>
-          <a:ln w="12700">
-            <a:solidFill>
-              <a:schemeClr val="bg2"/>
-            </a:solidFill>
-            <a:prstDash val="solid"/>
-          </a:ln>
-        </p:spPr>
-      </p:sp>
-      <p:sp>
-        <p:nvSpPr>
-          <p:cNvPr id="14" name="Barra MODERADO"/>
-          <p:cNvSpPr/>
-          <p:nvPr/>
-        </p:nvSpPr>
-        <p:spPr>
-          <a:xfrm>
-            <a:off x="6446520" y="2350008"/>
-            <a:ext cx="818845" cy="237744"/>
-          </a:xfrm>
-          <a:prstGeom prst="rect">
-            <a:avLst/>
-          </a:prstGeom>
-          <a:solidFill>
-            <a:schemeClr val="accent3"/>
-          </a:solidFill>
-          <a:ln w="12700">
-            <a:solidFill>
-              <a:schemeClr val="accent3"/>
-            </a:solidFill>
-            <a:prstDash val="solid"/>
-          </a:ln>
-        </p:spPr>
-      </p:sp>
-      <p:sp>
-        <p:nvSpPr>
-          <p:cNvPr id="15" name="Valor barra MODERADO"/>
-          <p:cNvSpPr txBox="1"/>
-          <p:nvPr/>
-        </p:nvSpPr>
-        <p:spPr>
-          <a:xfrm>
-            <a:off x="7311085" y="2331720"/>
-            <a:ext cx="640080" cy="274320"/>
-          </a:xfrm>
-          <a:prstGeom prst="rect">
-            <a:avLst/>
-          </a:prstGeom>
-          <a:noFill/>
-          <a:ln/>
-        </p:spPr>
-        <p:txBody>
-          <a:bodyPr wrap="square" lIns="0" tIns="0" rIns="0" bIns="0" rtlCol="0" anchor="ctr"/>
-          <a:lstStyle/>
-          <a:p>
-            <a:pPr indent="0" marL="0">
-              <a:buNone/>
-            </a:pPr>
-            <a:r>
-              <a:rPr lang="en-US" sz="1000" dirty="0">
-                <a:solidFill>
-                  <a:schemeClr val="tx1"/>
-                </a:solidFill>
-                <a:latin typeface="Consolas" pitchFamily="34" charset="0"/>
-                <a:ea typeface="Consolas" pitchFamily="34" charset="-122"/>
-                <a:cs typeface="Consolas" pitchFamily="34" charset="-120"/>
-              </a:rPr>
-              <a:t>39,8 %</a:t>
-            </a:r>
-            <a:endParaRPr lang="en-US" sz="1000" dirty="0"/>
-          </a:p>
-        </p:txBody>
-      </p:sp>
-      <p:sp>
-        <p:nvSpPr>
-          <p:cNvPr id="16" name="Etiqueta barra CRÍTICO"/>
-          <p:cNvSpPr txBox="1"/>
-          <p:nvPr/>
-        </p:nvSpPr>
-        <p:spPr>
-          <a:xfrm>
-            <a:off x="5532120" y="2834640"/>
-            <a:ext cx="868680" cy="274320"/>
-          </a:xfrm>
-          <a:prstGeom prst="rect">
-            <a:avLst/>
-          </a:prstGeom>
-          <a:noFill/>
-          <a:ln/>
-        </p:spPr>
-        <p:txBody>
-          <a:bodyPr wrap="square" lIns="0" tIns="0" rIns="0" bIns="0" rtlCol="0" anchor="ctr"/>
-          <a:lstStyle/>
-          <a:p>
-            <a:pPr indent="0" marL="0">
-              <a:buNone/>
-            </a:pPr>
-            <a:r>
-              <a:rPr lang="en-US" sz="1000" b="1" dirty="0">
-                <a:solidFill>
-                  <a:schemeClr val="accent4"/>
-                </a:solidFill>
-                <a:latin typeface="Calibri" pitchFamily="34" charset="0"/>
-                <a:ea typeface="Calibri" pitchFamily="34" charset="-122"/>
-                <a:cs typeface="Calibri" pitchFamily="34" charset="-120"/>
-              </a:rPr>
-              <a:t>CRÍTICO</a:t>
-            </a:r>
-            <a:endParaRPr lang="en-US" sz="1000" dirty="0"/>
-          </a:p>
-        </p:txBody>
-      </p:sp>
-      <p:sp>
-        <p:nvSpPr>
-          <p:cNvPr id="17" name="Pista CRÍTICO"/>
-          <p:cNvSpPr/>
-          <p:nvPr/>
-        </p:nvSpPr>
-        <p:spPr>
-          <a:xfrm>
-            <a:off x="6446520" y="2852928"/>
-            <a:ext cx="2057400" cy="237744"/>
-          </a:xfrm>
-          <a:prstGeom prst="rect">
-            <a:avLst/>
-          </a:prstGeom>
-          <a:solidFill>
-            <a:schemeClr val="bg2"/>
-          </a:solidFill>
-          <a:ln w="12700">
-            <a:solidFill>
-              <a:schemeClr val="bg2"/>
-            </a:solidFill>
-            <a:prstDash val="solid"/>
-          </a:ln>
-        </p:spPr>
-      </p:sp>
-      <p:sp>
-        <p:nvSpPr>
-          <p:cNvPr id="18" name="Barra CRÍTICO"/>
-          <p:cNvSpPr/>
-          <p:nvPr/>
-        </p:nvSpPr>
-        <p:spPr>
-          <a:xfrm>
-            <a:off x="6446520" y="2852928"/>
-            <a:ext cx="1483385" cy="237744"/>
-          </a:xfrm>
-          <a:prstGeom prst="rect">
-            <a:avLst/>
-          </a:prstGeom>
-          <a:solidFill>
-            <a:schemeClr val="accent4"/>
-          </a:solidFill>
-          <a:ln w="12700">
-            <a:solidFill>
-              <a:schemeClr val="accent4"/>
-            </a:solidFill>
-            <a:prstDash val="solid"/>
-          </a:ln>
-        </p:spPr>
-      </p:sp>
-      <p:sp>
-        <p:nvSpPr>
-          <p:cNvPr id="19" name="Valor barra CRÍTICO"/>
-          <p:cNvSpPr txBox="1"/>
-          <p:nvPr/>
-        </p:nvSpPr>
-        <p:spPr>
-          <a:xfrm>
-            <a:off x="7975625" y="2834640"/>
-            <a:ext cx="640080" cy="274320"/>
-          </a:xfrm>
-          <a:prstGeom prst="rect">
-            <a:avLst/>
-          </a:prstGeom>
-          <a:noFill/>
-          <a:ln/>
-        </p:spPr>
-        <p:txBody>
-          <a:bodyPr wrap="square" lIns="0" tIns="0" rIns="0" bIns="0" rtlCol="0" anchor="ctr"/>
-          <a:lstStyle/>
-          <a:p>
-            <a:pPr indent="0" marL="0">
-              <a:buNone/>
-            </a:pPr>
-            <a:r>
-              <a:rPr lang="en-US" sz="1000" dirty="0">
-                <a:solidFill>
-                  <a:schemeClr val="tx1"/>
-                </a:solidFill>
-                <a:latin typeface="Consolas" pitchFamily="34" charset="0"/>
-                <a:ea typeface="Consolas" pitchFamily="34" charset="-122"/>
-                <a:cs typeface="Consolas" pitchFamily="34" charset="-120"/>
-              </a:rPr>
-              <a:t>72,1 %</a:t>
-            </a:r>
-            <a:endParaRPr lang="en-US" sz="1000" dirty="0"/>
-          </a:p>
-        </p:txBody>
-      </p:sp>
-      <p:sp>
-        <p:nvSpPr>
-          <p:cNvPr id="20" name="Dato AUC: el score ordena bien el riesgo"/>
-          <p:cNvSpPr/>
-          <p:nvPr/>
-        </p:nvSpPr>
-        <p:spPr>
-          <a:xfrm>
-            <a:off x="457200" y="3611880"/>
-            <a:ext cx="2651760" cy="868680"/>
-          </a:xfrm>
-          <a:prstGeom prst="roundRect">
-            <a:avLst>
-              <a:gd name="adj" fmla="val 7368"/>
-            </a:avLst>
-          </a:prstGeom>
-          <a:solidFill>
-            <a:schemeClr val="bg1"/>
-          </a:solidFill>
-          <a:ln w="9525">
-            <a:solidFill>
-              <a:schemeClr val="accent5"/>
-            </a:solidFill>
-            <a:prstDash val="solid"/>
-          </a:ln>
-        </p:spPr>
-      </p:sp>
-      <p:sp>
-        <p:nvSpPr>
-          <p:cNvPr id="21" name="Valor AUC: el score ordena bien el riesgo"/>
-          <p:cNvSpPr txBox="1"/>
-          <p:nvPr/>
-        </p:nvSpPr>
-        <p:spPr>
-          <a:xfrm>
-            <a:off x="640080" y="3675888"/>
-            <a:ext cx="2286000" cy="411480"/>
-          </a:xfrm>
-          <a:prstGeom prst="rect">
-            <a:avLst/>
-          </a:prstGeom>
-          <a:noFill/>
-          <a:ln/>
-        </p:spPr>
-        <p:txBody>
-          <a:bodyPr wrap="square" lIns="0" tIns="0" rIns="0" bIns="0" rtlCol="0" anchor="ctr"/>
-          <a:lstStyle/>
-          <a:p>
-            <a:pPr indent="0" marL="0">
-              <a:buNone/>
-            </a:pPr>
-            <a:r>
-              <a:rPr lang="en-US" sz="2000" dirty="0">
-                <a:solidFill>
-                  <a:schemeClr val="tx1"/>
-                </a:solidFill>
-                <a:latin typeface="Consolas" pitchFamily="34" charset="0"/>
-                <a:ea typeface="Consolas" pitchFamily="34" charset="-122"/>
-                <a:cs typeface="Consolas" pitchFamily="34" charset="-120"/>
-              </a:rPr>
-              <a:t>0,793</a:t>
-            </a:r>
-            <a:endParaRPr lang="en-US" sz="2000" dirty="0"/>
-          </a:p>
-        </p:txBody>
-      </p:sp>
-      <p:sp>
-        <p:nvSpPr>
-          <p:cNvPr id="22" name="Texto AUC: el score ordena bien el riesgo"/>
-          <p:cNvSpPr txBox="1"/>
-          <p:nvPr/>
-        </p:nvSpPr>
-        <p:spPr>
-          <a:xfrm>
-            <a:off x="640080" y="4087368"/>
-            <a:ext cx="2377440" cy="320040"/>
-          </a:xfrm>
-          <a:prstGeom prst="rect">
-            <a:avLst/>
-          </a:prstGeom>
-          <a:noFill/>
-          <a:ln/>
-        </p:spPr>
-        <p:txBody>
-          <a:bodyPr wrap="square" lIns="0" tIns="0" rIns="0" bIns="0" rtlCol="0" anchor="t"/>
-          <a:lstStyle/>
-          <a:p>
-            <a:pPr indent="0" marL="0">
-              <a:buNone/>
-            </a:pPr>
-            <a:r>
-              <a:rPr lang="en-US" sz="1100" dirty="0">
-                <a:solidFill>
-                  <a:schemeClr val="tx2"/>
-                </a:solidFill>
-                <a:latin typeface="Calibri" pitchFamily="34" charset="0"/>
-                <a:ea typeface="Calibri" pitchFamily="34" charset="-122"/>
-                <a:cs typeface="Calibri" pitchFamily="34" charset="-120"/>
-              </a:rPr>
-              <a:t>AUC: el score ordena bien el riesgo</a:t>
-            </a:r>
-            <a:endParaRPr lang="en-US" sz="1100" dirty="0"/>
-          </a:p>
-        </p:txBody>
-      </p:sp>
-      <p:sp>
-        <p:nvSpPr>
-          <p:cNvPr id="23" name="Dato la media de impago en CRÍTICO"/>
-          <p:cNvSpPr/>
-          <p:nvPr/>
-        </p:nvSpPr>
-        <p:spPr>
-          <a:xfrm>
-            <a:off x="3246120" y="3611880"/>
-            <a:ext cx="2651760" cy="868680"/>
-          </a:xfrm>
-          <a:prstGeom prst="roundRect">
-            <a:avLst>
-              <a:gd name="adj" fmla="val 7368"/>
-            </a:avLst>
-          </a:prstGeom>
-          <a:solidFill>
-            <a:schemeClr val="bg1"/>
-          </a:solidFill>
-          <a:ln w="9525">
-            <a:solidFill>
-              <a:schemeClr val="accent5"/>
-            </a:solidFill>
-            <a:prstDash val="solid"/>
-          </a:ln>
-        </p:spPr>
-      </p:sp>
-      <p:sp>
-        <p:nvSpPr>
-          <p:cNvPr id="24" name="Valor la media de impago en CRÍTICO"/>
-          <p:cNvSpPr txBox="1"/>
-          <p:nvPr/>
-        </p:nvSpPr>
-        <p:spPr>
-          <a:xfrm>
-            <a:off x="3429000" y="3675888"/>
-            <a:ext cx="2286000" cy="411480"/>
-          </a:xfrm>
-          <a:prstGeom prst="rect">
-            <a:avLst/>
-          </a:prstGeom>
-          <a:noFill/>
-          <a:ln/>
-        </p:spPr>
-        <p:txBody>
-          <a:bodyPr wrap="square" lIns="0" tIns="0" rIns="0" bIns="0" rtlCol="0" anchor="ctr"/>
-          <a:lstStyle/>
-          <a:p>
-            <a:pPr indent="0" marL="0">
-              <a:buNone/>
-            </a:pPr>
-            <a:r>
-              <a:rPr lang="en-US" sz="2000" dirty="0">
-                <a:solidFill>
-                  <a:schemeClr val="accent4"/>
-                </a:solidFill>
-                <a:latin typeface="Consolas" pitchFamily="34" charset="0"/>
-                <a:ea typeface="Consolas" pitchFamily="34" charset="-122"/>
-                <a:cs typeface="Consolas" pitchFamily="34" charset="-120"/>
-              </a:rPr>
-              <a:t>3,3×</a:t>
-            </a:r>
-            <a:endParaRPr lang="en-US" sz="2000" dirty="0"/>
-          </a:p>
-        </p:txBody>
-      </p:sp>
-      <p:sp>
-        <p:nvSpPr>
-          <p:cNvPr id="25" name="Texto la media de impago en CRÍTICO"/>
-          <p:cNvSpPr txBox="1"/>
-          <p:nvPr/>
-        </p:nvSpPr>
-        <p:spPr>
-          <a:xfrm>
-            <a:off x="3429000" y="4087368"/>
-            <a:ext cx="2377440" cy="320040"/>
-          </a:xfrm>
-          <a:prstGeom prst="rect">
-            <a:avLst/>
-          </a:prstGeom>
-          <a:noFill/>
-          <a:ln/>
-        </p:spPr>
-        <p:txBody>
-          <a:bodyPr wrap="square" lIns="0" tIns="0" rIns="0" bIns="0" rtlCol="0" anchor="t"/>
-          <a:lstStyle/>
-          <a:p>
-            <a:pPr indent="0" marL="0">
-              <a:buNone/>
-            </a:pPr>
-            <a:r>
-              <a:rPr lang="en-US" sz="1100" dirty="0">
-                <a:solidFill>
-                  <a:schemeClr val="tx2"/>
-                </a:solidFill>
-                <a:latin typeface="Calibri" pitchFamily="34" charset="0"/>
-                <a:ea typeface="Calibri" pitchFamily="34" charset="-122"/>
-                <a:cs typeface="Calibri" pitchFamily="34" charset="-120"/>
-              </a:rPr>
-              <a:t>la media de impago en CRÍTICO</a:t>
-            </a:r>
-            <a:endParaRPr lang="en-US" sz="1100" dirty="0"/>
-          </a:p>
-        </p:txBody>
-      </p:sp>
-      <p:sp>
-        <p:nvSpPr>
-          <p:cNvPr id="26" name="Dato de los impagos caen en MODERADO + CRÍTICO"/>
-          <p:cNvSpPr/>
-          <p:nvPr/>
-        </p:nvSpPr>
-        <p:spPr>
-          <a:xfrm>
-            <a:off x="6035040" y="3611880"/>
-            <a:ext cx="2651760" cy="868680"/>
-          </a:xfrm>
-          <a:prstGeom prst="roundRect">
-            <a:avLst>
-              <a:gd name="adj" fmla="val 7368"/>
-            </a:avLst>
-          </a:prstGeom>
-          <a:solidFill>
-            <a:schemeClr val="bg1"/>
-          </a:solidFill>
-          <a:ln w="9525">
-            <a:solidFill>
-              <a:schemeClr val="accent5"/>
-            </a:solidFill>
-            <a:prstDash val="solid"/>
-          </a:ln>
-        </p:spPr>
-      </p:sp>
-      <p:sp>
-        <p:nvSpPr>
-          <p:cNvPr id="27" name="Valor de los impagos caen en MODERADO + CRÍTICO"/>
-          <p:cNvSpPr txBox="1"/>
-          <p:nvPr/>
-        </p:nvSpPr>
-        <p:spPr>
-          <a:xfrm>
-            <a:off x="6217920" y="3675888"/>
-            <a:ext cx="2286000" cy="411480"/>
-          </a:xfrm>
-          <a:prstGeom prst="rect">
-            <a:avLst/>
-          </a:prstGeom>
-          <a:noFill/>
-          <a:ln/>
-        </p:spPr>
-        <p:txBody>
-          <a:bodyPr wrap="square" lIns="0" tIns="0" rIns="0" bIns="0" rtlCol="0" anchor="ctr"/>
-          <a:lstStyle/>
-          <a:p>
-            <a:pPr indent="0" marL="0">
-              <a:buNone/>
-            </a:pPr>
-            <a:r>
-              <a:rPr lang="en-US" sz="2000" dirty="0">
-                <a:solidFill>
-                  <a:schemeClr val="tx1"/>
-                </a:solidFill>
-                <a:latin typeface="Consolas" pitchFamily="34" charset="0"/>
-                <a:ea typeface="Consolas" pitchFamily="34" charset="-122"/>
-                <a:cs typeface="Consolas" pitchFamily="34" charset="-120"/>
-              </a:rPr>
-              <a:t>77 %</a:t>
-            </a:r>
-            <a:endParaRPr lang="en-US" sz="2000" dirty="0"/>
-          </a:p>
-        </p:txBody>
-      </p:sp>
-      <p:sp>
-        <p:nvSpPr>
-          <p:cNvPr id="28" name="Texto de los impagos caen en MODERADO + CRÍTICO"/>
-          <p:cNvSpPr txBox="1"/>
-          <p:nvPr/>
-        </p:nvSpPr>
-        <p:spPr>
-          <a:xfrm>
-            <a:off x="6217920" y="4087368"/>
-            <a:ext cx="2377440" cy="320040"/>
-          </a:xfrm>
-          <a:prstGeom prst="rect">
-            <a:avLst/>
-          </a:prstGeom>
-          <a:noFill/>
-          <a:ln/>
-        </p:spPr>
-        <p:txBody>
-          <a:bodyPr wrap="square" lIns="0" tIns="0" rIns="0" bIns="0" rtlCol="0" anchor="t"/>
-          <a:lstStyle/>
-          <a:p>
-            <a:pPr indent="0" marL="0">
-              <a:buNone/>
-            </a:pPr>
-            <a:r>
-              <a:rPr lang="en-US" sz="1100" dirty="0">
-                <a:solidFill>
-                  <a:schemeClr val="tx2"/>
-                </a:solidFill>
-                <a:latin typeface="Calibri" pitchFamily="34" charset="0"/>
-                <a:ea typeface="Calibri" pitchFamily="34" charset="-122"/>
-                <a:cs typeface="Calibri" pitchFamily="34" charset="-120"/>
-              </a:rPr>
-              <a:t>de los impagos caen en MODERADO + CRÍTICO</a:t>
-            </a:r>
-            <a:endParaRPr lang="en-US" sz="1100" dirty="0"/>
-          </a:p>
-        </p:txBody>
-      </p:sp>
-      <p:sp>
-        <p:nvSpPr>
-          <p:cNvPr id="25" name="Slide Number Placeholder 0"/>
-          <p:cNvSpPr>
-            <a:spLocks noGrp="1"/>
-          </p:cNvSpPr>
-          <p:nvPr>
-            <p:ph type="sldNum" sz="quarter" idx="4294967295"/>
-          </p:nvPr>
-        </p:nvSpPr>
-        <p:spPr>
-          <a:xfrm>
-            <a:off x="8229600" y="4773168"/>
-            <a:ext cx="457200" cy="228600"/>
-          </a:xfrm>
-          <a:prstGeom prst="rect">
-            <a:avLst/>
-          </a:prstGeom>
-          <a:extLst>
-            <a:ext uri="{C572A759-6A51-4108-AA02-DFA0A04FC94B}">
-              <ma14:wrappingTextBoxFlag xmlns:ma14="http://schemas.microsoft.com/office/mac/drawingml/2011/main" val="0"/>
-            </a:ext>
-          </a:extLst>
-        </p:spPr>
-        <p:txBody>
-          <a:bodyPr/>
-          <a:lstStyle>
-            <a:lvl1pPr>
-              <a:defRPr sz="900">
-                <a:solidFill>
-                  <a:schemeClr val="tx2"/>
-                </a:solidFill>
-                <a:latin typeface="Calibri"/>
-                <a:ea typeface="Calibri"/>
-                <a:cs typeface="Calibri"/>
-              </a:defRPr>
-            </a:lvl1pPr>
-          </a:lstStyle>
-          <a:p>
-            <a:pPr algn="r"/>
-            <a:fld id="{F7021451-1387-4CA6-816F-3879F97B5CBC}" type="slidenum">
-              <a:rPr b="0" lang="en-US"/>
-              <a:t>6</a:t>
-            </a:fld>
-            <a:endParaRPr lang="en-US"/>
-          </a:p>
-        </p:txBody>
-      </p:sp>
-    </p:spTree>
-  </p:cSld>
-  <p:clrMapOvr>
-    <a:masterClrMapping/>
-  </p:clrMapOvr>
-</p:sld>
-</file>
-
-<file path=ppt/slides/slide7.xml><?xml version="1.0" encoding="utf-8"?>
-<p:sld xmlns:a="http://schemas.openxmlformats.org/drawingml/2006/main" xmlns:r="http://schemas.openxmlformats.org/officeDocument/2006/relationships" xmlns:p="http://schemas.openxmlformats.org/presentationml/2006/main">
-  <p:cSld name="Slide 7">
-    <p:spTree>
-      <p:nvGrpSpPr>
-        <p:cNvPr id="1" name=""/>
-        <p:cNvGrpSpPr/>
-        <p:nvPr/>
-      </p:nvGrpSpPr>
-      <p:grpSpPr>
-        <a:xfrm>
-          <a:off x="0" y="0"/>
-          <a:ext cx="0" cy="0"/>
-          <a:chOff x="0" y="0"/>
-          <a:chExt cx="0" cy="0"/>
-        </a:xfrm>
-      </p:grpSpPr>
-      <p:sp>
-        <p:nvSpPr>
-          <p:cNvPr id="2" name="Text 0"/>
-          <p:cNvSpPr/>
-          <p:nvPr>
-            <p:ph idx="100" type="body" hasCustomPrompt="1"/>
-          </p:nvPr>
-        </p:nvSpPr>
-        <p:spPr>
-          <a:xfrm>
-            <a:off x="457200" y="292608"/>
-            <a:ext cx="8229600" cy="256032"/>
-          </a:xfrm>
-          <a:prstGeom prst="rect">
-            <a:avLst/>
-          </a:prstGeom>
-          <a:noFill/>
-          <a:ln/>
-        </p:spPr>
-        <p:txBody>
-          <a:bodyPr wrap="square" lIns="0" tIns="0" rIns="0" bIns="0" rtlCol="0" anchor="ctr"/>
-          <a:lstStyle/>
-          <a:p>
-            <a:pPr indent="0" marL="0">
-              <a:buNone/>
-            </a:pPr>
-            <a:r>
-              <a:rPr lang="en-US" sz="1100" b="1" spc="200" kern="0" dirty="0">
-                <a:solidFill>
-                  <a:schemeClr val="accent1"/>
-                </a:solidFill>
-                <a:latin typeface="Calibri" pitchFamily="34" charset="0"/>
-                <a:ea typeface="Calibri" pitchFamily="34" charset="-122"/>
-                <a:cs typeface="Calibri" pitchFamily="34" charset="-120"/>
-              </a:rPr>
-              <a:t>EL AGENTE EN ACCIÓN · 5 DE LOS 20 PRÉSTAMOS ANALIZADOS</a:t>
-            </a:r>
-            <a:endParaRPr lang="en-US" sz="1100" dirty="0"/>
-          </a:p>
-        </p:txBody>
-      </p:sp>
-      <p:sp>
-        <p:nvSpPr>
-          <p:cNvPr id="3" name="Text 0"/>
-          <p:cNvSpPr/>
-          <p:nvPr>
-            <p:ph idx="101" type="title" hasCustomPrompt="1"/>
-          </p:nvPr>
-        </p:nvSpPr>
-        <p:spPr>
-          <a:xfrm>
-            <a:off x="457200" y="548640"/>
-            <a:ext cx="8229600" cy="566928"/>
-          </a:xfrm>
-          <a:prstGeom prst="rect">
-            <a:avLst/>
-          </a:prstGeom>
-          <a:noFill/>
-          <a:ln/>
-        </p:spPr>
-        <p:txBody>
-          <a:bodyPr wrap="square" lIns="0" tIns="0" rIns="0" bIns="0" rtlCol="0" anchor="ctr"/>
-          <a:lstStyle/>
-          <a:p>
-            <a:pPr algn="l" indent="0" marL="0">
-              <a:buNone/>
-            </a:pPr>
-            <a:r>
-              <a:rPr lang="en-US" sz="2600" b="1" dirty="0">
-                <a:solidFill>
-                  <a:schemeClr val="tx1"/>
-                </a:solidFill>
-                <a:latin typeface="Cambria" pitchFamily="34" charset="0"/>
-                <a:ea typeface="Cambria" pitchFamily="34" charset="-122"/>
-                <a:cs typeface="Cambria" pitchFamily="34" charset="-120"/>
-              </a:rPr>
-              <a:t>«Analiza los 20 préstamos de mayor importe»</a:t>
-            </a:r>
-            <a:endParaRPr lang="en-US" sz="2600" dirty="0"/>
-          </a:p>
-        </p:txBody>
-      </p:sp>
-      <p:sp>
-        <p:nvSpPr>
-          <p:cNvPr id="4" name="Resumen CRÍTICO"/>
-          <p:cNvSpPr/>
-          <p:nvPr/>
-        </p:nvSpPr>
-        <p:spPr>
-          <a:xfrm>
-            <a:off x="457200" y="1298448"/>
-            <a:ext cx="2651760" cy="749808"/>
-          </a:xfrm>
-          <a:prstGeom prst="roundRect">
-            <a:avLst>
-              <a:gd name="adj" fmla="val 8537"/>
-            </a:avLst>
-          </a:prstGeom>
-          <a:solidFill>
-            <a:schemeClr val="bg1"/>
-          </a:solidFill>
-          <a:ln w="9525">
-            <a:solidFill>
-              <a:schemeClr val="accent5"/>
-            </a:solidFill>
-            <a:prstDash val="solid"/>
-          </a:ln>
-        </p:spPr>
-      </p:sp>
-      <p:sp>
-        <p:nvSpPr>
-          <p:cNvPr id="5" name="Número CRÍTICO"/>
-          <p:cNvSpPr txBox="1"/>
-          <p:nvPr/>
-        </p:nvSpPr>
-        <p:spPr>
-          <a:xfrm>
-            <a:off x="640080" y="1353312"/>
-            <a:ext cx="548640" cy="640080"/>
-          </a:xfrm>
-          <a:prstGeom prst="rect">
-            <a:avLst/>
-          </a:prstGeom>
-          <a:noFill/>
-          <a:ln/>
-        </p:spPr>
-        <p:txBody>
-          <a:bodyPr wrap="square" lIns="0" tIns="0" rIns="0" bIns="0" rtlCol="0" anchor="ctr"/>
-          <a:lstStyle/>
-          <a:p>
-            <a:pPr indent="0" marL="0">
-              <a:buNone/>
-            </a:pPr>
-            <a:r>
-              <a:rPr lang="en-US" sz="2600" dirty="0">
-                <a:solidFill>
-                  <a:schemeClr val="accent4"/>
-                </a:solidFill>
-                <a:latin typeface="Consolas" pitchFamily="34" charset="0"/>
-                <a:ea typeface="Consolas" pitchFamily="34" charset="-122"/>
-                <a:cs typeface="Consolas" pitchFamily="34" charset="-120"/>
-              </a:rPr>
-              <a:t>2</a:t>
-            </a:r>
-            <a:endParaRPr lang="en-US" sz="2600" dirty="0"/>
-          </a:p>
-        </p:txBody>
-      </p:sp>
-      <p:sp>
-        <p:nvSpPr>
-          <p:cNvPr id="6" name="Texto CRÍTICO"/>
-          <p:cNvSpPr txBox="1"/>
-          <p:nvPr/>
-        </p:nvSpPr>
-        <p:spPr>
-          <a:xfrm>
-            <a:off x="1234440" y="1353312"/>
-            <a:ext cx="1783080" cy="640080"/>
-          </a:xfrm>
-          <a:prstGeom prst="rect">
-            <a:avLst/>
-          </a:prstGeom>
-          <a:noFill/>
-          <a:ln/>
-        </p:spPr>
-        <p:txBody>
-          <a:bodyPr wrap="square" lIns="0" tIns="0" rIns="0" bIns="0" rtlCol="0" anchor="ctr"/>
-          <a:lstStyle/>
-          <a:p>
-            <a:pPr indent="0" marL="0">
-              <a:buNone/>
-            </a:pPr>
-            <a:r>
-              <a:rPr lang="en-US" sz="1100" b="1" dirty="0">
-                <a:solidFill>
-                  <a:schemeClr val="accent4"/>
-                </a:solidFill>
-                <a:latin typeface="Calibri" pitchFamily="34" charset="0"/>
-                <a:ea typeface="Calibri" pitchFamily="34" charset="-122"/>
-                <a:cs typeface="Calibri" pitchFamily="34" charset="-120"/>
-              </a:rPr>
-              <a:t>CRÍTICO</a:t>
-            </a:r>
-            <a:endParaRPr lang="en-US" sz="1100" dirty="0"/>
-          </a:p>
-          <a:p>
-            <a:pPr indent="0" marL="0">
-              <a:buNone/>
-            </a:pPr>
-            <a:r>
-              <a:rPr lang="en-US" sz="1100" dirty="0">
-                <a:solidFill>
-                  <a:schemeClr val="tx2"/>
-                </a:solidFill>
-                <a:latin typeface="Calibri" pitchFamily="34" charset="0"/>
-                <a:ea typeface="Calibri" pitchFamily="34" charset="-122"/>
-                <a:cs typeface="Calibri" pitchFamily="34" charset="-120"/>
-              </a:rPr>
-              <a:t>70.000 $ · 2 de 2 impagaron</a:t>
-            </a:r>
-            <a:endParaRPr lang="en-US" sz="1100" dirty="0"/>
-          </a:p>
-        </p:txBody>
-      </p:sp>
-      <p:sp>
-        <p:nvSpPr>
-          <p:cNvPr id="7" name="Resumen MODERADO"/>
-          <p:cNvSpPr/>
-          <p:nvPr/>
-        </p:nvSpPr>
-        <p:spPr>
-          <a:xfrm>
-            <a:off x="3246120" y="1298448"/>
-            <a:ext cx="2651760" cy="749808"/>
-          </a:xfrm>
-          <a:prstGeom prst="roundRect">
-            <a:avLst>
-              <a:gd name="adj" fmla="val 8537"/>
-            </a:avLst>
-          </a:prstGeom>
-          <a:solidFill>
-            <a:schemeClr val="bg1"/>
-          </a:solidFill>
-          <a:ln w="9525">
-            <a:solidFill>
-              <a:schemeClr val="accent5"/>
-            </a:solidFill>
-            <a:prstDash val="solid"/>
-          </a:ln>
-        </p:spPr>
-      </p:sp>
-      <p:sp>
-        <p:nvSpPr>
-          <p:cNvPr id="8" name="Número MODERADO"/>
-          <p:cNvSpPr txBox="1"/>
-          <p:nvPr/>
-        </p:nvSpPr>
-        <p:spPr>
-          <a:xfrm>
-            <a:off x="3429000" y="1353312"/>
-            <a:ext cx="548640" cy="640080"/>
-          </a:xfrm>
-          <a:prstGeom prst="rect">
-            <a:avLst/>
-          </a:prstGeom>
-          <a:noFill/>
-          <a:ln/>
-        </p:spPr>
-        <p:txBody>
-          <a:bodyPr wrap="square" lIns="0" tIns="0" rIns="0" bIns="0" rtlCol="0" anchor="ctr"/>
-          <a:lstStyle/>
-          <a:p>
-            <a:pPr indent="0" marL="0">
-              <a:buNone/>
-            </a:pPr>
-            <a:r>
-              <a:rPr lang="en-US" sz="2600" dirty="0">
-                <a:solidFill>
-                  <a:schemeClr val="accent3"/>
-                </a:solidFill>
-                <a:latin typeface="Consolas" pitchFamily="34" charset="0"/>
-                <a:ea typeface="Consolas" pitchFamily="34" charset="-122"/>
-                <a:cs typeface="Consolas" pitchFamily="34" charset="-120"/>
-              </a:rPr>
-              <a:t>10</a:t>
-            </a:r>
-            <a:endParaRPr lang="en-US" sz="2600" dirty="0"/>
-          </a:p>
-        </p:txBody>
-      </p:sp>
-      <p:sp>
-        <p:nvSpPr>
-          <p:cNvPr id="9" name="Texto MODERADO"/>
-          <p:cNvSpPr txBox="1"/>
-          <p:nvPr/>
-        </p:nvSpPr>
-        <p:spPr>
-          <a:xfrm>
-            <a:off x="4023360" y="1353312"/>
-            <a:ext cx="1783080" cy="640080"/>
-          </a:xfrm>
-          <a:prstGeom prst="rect">
-            <a:avLst/>
-          </a:prstGeom>
-          <a:noFill/>
-          <a:ln/>
-        </p:spPr>
-        <p:txBody>
-          <a:bodyPr wrap="square" lIns="0" tIns="0" rIns="0" bIns="0" rtlCol="0" anchor="ctr"/>
-          <a:lstStyle/>
-          <a:p>
-            <a:pPr indent="0" marL="0">
-              <a:buNone/>
-            </a:pPr>
-            <a:r>
-              <a:rPr lang="en-US" sz="1100" b="1" dirty="0">
-                <a:solidFill>
-                  <a:schemeClr val="accent3"/>
-                </a:solidFill>
-                <a:latin typeface="Calibri" pitchFamily="34" charset="0"/>
-                <a:ea typeface="Calibri" pitchFamily="34" charset="-122"/>
-                <a:cs typeface="Calibri" pitchFamily="34" charset="-120"/>
-              </a:rPr>
-              <a:t>MODERADO</a:t>
-            </a:r>
-            <a:endParaRPr lang="en-US" sz="1100" dirty="0"/>
-          </a:p>
-          <a:p>
-            <a:pPr indent="0" marL="0">
-              <a:buNone/>
-            </a:pPr>
-            <a:r>
-              <a:rPr lang="en-US" sz="1100" dirty="0">
-                <a:solidFill>
-                  <a:schemeClr val="tx2"/>
-                </a:solidFill>
-                <a:latin typeface="Calibri" pitchFamily="34" charset="0"/>
-                <a:ea typeface="Calibri" pitchFamily="34" charset="-122"/>
-                <a:cs typeface="Calibri" pitchFamily="34" charset="-120"/>
-              </a:rPr>
-              <a:t>350.000 $ · 8 de 10 impagaron</a:t>
-            </a:r>
-            <a:endParaRPr lang="en-US" sz="1100" dirty="0"/>
-          </a:p>
-        </p:txBody>
-      </p:sp>
-      <p:sp>
-        <p:nvSpPr>
-          <p:cNvPr id="10" name="Resumen BAJO"/>
-          <p:cNvSpPr/>
-          <p:nvPr/>
-        </p:nvSpPr>
-        <p:spPr>
-          <a:xfrm>
-            <a:off x="6035040" y="1298448"/>
-            <a:ext cx="2651760" cy="749808"/>
-          </a:xfrm>
-          <a:prstGeom prst="roundRect">
-            <a:avLst>
-              <a:gd name="adj" fmla="val 8537"/>
-            </a:avLst>
-          </a:prstGeom>
-          <a:solidFill>
-            <a:schemeClr val="bg1"/>
-          </a:solidFill>
-          <a:ln w="9525">
-            <a:solidFill>
-              <a:schemeClr val="accent5"/>
-            </a:solidFill>
-            <a:prstDash val="solid"/>
-          </a:ln>
-        </p:spPr>
-      </p:sp>
-      <p:sp>
-        <p:nvSpPr>
-          <p:cNvPr id="11" name="Número BAJO"/>
-          <p:cNvSpPr txBox="1"/>
-          <p:nvPr/>
-        </p:nvSpPr>
-        <p:spPr>
-          <a:xfrm>
-            <a:off x="6217920" y="1353312"/>
-            <a:ext cx="548640" cy="640080"/>
-          </a:xfrm>
-          <a:prstGeom prst="rect">
-            <a:avLst/>
-          </a:prstGeom>
-          <a:noFill/>
-          <a:ln/>
-        </p:spPr>
-        <p:txBody>
-          <a:bodyPr wrap="square" lIns="0" tIns="0" rIns="0" bIns="0" rtlCol="0" anchor="ctr"/>
-          <a:lstStyle/>
-          <a:p>
-            <a:pPr indent="0" marL="0">
-              <a:buNone/>
-            </a:pPr>
-            <a:r>
-              <a:rPr lang="en-US" sz="2600" dirty="0">
-                <a:solidFill>
-                  <a:schemeClr val="accent2"/>
-                </a:solidFill>
-                <a:latin typeface="Consolas" pitchFamily="34" charset="0"/>
-                <a:ea typeface="Consolas" pitchFamily="34" charset="-122"/>
-                <a:cs typeface="Consolas" pitchFamily="34" charset="-120"/>
-              </a:rPr>
-              <a:t>8</a:t>
-            </a:r>
-            <a:endParaRPr lang="en-US" sz="2600" dirty="0"/>
-          </a:p>
-        </p:txBody>
-      </p:sp>
-      <p:sp>
-        <p:nvSpPr>
-          <p:cNvPr id="12" name="Texto BAJO"/>
-          <p:cNvSpPr txBox="1"/>
-          <p:nvPr/>
-        </p:nvSpPr>
-        <p:spPr>
-          <a:xfrm>
-            <a:off x="6812280" y="1353312"/>
-            <a:ext cx="1783080" cy="640080"/>
-          </a:xfrm>
-          <a:prstGeom prst="rect">
-            <a:avLst/>
-          </a:prstGeom>
-          <a:noFill/>
-          <a:ln/>
-        </p:spPr>
-        <p:txBody>
-          <a:bodyPr wrap="square" lIns="0" tIns="0" rIns="0" bIns="0" rtlCol="0" anchor="ctr"/>
-          <a:lstStyle/>
-          <a:p>
-            <a:pPr indent="0" marL="0">
-              <a:buNone/>
-            </a:pPr>
-            <a:r>
-              <a:rPr lang="en-US" sz="1100" b="1" dirty="0">
-                <a:solidFill>
-                  <a:schemeClr val="accent2"/>
-                </a:solidFill>
-                <a:latin typeface="Calibri" pitchFamily="34" charset="0"/>
-                <a:ea typeface="Calibri" pitchFamily="34" charset="-122"/>
-                <a:cs typeface="Calibri" pitchFamily="34" charset="-120"/>
-              </a:rPr>
-              <a:t>BAJO</a:t>
-            </a:r>
-            <a:endParaRPr lang="en-US" sz="1100" dirty="0"/>
-          </a:p>
-          <a:p>
-            <a:pPr indent="0" marL="0">
-              <a:buNone/>
-            </a:pPr>
-            <a:r>
-              <a:rPr lang="en-US" sz="1100" dirty="0">
-                <a:solidFill>
-                  <a:schemeClr val="tx2"/>
-                </a:solidFill>
-                <a:latin typeface="Calibri" pitchFamily="34" charset="0"/>
-                <a:ea typeface="Calibri" pitchFamily="34" charset="-122"/>
-                <a:cs typeface="Calibri" pitchFamily="34" charset="-120"/>
-              </a:rPr>
-              <a:t>280.000 $ · 2 de 8 impagaron</a:t>
-            </a:r>
-            <a:endParaRPr lang="en-US" sz="1100" dirty="0"/>
-          </a:p>
-        </p:txBody>
-      </p:sp>
-      <p:sp>
-        <p:nvSpPr>
-          <p:cNvPr id="13" name="Tarjeta tabla agente"/>
-          <p:cNvSpPr/>
-          <p:nvPr/>
-        </p:nvSpPr>
-        <p:spPr>
-          <a:xfrm>
-            <a:off x="457200" y="2176272"/>
-            <a:ext cx="8229600" cy="2468880"/>
-          </a:xfrm>
-          <a:prstGeom prst="roundRect">
-            <a:avLst>
-              <a:gd name="adj" fmla="val 2593"/>
-            </a:avLst>
-          </a:prstGeom>
-          <a:solidFill>
-            <a:schemeClr val="bg1"/>
-          </a:solidFill>
-          <a:ln w="9525">
-            <a:solidFill>
-              <a:schemeClr val="accent5"/>
-            </a:solidFill>
-            <a:prstDash val="solid"/>
-          </a:ln>
-        </p:spPr>
-      </p:sp>
-      <p:graphicFrame>
-        <p:nvGraphicFramePr>
-          <p:cNvPr id="8" name="Tabla agente"/>
-          <p:cNvGraphicFramePr>
-            <a:graphicFrameLocks noGrp="1"/>
-          </p:cNvGraphicFramePr>
-          <p:nvPr>
-            <p:extLst>
-              <p:ext uri="{D42A27DB-BD31-4B8C-83A1-F6EECF244321}">
-                <p14:modId xmlns:p14="http://schemas.microsoft.com/office/powerpoint/2010/main" val="1579011935"/>
-              </p:ext>
-            </p:extLst>
-          </p:nvPr>
-        </p:nvGraphicFramePr>
-        <p:xfrm>
-          <a:off x="566928" y="2258568"/>
-          <a:ext cx="8010144" cy="914400"/>
-        </p:xfrm>
-        <a:graphic>
-          <a:graphicData uri="http://schemas.openxmlformats.org/drawingml/2006/table">
-            <a:tbl>
-              <a:tblPr/>
-              <a:tblGrid>
-                <a:gridCol w="457200"/>
-                <a:gridCol w="1234440"/>
-                <a:gridCol w="640080"/>
-                <a:gridCol w="685800"/>
-                <a:gridCol w="1005840"/>
-                <a:gridCol w="2980944"/>
-                <a:gridCol w="1005840"/>
-              </a:tblGrid>
-              <a:tr h="274320">
-                <a:tc>
-                  <a:txBody>
-                    <a:bodyPr/>
-                    <a:lstStyle/>
-                    <a:p>
-                      <a:pPr algn="l" indent="0" marL="0">
-                        <a:buNone/>
-                      </a:pPr>
-                      <a:r>
-                        <a:rPr lang="en-US" sz="850" b="1" dirty="0">
-                          <a:solidFill>
-                            <a:schemeClr val="tx2"/>
-                          </a:solidFill>
-                          <a:latin typeface="Calibri" pitchFamily="34" charset="0"/>
-                          <a:ea typeface="Calibri" pitchFamily="34" charset="-122"/>
-                          <a:cs typeface="Calibri" pitchFamily="34" charset="-120"/>
-                        </a:rPr>
-                        <a:t>ID</a:t>
-                      </a:r>
-                      <a:endParaRPr lang="en-US" sz="850" dirty="0">
-                        <a:latin typeface="Calibri" charset="0"/>
-                        <a:ea typeface="Calibri" charset="0"/>
-                        <a:cs typeface="Calibri" charset="0"/>
-                      </a:endParaRPr>
-                    </a:p>
-                  </a:txBody>
-                  <a:tcPr marL="91440" marR="91440" marT="45720" marB="45720" anchor="ctr">
-                    <a:lnL w="0" cap="flat" cmpd="sng" algn="ctr">
-                      <a:noFill/>
-                    </a:lnL>
-                    <a:lnR w="0" cap="flat" cmpd="sng" algn="ctr">
-                      <a:noFill/>
-                    </a:lnR>
-                    <a:lnT w="0" cap="flat" cmpd="sng" algn="ctr">
-                      <a:noFill/>
-                    </a:lnT>
-                    <a:lnB w="9525" cap="flat" cmpd="sng" algn="ctr">
-                      <a:solidFill>
-                        <a:srgbClr val="DCE2E7"/>
-                      </a:solidFill>
-                      <a:prstDash val="solid"/>
-                      <a:round/>
-                      <a:headEnd type="none" w="med" len="med"/>
-                      <a:tailEnd type="none" w="med" len="med"/>
-                    </a:lnB>
-                  </a:tcPr>
-                </a:tc>
-                <a:tc>
-                  <a:txBody>
-                    <a:bodyPr/>
-                    <a:lstStyle/>
-                    <a:p>
-                      <a:pPr algn="l" indent="0" marL="0">
-                        <a:buNone/>
-                      </a:pPr>
-                      <a:r>
-                        <a:rPr lang="en-US" sz="850" b="1" dirty="0">
-                          <a:solidFill>
-                            <a:schemeClr val="tx2"/>
-                          </a:solidFill>
-                          <a:latin typeface="Calibri" pitchFamily="34" charset="0"/>
-                          <a:ea typeface="Calibri" pitchFamily="34" charset="-122"/>
-                          <a:cs typeface="Calibri" pitchFamily="34" charset="-120"/>
-                        </a:rPr>
-                        <a:t>FINALIDAD</a:t>
-                      </a:r>
-                      <a:endParaRPr lang="en-US" sz="850" dirty="0">
-                        <a:latin typeface="Calibri" charset="0"/>
-                        <a:ea typeface="Calibri" charset="0"/>
-                        <a:cs typeface="Calibri" charset="0"/>
-                      </a:endParaRPr>
-                    </a:p>
-                  </a:txBody>
-                  <a:tcPr marL="91440" marR="91440" marT="45720" marB="45720" anchor="ctr">
-                    <a:lnL w="0" cap="flat" cmpd="sng" algn="ctr">
-                      <a:noFill/>
-                    </a:lnL>
-                    <a:lnR w="0" cap="flat" cmpd="sng" algn="ctr">
-                      <a:noFill/>
-                    </a:lnR>
-                    <a:lnT w="0" cap="flat" cmpd="sng" algn="ctr">
-                      <a:noFill/>
-                    </a:lnT>
-                    <a:lnB w="9525" cap="flat" cmpd="sng" algn="ctr">
-                      <a:solidFill>
-                        <a:srgbClr val="DCE2E7"/>
-                      </a:solidFill>
-                      <a:prstDash val="solid"/>
-                      <a:round/>
-                      <a:headEnd type="none" w="med" len="med"/>
-                      <a:tailEnd type="none" w="med" len="med"/>
-                    </a:lnB>
-                  </a:tcPr>
-                </a:tc>
-                <a:tc>
-                  <a:txBody>
-                    <a:bodyPr/>
-                    <a:lstStyle/>
-                    <a:p>
-                      <a:pPr algn="l" indent="0" marL="0">
-                        <a:buNone/>
-                      </a:pPr>
-                      <a:r>
-                        <a:rPr lang="en-US" sz="850" b="1" dirty="0">
-                          <a:solidFill>
-                            <a:schemeClr val="tx2"/>
-                          </a:solidFill>
-                          <a:latin typeface="Calibri" pitchFamily="34" charset="0"/>
-                          <a:ea typeface="Calibri" pitchFamily="34" charset="-122"/>
-                          <a:cs typeface="Calibri" pitchFamily="34" charset="-120"/>
-                        </a:rPr>
-                        <a:t>GRADO</a:t>
-                      </a:r>
-                      <a:endParaRPr lang="en-US" sz="850" dirty="0">
-                        <a:latin typeface="Calibri" charset="0"/>
-                        <a:ea typeface="Calibri" charset="0"/>
-                        <a:cs typeface="Calibri" charset="0"/>
-                      </a:endParaRPr>
-                    </a:p>
-                  </a:txBody>
-                  <a:tcPr marL="91440" marR="91440" marT="45720" marB="45720" anchor="ctr">
-                    <a:lnL w="0" cap="flat" cmpd="sng" algn="ctr">
-                      <a:noFill/>
-                    </a:lnL>
-                    <a:lnR w="0" cap="flat" cmpd="sng" algn="ctr">
-                      <a:noFill/>
-                    </a:lnR>
-                    <a:lnT w="0" cap="flat" cmpd="sng" algn="ctr">
-                      <a:noFill/>
-                    </a:lnT>
-                    <a:lnB w="9525" cap="flat" cmpd="sng" algn="ctr">
-                      <a:solidFill>
-                        <a:srgbClr val="DCE2E7"/>
-                      </a:solidFill>
-                      <a:prstDash val="solid"/>
-                      <a:round/>
-                      <a:headEnd type="none" w="med" len="med"/>
-                      <a:tailEnd type="none" w="med" len="med"/>
-                    </a:lnB>
-                  </a:tcPr>
-                </a:tc>
-                <a:tc>
-                  <a:txBody>
-                    <a:bodyPr/>
-                    <a:lstStyle/>
-                    <a:p>
-                      <a:pPr algn="r" indent="0" marL="0">
-                        <a:buNone/>
-                      </a:pPr>
-                      <a:r>
-                        <a:rPr lang="en-US" sz="850" b="1" dirty="0">
-                          <a:solidFill>
-                            <a:schemeClr val="tx2"/>
-                          </a:solidFill>
-                          <a:latin typeface="Calibri" pitchFamily="34" charset="0"/>
-                          <a:ea typeface="Calibri" pitchFamily="34" charset="-122"/>
-                          <a:cs typeface="Calibri" pitchFamily="34" charset="-120"/>
-                        </a:rPr>
-                        <a:t>SCORE</a:t>
-                      </a:r>
-                      <a:endParaRPr lang="en-US" sz="850" dirty="0">
-                        <a:latin typeface="Calibri" charset="0"/>
-                        <a:ea typeface="Calibri" charset="0"/>
-                        <a:cs typeface="Calibri" charset="0"/>
-                      </a:endParaRPr>
-                    </a:p>
-                  </a:txBody>
-                  <a:tcPr marL="91440" marR="91440" marT="45720" marB="45720" anchor="ctr">
-                    <a:lnL w="0" cap="flat" cmpd="sng" algn="ctr">
-                      <a:noFill/>
-                    </a:lnL>
-                    <a:lnR w="0" cap="flat" cmpd="sng" algn="ctr">
-                      <a:noFill/>
-                    </a:lnR>
-                    <a:lnT w="0" cap="flat" cmpd="sng" algn="ctr">
-                      <a:noFill/>
-                    </a:lnT>
-                    <a:lnB w="9525" cap="flat" cmpd="sng" algn="ctr">
-                      <a:solidFill>
-                        <a:srgbClr val="DCE2E7"/>
-                      </a:solidFill>
-                      <a:prstDash val="solid"/>
-                      <a:round/>
-                      <a:headEnd type="none" w="med" len="med"/>
-                      <a:tailEnd type="none" w="med" len="med"/>
-                    </a:lnB>
-                  </a:tcPr>
-                </a:tc>
-                <a:tc>
-                  <a:txBody>
-                    <a:bodyPr/>
-                    <a:lstStyle/>
-                    <a:p>
-                      <a:pPr algn="l" indent="0" marL="0">
-                        <a:buNone/>
-                      </a:pPr>
-                      <a:r>
-                        <a:rPr lang="en-US" sz="850" b="1" dirty="0">
-                          <a:solidFill>
-                            <a:schemeClr val="tx2"/>
-                          </a:solidFill>
-                          <a:latin typeface="Calibri" pitchFamily="34" charset="0"/>
-                          <a:ea typeface="Calibri" pitchFamily="34" charset="-122"/>
-                          <a:cs typeface="Calibri" pitchFamily="34" charset="-120"/>
-                        </a:rPr>
-                        <a:t>CATEGORÍA</a:t>
-                      </a:r>
-                      <a:endParaRPr lang="en-US" sz="850" dirty="0">
-                        <a:latin typeface="Calibri" charset="0"/>
-                        <a:ea typeface="Calibri" charset="0"/>
-                        <a:cs typeface="Calibri" charset="0"/>
-                      </a:endParaRPr>
-                    </a:p>
-                  </a:txBody>
-                  <a:tcPr marL="91440" marR="91440" marT="45720" marB="45720" anchor="ctr">
-                    <a:lnL w="0" cap="flat" cmpd="sng" algn="ctr">
-                      <a:noFill/>
-                    </a:lnL>
-                    <a:lnR w="0" cap="flat" cmpd="sng" algn="ctr">
-                      <a:noFill/>
-                    </a:lnR>
-                    <a:lnT w="0" cap="flat" cmpd="sng" algn="ctr">
-                      <a:noFill/>
-                    </a:lnT>
-                    <a:lnB w="9525" cap="flat" cmpd="sng" algn="ctr">
-                      <a:solidFill>
-                        <a:srgbClr val="DCE2E7"/>
-                      </a:solidFill>
-                      <a:prstDash val="solid"/>
-                      <a:round/>
-                      <a:headEnd type="none" w="med" len="med"/>
-                      <a:tailEnd type="none" w="med" len="med"/>
-                    </a:lnB>
-                  </a:tcPr>
-                </a:tc>
-                <a:tc>
-                  <a:txBody>
-                    <a:bodyPr/>
-                    <a:lstStyle/>
-                    <a:p>
-                      <a:pPr algn="l" indent="0" marL="0">
-                        <a:buNone/>
-                      </a:pPr>
-                      <a:r>
-                        <a:rPr lang="en-US" sz="850" b="1" dirty="0">
-                          <a:solidFill>
-                            <a:schemeClr val="tx2"/>
-                          </a:solidFill>
-                          <a:latin typeface="Calibri" pitchFamily="34" charset="0"/>
-                          <a:ea typeface="Calibri" pitchFamily="34" charset="-122"/>
-                          <a:cs typeface="Calibri" pitchFamily="34" charset="-120"/>
-                        </a:rPr>
-                        <a:t>ACCIÓN PROPUESTA</a:t>
-                      </a:r>
-                      <a:endParaRPr lang="en-US" sz="850" dirty="0">
-                        <a:latin typeface="Calibri" charset="0"/>
-                        <a:ea typeface="Calibri" charset="0"/>
-                        <a:cs typeface="Calibri" charset="0"/>
-                      </a:endParaRPr>
-                    </a:p>
-                  </a:txBody>
-                  <a:tcPr marL="91440" marR="91440" marT="45720" marB="45720" anchor="ctr">
-                    <a:lnL w="0" cap="flat" cmpd="sng" algn="ctr">
-                      <a:noFill/>
-                    </a:lnL>
-                    <a:lnR w="0" cap="flat" cmpd="sng" algn="ctr">
-                      <a:noFill/>
-                    </a:lnR>
-                    <a:lnT w="0" cap="flat" cmpd="sng" algn="ctr">
-                      <a:noFill/>
-                    </a:lnT>
-                    <a:lnB w="9525" cap="flat" cmpd="sng" algn="ctr">
-                      <a:solidFill>
-                        <a:srgbClr val="DCE2E7"/>
-                      </a:solidFill>
-                      <a:prstDash val="solid"/>
-                      <a:round/>
-                      <a:headEnd type="none" w="med" len="med"/>
-                      <a:tailEnd type="none" w="med" len="med"/>
-                    </a:lnB>
-                  </a:tcPr>
-                </a:tc>
-                <a:tc>
-                  <a:txBody>
-                    <a:bodyPr/>
-                    <a:lstStyle/>
-                    <a:p>
-                      <a:pPr algn="l" indent="0" marL="0">
-                        <a:buNone/>
-                      </a:pPr>
-                      <a:r>
-                        <a:rPr lang="en-US" sz="850" b="1" dirty="0">
-                          <a:solidFill>
-                            <a:schemeClr val="tx2"/>
-                          </a:solidFill>
-                          <a:latin typeface="Calibri" pitchFamily="34" charset="0"/>
-                          <a:ea typeface="Calibri" pitchFamily="34" charset="-122"/>
-                          <a:cs typeface="Calibri" pitchFamily="34" charset="-120"/>
-                        </a:rPr>
-                        <a:t>IMPAGO REAL</a:t>
-                      </a:r>
-                      <a:endParaRPr lang="en-US" sz="850" dirty="0">
-                        <a:latin typeface="Calibri" charset="0"/>
-                        <a:ea typeface="Calibri" charset="0"/>
-                        <a:cs typeface="Calibri" charset="0"/>
-                      </a:endParaRPr>
-                    </a:p>
-                  </a:txBody>
-                  <a:tcPr marL="91440" marR="91440" marT="45720" marB="45720" anchor="ctr">
-                    <a:lnL w="0" cap="flat" cmpd="sng" algn="ctr">
-                      <a:noFill/>
-                    </a:lnL>
-                    <a:lnR w="0" cap="flat" cmpd="sng" algn="ctr">
-                      <a:noFill/>
-                    </a:lnR>
-                    <a:lnT w="0" cap="flat" cmpd="sng" algn="ctr">
-                      <a:noFill/>
-                    </a:lnT>
-                    <a:lnB w="9525" cap="flat" cmpd="sng" algn="ctr">
-                      <a:solidFill>
-                        <a:srgbClr val="DCE2E7"/>
-                      </a:solidFill>
-                      <a:prstDash val="solid"/>
-                      <a:round/>
-                      <a:headEnd type="none" w="med" len="med"/>
-                      <a:tailEnd type="none" w="med" len="med"/>
-                    </a:lnB>
-                  </a:tcPr>
-                </a:tc>
+                <a:extLst>
+                  <a:ext uri="{0D108BD9-81ED-4DB2-BD59-A6C34878D82A}">
+                    <a16:rowId xmlns:a16="http://schemas.microsoft.com/office/drawing/2014/main" val="10000"/>
+                  </a:ext>
+                </a:extLst>
               </a:tr>
               <a:tr h="457200">
                 <a:tc>
@@ -10595,7 +10510,7 @@
                     <a:bodyPr/>
                     <a:lstStyle/>
                     <a:p>
-                      <a:pPr indent="0" marL="0">
+                      <a:pPr marL="0" indent="0">
                         <a:buNone/>
                       </a:pPr>
                       <a:r>
@@ -10616,15 +10531,21 @@
                       </a:endParaRPr>
                     </a:p>
                   </a:txBody>
-                  <a:tcPr marL="91440" marR="91440" marT="45720" marB="45720" anchor="ctr">
+                  <a:tcPr anchor="ctr">
                     <a:lnL w="0" cap="flat" cmpd="sng" algn="ctr">
                       <a:noFill/>
                     </a:lnL>
                     <a:lnR w="0" cap="flat" cmpd="sng" algn="ctr">
                       <a:noFill/>
                     </a:lnR>
-                    <a:lnT w="0" cap="flat" cmpd="sng" algn="ctr">
-                      <a:noFill/>
+                    <a:lnT w="9525" cap="flat" cmpd="sng" algn="ctr">
+                      <a:solidFill>
+                        <a:srgbClr val="DCE2E7"/>
+                      </a:solidFill>
+                      <a:prstDash val="solid"/>
+                      <a:round/>
+                      <a:headEnd type="none" w="med" len="med"/>
+                      <a:tailEnd type="none" w="med" len="med"/>
                     </a:lnT>
                     <a:lnB w="9525" cap="flat" cmpd="sng" algn="ctr">
                       <a:solidFill>
@@ -10645,7 +10566,7 @@
                     <a:bodyPr/>
                     <a:lstStyle/>
                     <a:p>
-                      <a:pPr indent="0" marL="0">
+                      <a:pPr marL="0" indent="0">
                         <a:buNone/>
                       </a:pPr>
                       <a:r>
@@ -10666,15 +10587,21 @@
                       </a:endParaRPr>
                     </a:p>
                   </a:txBody>
-                  <a:tcPr marL="91440" marR="91440" marT="45720" marB="45720" anchor="ctr">
+                  <a:tcPr anchor="ctr">
                     <a:lnL w="0" cap="flat" cmpd="sng" algn="ctr">
                       <a:noFill/>
                     </a:lnL>
                     <a:lnR w="0" cap="flat" cmpd="sng" algn="ctr">
                       <a:noFill/>
                     </a:lnR>
-                    <a:lnT w="0" cap="flat" cmpd="sng" algn="ctr">
-                      <a:noFill/>
+                    <a:lnT w="9525" cap="flat" cmpd="sng" algn="ctr">
+                      <a:solidFill>
+                        <a:srgbClr val="DCE2E7"/>
+                      </a:solidFill>
+                      <a:prstDash val="solid"/>
+                      <a:round/>
+                      <a:headEnd type="none" w="med" len="med"/>
+                      <a:tailEnd type="none" w="med" len="med"/>
                     </a:lnT>
                     <a:lnB w="9525" cap="flat" cmpd="sng" algn="ctr">
                       <a:solidFill>
@@ -10695,7 +10622,7 @@
                     <a:bodyPr/>
                     <a:lstStyle/>
                     <a:p>
-                      <a:pPr indent="0" marL="0">
+                      <a:pPr marL="0" indent="0">
                         <a:buNone/>
                       </a:pPr>
                       <a:r>
@@ -10716,15 +10643,21 @@
                       </a:endParaRPr>
                     </a:p>
                   </a:txBody>
-                  <a:tcPr marL="91440" marR="91440" marT="45720" marB="45720" anchor="ctr">
+                  <a:tcPr anchor="ctr">
                     <a:lnL w="0" cap="flat" cmpd="sng" algn="ctr">
                       <a:noFill/>
                     </a:lnL>
                     <a:lnR w="0" cap="flat" cmpd="sng" algn="ctr">
                       <a:noFill/>
                     </a:lnR>
-                    <a:lnT w="0" cap="flat" cmpd="sng" algn="ctr">
-                      <a:noFill/>
+                    <a:lnT w="9525" cap="flat" cmpd="sng" algn="ctr">
+                      <a:solidFill>
+                        <a:srgbClr val="DCE2E7"/>
+                      </a:solidFill>
+                      <a:prstDash val="solid"/>
+                      <a:round/>
+                      <a:headEnd type="none" w="med" len="med"/>
+                      <a:tailEnd type="none" w="med" len="med"/>
                     </a:lnT>
                     <a:lnB w="9525" cap="flat" cmpd="sng" algn="ctr">
                       <a:solidFill>
@@ -10745,7 +10678,7 @@
                     <a:bodyPr/>
                     <a:lstStyle/>
                     <a:p>
-                      <a:pPr algn="r" indent="0" marL="0">
+                      <a:pPr marL="0" indent="0" algn="r">
                         <a:buNone/>
                       </a:pPr>
                       <a:r>
@@ -10766,15 +10699,21 @@
                       </a:endParaRPr>
                     </a:p>
                   </a:txBody>
-                  <a:tcPr marL="91440" marR="91440" marT="45720" marB="45720" anchor="ctr">
+                  <a:tcPr anchor="ctr">
                     <a:lnL w="0" cap="flat" cmpd="sng" algn="ctr">
                       <a:noFill/>
                     </a:lnL>
                     <a:lnR w="0" cap="flat" cmpd="sng" algn="ctr">
                       <a:noFill/>
                     </a:lnR>
-                    <a:lnT w="0" cap="flat" cmpd="sng" algn="ctr">
-                      <a:noFill/>
+                    <a:lnT w="9525" cap="flat" cmpd="sng" algn="ctr">
+                      <a:solidFill>
+                        <a:srgbClr val="DCE2E7"/>
+                      </a:solidFill>
+                      <a:prstDash val="solid"/>
+                      <a:round/>
+                      <a:headEnd type="none" w="med" len="med"/>
+                      <a:tailEnd type="none" w="med" len="med"/>
                     </a:lnT>
                     <a:lnB w="9525" cap="flat" cmpd="sng" algn="ctr">
                       <a:solidFill>
@@ -10795,7 +10734,7 @@
                     <a:bodyPr/>
                     <a:lstStyle/>
                     <a:p>
-                      <a:pPr indent="0" marL="0">
+                      <a:pPr marL="0" indent="0">
                         <a:buNone/>
                       </a:pPr>
                       <a:r>
@@ -10816,15 +10755,21 @@
                       </a:endParaRPr>
                     </a:p>
                   </a:txBody>
-                  <a:tcPr marL="91440" marR="91440" marT="45720" marB="45720" anchor="ctr">
+                  <a:tcPr anchor="ctr">
                     <a:lnL w="0" cap="flat" cmpd="sng" algn="ctr">
                       <a:noFill/>
                     </a:lnL>
                     <a:lnR w="0" cap="flat" cmpd="sng" algn="ctr">
                       <a:noFill/>
                     </a:lnR>
-                    <a:lnT w="0" cap="flat" cmpd="sng" algn="ctr">
-                      <a:noFill/>
+                    <a:lnT w="9525" cap="flat" cmpd="sng" algn="ctr">
+                      <a:solidFill>
+                        <a:srgbClr val="DCE2E7"/>
+                      </a:solidFill>
+                      <a:prstDash val="solid"/>
+                      <a:round/>
+                      <a:headEnd type="none" w="med" len="med"/>
+                      <a:tailEnd type="none" w="med" len="med"/>
                     </a:lnT>
                     <a:lnB w="9525" cap="flat" cmpd="sng" algn="ctr">
                       <a:solidFill>
@@ -10845,7 +10790,7 @@
                     <a:bodyPr/>
                     <a:lstStyle/>
                     <a:p>
-                      <a:pPr indent="0" marL="0">
+                      <a:pPr marL="0" indent="0">
                         <a:buNone/>
                       </a:pPr>
                       <a:r>
@@ -10866,7 +10811,7 @@
                       </a:endParaRPr>
                     </a:p>
                     <a:p>
-                      <a:pPr indent="0" marL="0">
+                      <a:pPr marL="0" indent="0">
                         <a:buNone/>
                       </a:pPr>
                       <a:r>
@@ -10887,15 +10832,21 @@
                       </a:endParaRPr>
                     </a:p>
                   </a:txBody>
-                  <a:tcPr marL="91440" marR="91440" marT="45720" marB="45720" anchor="ctr">
+                  <a:tcPr anchor="ctr">
                     <a:lnL w="0" cap="flat" cmpd="sng" algn="ctr">
                       <a:noFill/>
                     </a:lnL>
                     <a:lnR w="0" cap="flat" cmpd="sng" algn="ctr">
                       <a:noFill/>
                     </a:lnR>
-                    <a:lnT w="0" cap="flat" cmpd="sng" algn="ctr">
-                      <a:noFill/>
+                    <a:lnT w="9525" cap="flat" cmpd="sng" algn="ctr">
+                      <a:solidFill>
+                        <a:srgbClr val="DCE2E7"/>
+                      </a:solidFill>
+                      <a:prstDash val="solid"/>
+                      <a:round/>
+                      <a:headEnd type="none" w="med" len="med"/>
+                      <a:tailEnd type="none" w="med" len="med"/>
                     </a:lnT>
                     <a:lnB w="9525" cap="flat" cmpd="sng" algn="ctr">
                       <a:solidFill>
@@ -10916,7 +10867,7 @@
                     <a:bodyPr/>
                     <a:lstStyle/>
                     <a:p>
-                      <a:pPr indent="0" marL="0">
+                      <a:pPr marL="0" indent="0">
                         <a:buNone/>
                       </a:pPr>
                       <a:r>
@@ -10937,15 +10888,21 @@
                       </a:endParaRPr>
                     </a:p>
                   </a:txBody>
-                  <a:tcPr marL="91440" marR="91440" marT="45720" marB="45720" anchor="ctr">
+                  <a:tcPr anchor="ctr">
                     <a:lnL w="0" cap="flat" cmpd="sng" algn="ctr">
                       <a:noFill/>
                     </a:lnL>
                     <a:lnR w="0" cap="flat" cmpd="sng" algn="ctr">
                       <a:noFill/>
                     </a:lnR>
-                    <a:lnT w="0" cap="flat" cmpd="sng" algn="ctr">
-                      <a:noFill/>
+                    <a:lnT w="9525" cap="flat" cmpd="sng" algn="ctr">
+                      <a:solidFill>
+                        <a:srgbClr val="DCE2E7"/>
+                      </a:solidFill>
+                      <a:prstDash val="solid"/>
+                      <a:round/>
+                      <a:headEnd type="none" w="med" len="med"/>
+                      <a:tailEnd type="none" w="med" len="med"/>
                     </a:lnT>
                     <a:lnB w="9525" cap="flat" cmpd="sng" algn="ctr">
                       <a:solidFill>
@@ -10961,6 +10918,11 @@
                     </a:solidFill>
                   </a:tcPr>
                 </a:tc>
+                <a:extLst>
+                  <a:ext uri="{0D108BD9-81ED-4DB2-BD59-A6C34878D82A}">
+                    <a16:rowId xmlns:a16="http://schemas.microsoft.com/office/drawing/2014/main" val="10001"/>
+                  </a:ext>
+                </a:extLst>
               </a:tr>
               <a:tr h="457200">
                 <a:tc>
@@ -10968,7 +10930,7 @@
                     <a:bodyPr/>
                     <a:lstStyle/>
                     <a:p>
-                      <a:pPr indent="0" marL="0">
+                      <a:pPr marL="0" indent="0">
                         <a:buNone/>
                       </a:pPr>
                       <a:r>
@@ -10989,15 +10951,21 @@
                       </a:endParaRPr>
                     </a:p>
                   </a:txBody>
-                  <a:tcPr marL="91440" marR="91440" marT="45720" marB="45720" anchor="ctr">
+                  <a:tcPr anchor="ctr">
                     <a:lnL w="0" cap="flat" cmpd="sng" algn="ctr">
                       <a:noFill/>
                     </a:lnL>
                     <a:lnR w="0" cap="flat" cmpd="sng" algn="ctr">
                       <a:noFill/>
                     </a:lnR>
-                    <a:lnT w="0" cap="flat" cmpd="sng" algn="ctr">
-                      <a:noFill/>
+                    <a:lnT w="9525" cap="flat" cmpd="sng" algn="ctr">
+                      <a:solidFill>
+                        <a:srgbClr val="DCE2E7"/>
+                      </a:solidFill>
+                      <a:prstDash val="solid"/>
+                      <a:round/>
+                      <a:headEnd type="none" w="med" len="med"/>
+                      <a:tailEnd type="none" w="med" len="med"/>
                     </a:lnT>
                     <a:lnB w="9525" cap="flat" cmpd="sng" algn="ctr">
                       <a:solidFill>
@@ -11018,7 +10986,7 @@
                     <a:bodyPr/>
                     <a:lstStyle/>
                     <a:p>
-                      <a:pPr indent="0" marL="0">
+                      <a:pPr marL="0" indent="0">
                         <a:buNone/>
                       </a:pPr>
                       <a:r>
@@ -11039,15 +11007,21 @@
                       </a:endParaRPr>
                     </a:p>
                   </a:txBody>
-                  <a:tcPr marL="91440" marR="91440" marT="45720" marB="45720" anchor="ctr">
+                  <a:tcPr anchor="ctr">
                     <a:lnL w="0" cap="flat" cmpd="sng" algn="ctr">
                       <a:noFill/>
                     </a:lnL>
                     <a:lnR w="0" cap="flat" cmpd="sng" algn="ctr">
                       <a:noFill/>
                     </a:lnR>
-                    <a:lnT w="0" cap="flat" cmpd="sng" algn="ctr">
-                      <a:noFill/>
+                    <a:lnT w="9525" cap="flat" cmpd="sng" algn="ctr">
+                      <a:solidFill>
+                        <a:srgbClr val="DCE2E7"/>
+                      </a:solidFill>
+                      <a:prstDash val="solid"/>
+                      <a:round/>
+                      <a:headEnd type="none" w="med" len="med"/>
+                      <a:tailEnd type="none" w="med" len="med"/>
                     </a:lnT>
                     <a:lnB w="9525" cap="flat" cmpd="sng" algn="ctr">
                       <a:solidFill>
@@ -11068,7 +11042,7 @@
                     <a:bodyPr/>
                     <a:lstStyle/>
                     <a:p>
-                      <a:pPr indent="0" marL="0">
+                      <a:pPr marL="0" indent="0">
                         <a:buNone/>
                       </a:pPr>
                       <a:r>
@@ -11089,15 +11063,21 @@
                       </a:endParaRPr>
                     </a:p>
                   </a:txBody>
-                  <a:tcPr marL="91440" marR="91440" marT="45720" marB="45720" anchor="ctr">
+                  <a:tcPr anchor="ctr">
                     <a:lnL w="0" cap="flat" cmpd="sng" algn="ctr">
                       <a:noFill/>
                     </a:lnL>
                     <a:lnR w="0" cap="flat" cmpd="sng" algn="ctr">
                       <a:noFill/>
                     </a:lnR>
-                    <a:lnT w="0" cap="flat" cmpd="sng" algn="ctr">
-                      <a:noFill/>
+                    <a:lnT w="9525" cap="flat" cmpd="sng" algn="ctr">
+                      <a:solidFill>
+                        <a:srgbClr val="DCE2E7"/>
+                      </a:solidFill>
+                      <a:prstDash val="solid"/>
+                      <a:round/>
+                      <a:headEnd type="none" w="med" len="med"/>
+                      <a:tailEnd type="none" w="med" len="med"/>
                     </a:lnT>
                     <a:lnB w="9525" cap="flat" cmpd="sng" algn="ctr">
                       <a:solidFill>
@@ -11118,7 +11098,7 @@
                     <a:bodyPr/>
                     <a:lstStyle/>
                     <a:p>
-                      <a:pPr algn="r" indent="0" marL="0">
+                      <a:pPr marL="0" indent="0" algn="r">
                         <a:buNone/>
                       </a:pPr>
                       <a:r>
@@ -11139,15 +11119,21 @@
                       </a:endParaRPr>
                     </a:p>
                   </a:txBody>
-                  <a:tcPr marL="91440" marR="91440" marT="45720" marB="45720" anchor="ctr">
+                  <a:tcPr anchor="ctr">
                     <a:lnL w="0" cap="flat" cmpd="sng" algn="ctr">
                       <a:noFill/>
                     </a:lnL>
                     <a:lnR w="0" cap="flat" cmpd="sng" algn="ctr">
                       <a:noFill/>
                     </a:lnR>
-                    <a:lnT w="0" cap="flat" cmpd="sng" algn="ctr">
-                      <a:noFill/>
+                    <a:lnT w="9525" cap="flat" cmpd="sng" algn="ctr">
+                      <a:solidFill>
+                        <a:srgbClr val="DCE2E7"/>
+                      </a:solidFill>
+                      <a:prstDash val="solid"/>
+                      <a:round/>
+                      <a:headEnd type="none" w="med" len="med"/>
+                      <a:tailEnd type="none" w="med" len="med"/>
                     </a:lnT>
                     <a:lnB w="9525" cap="flat" cmpd="sng" algn="ctr">
                       <a:solidFill>
@@ -11168,7 +11154,7 @@
                     <a:bodyPr/>
                     <a:lstStyle/>
                     <a:p>
-                      <a:pPr indent="0" marL="0">
+                      <a:pPr marL="0" indent="0">
                         <a:buNone/>
                       </a:pPr>
                       <a:r>
@@ -11189,15 +11175,21 @@
                       </a:endParaRPr>
                     </a:p>
                   </a:txBody>
-                  <a:tcPr marL="91440" marR="91440" marT="45720" marB="45720" anchor="ctr">
+                  <a:tcPr anchor="ctr">
                     <a:lnL w="0" cap="flat" cmpd="sng" algn="ctr">
                       <a:noFill/>
                     </a:lnL>
                     <a:lnR w="0" cap="flat" cmpd="sng" algn="ctr">
                       <a:noFill/>
                     </a:lnR>
-                    <a:lnT w="0" cap="flat" cmpd="sng" algn="ctr">
-                      <a:noFill/>
+                    <a:lnT w="9525" cap="flat" cmpd="sng" algn="ctr">
+                      <a:solidFill>
+                        <a:srgbClr val="DCE2E7"/>
+                      </a:solidFill>
+                      <a:prstDash val="solid"/>
+                      <a:round/>
+                      <a:headEnd type="none" w="med" len="med"/>
+                      <a:tailEnd type="none" w="med" len="med"/>
                     </a:lnT>
                     <a:lnB w="9525" cap="flat" cmpd="sng" algn="ctr">
                       <a:solidFill>
@@ -11218,7 +11210,7 @@
                     <a:bodyPr/>
                     <a:lstStyle/>
                     <a:p>
-                      <a:pPr indent="0" marL="0">
+                      <a:pPr marL="0" indent="0">
                         <a:buNone/>
                       </a:pPr>
                       <a:r>
@@ -11239,7 +11231,7 @@
                       </a:endParaRPr>
                     </a:p>
                     <a:p>
-                      <a:pPr indent="0" marL="0">
+                      <a:pPr marL="0" indent="0">
                         <a:buNone/>
                       </a:pPr>
                       <a:r>
@@ -11260,15 +11252,21 @@
                       </a:endParaRPr>
                     </a:p>
                   </a:txBody>
-                  <a:tcPr marL="91440" marR="91440" marT="45720" marB="45720" anchor="ctr">
+                  <a:tcPr anchor="ctr">
                     <a:lnL w="0" cap="flat" cmpd="sng" algn="ctr">
                       <a:noFill/>
                     </a:lnL>
                     <a:lnR w="0" cap="flat" cmpd="sng" algn="ctr">
                       <a:noFill/>
                     </a:lnR>
-                    <a:lnT w="0" cap="flat" cmpd="sng" algn="ctr">
-                      <a:noFill/>
+                    <a:lnT w="9525" cap="flat" cmpd="sng" algn="ctr">
+                      <a:solidFill>
+                        <a:srgbClr val="DCE2E7"/>
+                      </a:solidFill>
+                      <a:prstDash val="solid"/>
+                      <a:round/>
+                      <a:headEnd type="none" w="med" len="med"/>
+                      <a:tailEnd type="none" w="med" len="med"/>
                     </a:lnT>
                     <a:lnB w="9525" cap="flat" cmpd="sng" algn="ctr">
                       <a:solidFill>
@@ -11289,7 +11287,7 @@
                     <a:bodyPr/>
                     <a:lstStyle/>
                     <a:p>
-                      <a:pPr indent="0" marL="0">
+                      <a:pPr marL="0" indent="0">
                         <a:buNone/>
                       </a:pPr>
                       <a:r>
@@ -11310,15 +11308,21 @@
                       </a:endParaRPr>
                     </a:p>
                   </a:txBody>
-                  <a:tcPr marL="91440" marR="91440" marT="45720" marB="45720" anchor="ctr">
+                  <a:tcPr anchor="ctr">
                     <a:lnL w="0" cap="flat" cmpd="sng" algn="ctr">
                       <a:noFill/>
                     </a:lnL>
                     <a:lnR w="0" cap="flat" cmpd="sng" algn="ctr">
                       <a:noFill/>
                     </a:lnR>
-                    <a:lnT w="0" cap="flat" cmpd="sng" algn="ctr">
-                      <a:noFill/>
+                    <a:lnT w="9525" cap="flat" cmpd="sng" algn="ctr">
+                      <a:solidFill>
+                        <a:srgbClr val="DCE2E7"/>
+                      </a:solidFill>
+                      <a:prstDash val="solid"/>
+                      <a:round/>
+                      <a:headEnd type="none" w="med" len="med"/>
+                      <a:tailEnd type="none" w="med" len="med"/>
                     </a:lnT>
                     <a:lnB w="9525" cap="flat" cmpd="sng" algn="ctr">
                       <a:solidFill>
@@ -11334,6 +11338,11 @@
                     </a:solidFill>
                   </a:tcPr>
                 </a:tc>
+                <a:extLst>
+                  <a:ext uri="{0D108BD9-81ED-4DB2-BD59-A6C34878D82A}">
+                    <a16:rowId xmlns:a16="http://schemas.microsoft.com/office/drawing/2014/main" val="10002"/>
+                  </a:ext>
+                </a:extLst>
               </a:tr>
               <a:tr h="329184">
                 <a:tc>
@@ -11341,7 +11350,7 @@
                     <a:bodyPr/>
                     <a:lstStyle/>
                     <a:p>
-                      <a:pPr indent="0" marL="0">
+                      <a:pPr marL="0" indent="0">
                         <a:buNone/>
                       </a:pPr>
                       <a:r>
@@ -11362,15 +11371,21 @@
                       </a:endParaRPr>
                     </a:p>
                   </a:txBody>
-                  <a:tcPr marL="91440" marR="91440" marT="45720" marB="45720" anchor="ctr">
+                  <a:tcPr anchor="ctr">
                     <a:lnL w="0" cap="flat" cmpd="sng" algn="ctr">
                       <a:noFill/>
                     </a:lnL>
                     <a:lnR w="0" cap="flat" cmpd="sng" algn="ctr">
                       <a:noFill/>
                     </a:lnR>
-                    <a:lnT w="0" cap="flat" cmpd="sng" algn="ctr">
-                      <a:noFill/>
+                    <a:lnT w="9525" cap="flat" cmpd="sng" algn="ctr">
+                      <a:solidFill>
+                        <a:srgbClr val="DCE2E7"/>
+                      </a:solidFill>
+                      <a:prstDash val="solid"/>
+                      <a:round/>
+                      <a:headEnd type="none" w="med" len="med"/>
+                      <a:tailEnd type="none" w="med" len="med"/>
                     </a:lnT>
                     <a:lnB w="9525" cap="flat" cmpd="sng" algn="ctr">
                       <a:solidFill>
@@ -11388,7 +11403,7 @@
                     <a:bodyPr/>
                     <a:lstStyle/>
                     <a:p>
-                      <a:pPr indent="0" marL="0">
+                      <a:pPr marL="0" indent="0">
                         <a:buNone/>
                       </a:pPr>
                       <a:r>
@@ -11409,15 +11424,21 @@
                       </a:endParaRPr>
                     </a:p>
                   </a:txBody>
-                  <a:tcPr marL="91440" marR="91440" marT="45720" marB="45720" anchor="ctr">
+                  <a:tcPr anchor="ctr">
                     <a:lnL w="0" cap="flat" cmpd="sng" algn="ctr">
                       <a:noFill/>
                     </a:lnL>
                     <a:lnR w="0" cap="flat" cmpd="sng" algn="ctr">
                       <a:noFill/>
                     </a:lnR>
-                    <a:lnT w="0" cap="flat" cmpd="sng" algn="ctr">
-                      <a:noFill/>
+                    <a:lnT w="9525" cap="flat" cmpd="sng" algn="ctr">
+                      <a:solidFill>
+                        <a:srgbClr val="DCE2E7"/>
+                      </a:solidFill>
+                      <a:prstDash val="solid"/>
+                      <a:round/>
+                      <a:headEnd type="none" w="med" len="med"/>
+                      <a:tailEnd type="none" w="med" len="med"/>
                     </a:lnT>
                     <a:lnB w="9525" cap="flat" cmpd="sng" algn="ctr">
                       <a:solidFill>
@@ -11435,7 +11456,7 @@
                     <a:bodyPr/>
                     <a:lstStyle/>
                     <a:p>
-                      <a:pPr indent="0" marL="0">
+                      <a:pPr marL="0" indent="0">
                         <a:buNone/>
                       </a:pPr>
                       <a:r>
@@ -11456,15 +11477,21 @@
                       </a:endParaRPr>
                     </a:p>
                   </a:txBody>
-                  <a:tcPr marL="91440" marR="91440" marT="45720" marB="45720" anchor="ctr">
+                  <a:tcPr anchor="ctr">
                     <a:lnL w="0" cap="flat" cmpd="sng" algn="ctr">
                       <a:noFill/>
                     </a:lnL>
                     <a:lnR w="0" cap="flat" cmpd="sng" algn="ctr">
                       <a:noFill/>
                     </a:lnR>
-                    <a:lnT w="0" cap="flat" cmpd="sng" algn="ctr">
-                      <a:noFill/>
+                    <a:lnT w="9525" cap="flat" cmpd="sng" algn="ctr">
+                      <a:solidFill>
+                        <a:srgbClr val="DCE2E7"/>
+                      </a:solidFill>
+                      <a:prstDash val="solid"/>
+                      <a:round/>
+                      <a:headEnd type="none" w="med" len="med"/>
+                      <a:tailEnd type="none" w="med" len="med"/>
                     </a:lnT>
                     <a:lnB w="9525" cap="flat" cmpd="sng" algn="ctr">
                       <a:solidFill>
@@ -11482,7 +11509,7 @@
                     <a:bodyPr/>
                     <a:lstStyle/>
                     <a:p>
-                      <a:pPr algn="r" indent="0" marL="0">
+                      <a:pPr marL="0" indent="0" algn="r">
                         <a:buNone/>
                       </a:pPr>
                       <a:r>
@@ -11503,15 +11530,21 @@
                       </a:endParaRPr>
                     </a:p>
                   </a:txBody>
-                  <a:tcPr marL="91440" marR="91440" marT="45720" marB="45720" anchor="ctr">
+                  <a:tcPr anchor="ctr">
                     <a:lnL w="0" cap="flat" cmpd="sng" algn="ctr">
                       <a:noFill/>
                     </a:lnL>
                     <a:lnR w="0" cap="flat" cmpd="sng" algn="ctr">
                       <a:noFill/>
                     </a:lnR>
-                    <a:lnT w="0" cap="flat" cmpd="sng" algn="ctr">
-                      <a:noFill/>
+                    <a:lnT w="9525" cap="flat" cmpd="sng" algn="ctr">
+                      <a:solidFill>
+                        <a:srgbClr val="DCE2E7"/>
+                      </a:solidFill>
+                      <a:prstDash val="solid"/>
+                      <a:round/>
+                      <a:headEnd type="none" w="med" len="med"/>
+                      <a:tailEnd type="none" w="med" len="med"/>
                     </a:lnT>
                     <a:lnB w="9525" cap="flat" cmpd="sng" algn="ctr">
                       <a:solidFill>
@@ -11529,7 +11562,7 @@
                     <a:bodyPr/>
                     <a:lstStyle/>
                     <a:p>
-                      <a:pPr indent="0" marL="0">
+                      <a:pPr marL="0" indent="0">
                         <a:buNone/>
                       </a:pPr>
                       <a:r>
@@ -11550,15 +11583,21 @@
                       </a:endParaRPr>
                     </a:p>
                   </a:txBody>
-                  <a:tcPr marL="91440" marR="91440" marT="45720" marB="45720" anchor="ctr">
+                  <a:tcPr anchor="ctr">
                     <a:lnL w="0" cap="flat" cmpd="sng" algn="ctr">
                       <a:noFill/>
                     </a:lnL>
                     <a:lnR w="0" cap="flat" cmpd="sng" algn="ctr">
                       <a:noFill/>
                     </a:lnR>
-                    <a:lnT w="0" cap="flat" cmpd="sng" algn="ctr">
-                      <a:noFill/>
+                    <a:lnT w="9525" cap="flat" cmpd="sng" algn="ctr">
+                      <a:solidFill>
+                        <a:srgbClr val="DCE2E7"/>
+                      </a:solidFill>
+                      <a:prstDash val="solid"/>
+                      <a:round/>
+                      <a:headEnd type="none" w="med" len="med"/>
+                      <a:tailEnd type="none" w="med" len="med"/>
                     </a:lnT>
                     <a:lnB w="9525" cap="flat" cmpd="sng" algn="ctr">
                       <a:solidFill>
@@ -11576,7 +11615,7 @@
                     <a:bodyPr/>
                     <a:lstStyle/>
                     <a:p>
-                      <a:pPr indent="0" marL="0">
+                      <a:pPr marL="0" indent="0">
                         <a:buNone/>
                       </a:pPr>
                       <a:r>
@@ -11597,15 +11636,21 @@
                       </a:endParaRPr>
                     </a:p>
                   </a:txBody>
-                  <a:tcPr marL="91440" marR="91440" marT="45720" marB="45720" anchor="ctr">
+                  <a:tcPr anchor="ctr">
                     <a:lnL w="0" cap="flat" cmpd="sng" algn="ctr">
                       <a:noFill/>
                     </a:lnL>
                     <a:lnR w="0" cap="flat" cmpd="sng" algn="ctr">
                       <a:noFill/>
                     </a:lnR>
-                    <a:lnT w="0" cap="flat" cmpd="sng" algn="ctr">
-                      <a:noFill/>
+                    <a:lnT w="9525" cap="flat" cmpd="sng" algn="ctr">
+                      <a:solidFill>
+                        <a:srgbClr val="DCE2E7"/>
+                      </a:solidFill>
+                      <a:prstDash val="solid"/>
+                      <a:round/>
+                      <a:headEnd type="none" w="med" len="med"/>
+                      <a:tailEnd type="none" w="med" len="med"/>
                     </a:lnT>
                     <a:lnB w="9525" cap="flat" cmpd="sng" algn="ctr">
                       <a:solidFill>
@@ -11623,7 +11668,7 @@
                     <a:bodyPr/>
                     <a:lstStyle/>
                     <a:p>
-                      <a:pPr indent="0" marL="0">
+                      <a:pPr marL="0" indent="0">
                         <a:buNone/>
                       </a:pPr>
                       <a:r>
@@ -11644,15 +11689,21 @@
                       </a:endParaRPr>
                     </a:p>
                   </a:txBody>
-                  <a:tcPr marL="91440" marR="91440" marT="45720" marB="45720" anchor="ctr">
+                  <a:tcPr anchor="ctr">
                     <a:lnL w="0" cap="flat" cmpd="sng" algn="ctr">
                       <a:noFill/>
                     </a:lnL>
                     <a:lnR w="0" cap="flat" cmpd="sng" algn="ctr">
                       <a:noFill/>
                     </a:lnR>
-                    <a:lnT w="0" cap="flat" cmpd="sng" algn="ctr">
-                      <a:noFill/>
+                    <a:lnT w="9525" cap="flat" cmpd="sng" algn="ctr">
+                      <a:solidFill>
+                        <a:srgbClr val="DCE2E7"/>
+                      </a:solidFill>
+                      <a:prstDash val="solid"/>
+                      <a:round/>
+                      <a:headEnd type="none" w="med" len="med"/>
+                      <a:tailEnd type="none" w="med" len="med"/>
                     </a:lnT>
                     <a:lnB w="9525" cap="flat" cmpd="sng" algn="ctr">
                       <a:solidFill>
@@ -11665,6 +11716,11 @@
                     </a:lnB>
                   </a:tcPr>
                 </a:tc>
+                <a:extLst>
+                  <a:ext uri="{0D108BD9-81ED-4DB2-BD59-A6C34878D82A}">
+                    <a16:rowId xmlns:a16="http://schemas.microsoft.com/office/drawing/2014/main" val="10003"/>
+                  </a:ext>
+                </a:extLst>
               </a:tr>
               <a:tr h="329184">
                 <a:tc>
@@ -11672,7 +11728,7 @@
                     <a:bodyPr/>
                     <a:lstStyle/>
                     <a:p>
-                      <a:pPr indent="0" marL="0">
+                      <a:pPr marL="0" indent="0">
                         <a:buNone/>
                       </a:pPr>
                       <a:r>
@@ -11693,15 +11749,21 @@
                       </a:endParaRPr>
                     </a:p>
                   </a:txBody>
-                  <a:tcPr marL="91440" marR="91440" marT="45720" marB="45720" anchor="ctr">
+                  <a:tcPr anchor="ctr">
                     <a:lnL w="0" cap="flat" cmpd="sng" algn="ctr">
                       <a:noFill/>
                     </a:lnL>
                     <a:lnR w="0" cap="flat" cmpd="sng" algn="ctr">
                       <a:noFill/>
                     </a:lnR>
-                    <a:lnT w="0" cap="flat" cmpd="sng" algn="ctr">
-                      <a:noFill/>
+                    <a:lnT w="9525" cap="flat" cmpd="sng" algn="ctr">
+                      <a:solidFill>
+                        <a:srgbClr val="DCE2E7"/>
+                      </a:solidFill>
+                      <a:prstDash val="solid"/>
+                      <a:round/>
+                      <a:headEnd type="none" w="med" len="med"/>
+                      <a:tailEnd type="none" w="med" len="med"/>
                     </a:lnT>
                     <a:lnB w="9525" cap="flat" cmpd="sng" algn="ctr">
                       <a:solidFill>
@@ -11719,7 +11781,7 @@
                     <a:bodyPr/>
                     <a:lstStyle/>
                     <a:p>
-                      <a:pPr indent="0" marL="0">
+                      <a:pPr marL="0" indent="0">
                         <a:buNone/>
                       </a:pPr>
                       <a:r>
@@ -11740,15 +11802,21 @@
                       </a:endParaRPr>
                     </a:p>
                   </a:txBody>
-                  <a:tcPr marL="91440" marR="91440" marT="45720" marB="45720" anchor="ctr">
+                  <a:tcPr anchor="ctr">
                     <a:lnL w="0" cap="flat" cmpd="sng" algn="ctr">
                       <a:noFill/>
                     </a:lnL>
                     <a:lnR w="0" cap="flat" cmpd="sng" algn="ctr">
                       <a:noFill/>
                     </a:lnR>
-                    <a:lnT w="0" cap="flat" cmpd="sng" algn="ctr">
-                      <a:noFill/>
+                    <a:lnT w="9525" cap="flat" cmpd="sng" algn="ctr">
+                      <a:solidFill>
+                        <a:srgbClr val="DCE2E7"/>
+                      </a:solidFill>
+                      <a:prstDash val="solid"/>
+                      <a:round/>
+                      <a:headEnd type="none" w="med" len="med"/>
+                      <a:tailEnd type="none" w="med" len="med"/>
                     </a:lnT>
                     <a:lnB w="9525" cap="flat" cmpd="sng" algn="ctr">
                       <a:solidFill>
@@ -11766,7 +11834,7 @@
                     <a:bodyPr/>
                     <a:lstStyle/>
                     <a:p>
-                      <a:pPr indent="0" marL="0">
+                      <a:pPr marL="0" indent="0">
                         <a:buNone/>
                       </a:pPr>
                       <a:r>
@@ -11787,15 +11855,21 @@
                       </a:endParaRPr>
                     </a:p>
                   </a:txBody>
-                  <a:tcPr marL="91440" marR="91440" marT="45720" marB="45720" anchor="ctr">
+                  <a:tcPr anchor="ctr">
                     <a:lnL w="0" cap="flat" cmpd="sng" algn="ctr">
                       <a:noFill/>
                     </a:lnL>
                     <a:lnR w="0" cap="flat" cmpd="sng" algn="ctr">
                       <a:noFill/>
                     </a:lnR>
-                    <a:lnT w="0" cap="flat" cmpd="sng" algn="ctr">
-                      <a:noFill/>
+                    <a:lnT w="9525" cap="flat" cmpd="sng" algn="ctr">
+                      <a:solidFill>
+                        <a:srgbClr val="DCE2E7"/>
+                      </a:solidFill>
+                      <a:prstDash val="solid"/>
+                      <a:round/>
+                      <a:headEnd type="none" w="med" len="med"/>
+                      <a:tailEnd type="none" w="med" len="med"/>
                     </a:lnT>
                     <a:lnB w="9525" cap="flat" cmpd="sng" algn="ctr">
                       <a:solidFill>
@@ -11813,7 +11887,7 @@
                     <a:bodyPr/>
                     <a:lstStyle/>
                     <a:p>
-                      <a:pPr algn="r" indent="0" marL="0">
+                      <a:pPr marL="0" indent="0" algn="r">
                         <a:buNone/>
                       </a:pPr>
                       <a:r>
@@ -11834,15 +11908,21 @@
                       </a:endParaRPr>
                     </a:p>
                   </a:txBody>
-                  <a:tcPr marL="91440" marR="91440" marT="45720" marB="45720" anchor="ctr">
+                  <a:tcPr anchor="ctr">
                     <a:lnL w="0" cap="flat" cmpd="sng" algn="ctr">
                       <a:noFill/>
                     </a:lnL>
                     <a:lnR w="0" cap="flat" cmpd="sng" algn="ctr">
                       <a:noFill/>
                     </a:lnR>
-                    <a:lnT w="0" cap="flat" cmpd="sng" algn="ctr">
-                      <a:noFill/>
+                    <a:lnT w="9525" cap="flat" cmpd="sng" algn="ctr">
+                      <a:solidFill>
+                        <a:srgbClr val="DCE2E7"/>
+                      </a:solidFill>
+                      <a:prstDash val="solid"/>
+                      <a:round/>
+                      <a:headEnd type="none" w="med" len="med"/>
+                      <a:tailEnd type="none" w="med" len="med"/>
                     </a:lnT>
                     <a:lnB w="9525" cap="flat" cmpd="sng" algn="ctr">
                       <a:solidFill>
@@ -11860,7 +11940,7 @@
                     <a:bodyPr/>
                     <a:lstStyle/>
                     <a:p>
-                      <a:pPr indent="0" marL="0">
+                      <a:pPr marL="0" indent="0">
                         <a:buNone/>
                       </a:pPr>
                       <a:r>
@@ -11881,15 +11961,21 @@
                       </a:endParaRPr>
                     </a:p>
                   </a:txBody>
-                  <a:tcPr marL="91440" marR="91440" marT="45720" marB="45720" anchor="ctr">
+                  <a:tcPr anchor="ctr">
                     <a:lnL w="0" cap="flat" cmpd="sng" algn="ctr">
                       <a:noFill/>
                     </a:lnL>
                     <a:lnR w="0" cap="flat" cmpd="sng" algn="ctr">
                       <a:noFill/>
                     </a:lnR>
-                    <a:lnT w="0" cap="flat" cmpd="sng" algn="ctr">
-                      <a:noFill/>
+                    <a:lnT w="9525" cap="flat" cmpd="sng" algn="ctr">
+                      <a:solidFill>
+                        <a:srgbClr val="DCE2E7"/>
+                      </a:solidFill>
+                      <a:prstDash val="solid"/>
+                      <a:round/>
+                      <a:headEnd type="none" w="med" len="med"/>
+                      <a:tailEnd type="none" w="med" len="med"/>
                     </a:lnT>
                     <a:lnB w="9525" cap="flat" cmpd="sng" algn="ctr">
                       <a:solidFill>
@@ -11907,7 +11993,7 @@
                     <a:bodyPr/>
                     <a:lstStyle/>
                     <a:p>
-                      <a:pPr indent="0" marL="0">
+                      <a:pPr marL="0" indent="0">
                         <a:buNone/>
                       </a:pPr>
                       <a:r>
@@ -11928,15 +12014,21 @@
                       </a:endParaRPr>
                     </a:p>
                   </a:txBody>
-                  <a:tcPr marL="91440" marR="91440" marT="45720" marB="45720" anchor="ctr">
+                  <a:tcPr anchor="ctr">
                     <a:lnL w="0" cap="flat" cmpd="sng" algn="ctr">
                       <a:noFill/>
                     </a:lnL>
                     <a:lnR w="0" cap="flat" cmpd="sng" algn="ctr">
                       <a:noFill/>
                     </a:lnR>
-                    <a:lnT w="0" cap="flat" cmpd="sng" algn="ctr">
-                      <a:noFill/>
+                    <a:lnT w="9525" cap="flat" cmpd="sng" algn="ctr">
+                      <a:solidFill>
+                        <a:srgbClr val="DCE2E7"/>
+                      </a:solidFill>
+                      <a:prstDash val="solid"/>
+                      <a:round/>
+                      <a:headEnd type="none" w="med" len="med"/>
+                      <a:tailEnd type="none" w="med" len="med"/>
                     </a:lnT>
                     <a:lnB w="9525" cap="flat" cmpd="sng" algn="ctr">
                       <a:solidFill>
@@ -11954,7 +12046,7 @@
                     <a:bodyPr/>
                     <a:lstStyle/>
                     <a:p>
-                      <a:pPr indent="0" marL="0">
+                      <a:pPr marL="0" indent="0">
                         <a:buNone/>
                       </a:pPr>
                       <a:r>
@@ -11975,15 +12067,21 @@
                       </a:endParaRPr>
                     </a:p>
                   </a:txBody>
-                  <a:tcPr marL="91440" marR="91440" marT="45720" marB="45720" anchor="ctr">
+                  <a:tcPr anchor="ctr">
                     <a:lnL w="0" cap="flat" cmpd="sng" algn="ctr">
                       <a:noFill/>
                     </a:lnL>
                     <a:lnR w="0" cap="flat" cmpd="sng" algn="ctr">
                       <a:noFill/>
                     </a:lnR>
-                    <a:lnT w="0" cap="flat" cmpd="sng" algn="ctr">
-                      <a:noFill/>
+                    <a:lnT w="9525" cap="flat" cmpd="sng" algn="ctr">
+                      <a:solidFill>
+                        <a:srgbClr val="DCE2E7"/>
+                      </a:solidFill>
+                      <a:prstDash val="solid"/>
+                      <a:round/>
+                      <a:headEnd type="none" w="med" len="med"/>
+                      <a:tailEnd type="none" w="med" len="med"/>
                     </a:lnT>
                     <a:lnB w="9525" cap="flat" cmpd="sng" algn="ctr">
                       <a:solidFill>
@@ -11996,6 +12094,11 @@
                     </a:lnB>
                   </a:tcPr>
                 </a:tc>
+                <a:extLst>
+                  <a:ext uri="{0D108BD9-81ED-4DB2-BD59-A6C34878D82A}">
+                    <a16:rowId xmlns:a16="http://schemas.microsoft.com/office/drawing/2014/main" val="10004"/>
+                  </a:ext>
+                </a:extLst>
               </a:tr>
               <a:tr h="329184">
                 <a:tc>
@@ -12003,7 +12106,7 @@
                     <a:bodyPr/>
                     <a:lstStyle/>
                     <a:p>
-                      <a:pPr indent="0" marL="0">
+                      <a:pPr marL="0" indent="0">
                         <a:buNone/>
                       </a:pPr>
                       <a:r>
@@ -12024,15 +12127,21 @@
                       </a:endParaRPr>
                     </a:p>
                   </a:txBody>
-                  <a:tcPr marL="91440" marR="91440" marT="45720" marB="45720" anchor="ctr">
+                  <a:tcPr anchor="ctr">
                     <a:lnL w="0" cap="flat" cmpd="sng" algn="ctr">
                       <a:noFill/>
                     </a:lnL>
                     <a:lnR w="0" cap="flat" cmpd="sng" algn="ctr">
                       <a:noFill/>
                     </a:lnR>
-                    <a:lnT w="0" cap="flat" cmpd="sng" algn="ctr">
-                      <a:noFill/>
+                    <a:lnT w="9525" cap="flat" cmpd="sng" algn="ctr">
+                      <a:solidFill>
+                        <a:srgbClr val="DCE2E7"/>
+                      </a:solidFill>
+                      <a:prstDash val="solid"/>
+                      <a:round/>
+                      <a:headEnd type="none" w="med" len="med"/>
+                      <a:tailEnd type="none" w="med" len="med"/>
                     </a:lnT>
                     <a:lnB w="9525" cap="flat" cmpd="sng" algn="ctr">
                       <a:solidFill>
@@ -12050,7 +12159,7 @@
                     <a:bodyPr/>
                     <a:lstStyle/>
                     <a:p>
-                      <a:pPr indent="0" marL="0">
+                      <a:pPr marL="0" indent="0">
                         <a:buNone/>
                       </a:pPr>
                       <a:r>
@@ -12071,15 +12180,21 @@
                       </a:endParaRPr>
                     </a:p>
                   </a:txBody>
-                  <a:tcPr marL="91440" marR="91440" marT="45720" marB="45720" anchor="ctr">
+                  <a:tcPr anchor="ctr">
                     <a:lnL w="0" cap="flat" cmpd="sng" algn="ctr">
                       <a:noFill/>
                     </a:lnL>
                     <a:lnR w="0" cap="flat" cmpd="sng" algn="ctr">
                       <a:noFill/>
                     </a:lnR>
-                    <a:lnT w="0" cap="flat" cmpd="sng" algn="ctr">
-                      <a:noFill/>
+                    <a:lnT w="9525" cap="flat" cmpd="sng" algn="ctr">
+                      <a:solidFill>
+                        <a:srgbClr val="DCE2E7"/>
+                      </a:solidFill>
+                      <a:prstDash val="solid"/>
+                      <a:round/>
+                      <a:headEnd type="none" w="med" len="med"/>
+                      <a:tailEnd type="none" w="med" len="med"/>
                     </a:lnT>
                     <a:lnB w="9525" cap="flat" cmpd="sng" algn="ctr">
                       <a:solidFill>
@@ -12097,7 +12212,7 @@
                     <a:bodyPr/>
                     <a:lstStyle/>
                     <a:p>
-                      <a:pPr indent="0" marL="0">
+                      <a:pPr marL="0" indent="0">
                         <a:buNone/>
                       </a:pPr>
                       <a:r>
@@ -12118,15 +12233,21 @@
                       </a:endParaRPr>
                     </a:p>
                   </a:txBody>
-                  <a:tcPr marL="91440" marR="91440" marT="45720" marB="45720" anchor="ctr">
+                  <a:tcPr anchor="ctr">
                     <a:lnL w="0" cap="flat" cmpd="sng" algn="ctr">
                       <a:noFill/>
                     </a:lnL>
                     <a:lnR w="0" cap="flat" cmpd="sng" algn="ctr">
                       <a:noFill/>
                     </a:lnR>
-                    <a:lnT w="0" cap="flat" cmpd="sng" algn="ctr">
-                      <a:noFill/>
+                    <a:lnT w="9525" cap="flat" cmpd="sng" algn="ctr">
+                      <a:solidFill>
+                        <a:srgbClr val="DCE2E7"/>
+                      </a:solidFill>
+                      <a:prstDash val="solid"/>
+                      <a:round/>
+                      <a:headEnd type="none" w="med" len="med"/>
+                      <a:tailEnd type="none" w="med" len="med"/>
                     </a:lnT>
                     <a:lnB w="9525" cap="flat" cmpd="sng" algn="ctr">
                       <a:solidFill>
@@ -12144,7 +12265,7 @@
                     <a:bodyPr/>
                     <a:lstStyle/>
                     <a:p>
-                      <a:pPr algn="r" indent="0" marL="0">
+                      <a:pPr marL="0" indent="0" algn="r">
                         <a:buNone/>
                       </a:pPr>
                       <a:r>
@@ -12165,15 +12286,21 @@
                       </a:endParaRPr>
                     </a:p>
                   </a:txBody>
-                  <a:tcPr marL="91440" marR="91440" marT="45720" marB="45720" anchor="ctr">
+                  <a:tcPr anchor="ctr">
                     <a:lnL w="0" cap="flat" cmpd="sng" algn="ctr">
                       <a:noFill/>
                     </a:lnL>
                     <a:lnR w="0" cap="flat" cmpd="sng" algn="ctr">
                       <a:noFill/>
                     </a:lnR>
-                    <a:lnT w="0" cap="flat" cmpd="sng" algn="ctr">
-                      <a:noFill/>
+                    <a:lnT w="9525" cap="flat" cmpd="sng" algn="ctr">
+                      <a:solidFill>
+                        <a:srgbClr val="DCE2E7"/>
+                      </a:solidFill>
+                      <a:prstDash val="solid"/>
+                      <a:round/>
+                      <a:headEnd type="none" w="med" len="med"/>
+                      <a:tailEnd type="none" w="med" len="med"/>
                     </a:lnT>
                     <a:lnB w="9525" cap="flat" cmpd="sng" algn="ctr">
                       <a:solidFill>
@@ -12191,7 +12318,7 @@
                     <a:bodyPr/>
                     <a:lstStyle/>
                     <a:p>
-                      <a:pPr indent="0" marL="0">
+                      <a:pPr marL="0" indent="0">
                         <a:buNone/>
                       </a:pPr>
                       <a:r>
@@ -12212,15 +12339,21 @@
                       </a:endParaRPr>
                     </a:p>
                   </a:txBody>
-                  <a:tcPr marL="91440" marR="91440" marT="45720" marB="45720" anchor="ctr">
+                  <a:tcPr anchor="ctr">
                     <a:lnL w="0" cap="flat" cmpd="sng" algn="ctr">
                       <a:noFill/>
                     </a:lnL>
                     <a:lnR w="0" cap="flat" cmpd="sng" algn="ctr">
                       <a:noFill/>
                     </a:lnR>
-                    <a:lnT w="0" cap="flat" cmpd="sng" algn="ctr">
-                      <a:noFill/>
+                    <a:lnT w="9525" cap="flat" cmpd="sng" algn="ctr">
+                      <a:solidFill>
+                        <a:srgbClr val="DCE2E7"/>
+                      </a:solidFill>
+                      <a:prstDash val="solid"/>
+                      <a:round/>
+                      <a:headEnd type="none" w="med" len="med"/>
+                      <a:tailEnd type="none" w="med" len="med"/>
                     </a:lnT>
                     <a:lnB w="9525" cap="flat" cmpd="sng" algn="ctr">
                       <a:solidFill>
@@ -12238,7 +12371,7 @@
                     <a:bodyPr/>
                     <a:lstStyle/>
                     <a:p>
-                      <a:pPr indent="0" marL="0">
+                      <a:pPr marL="0" indent="0">
                         <a:buNone/>
                       </a:pPr>
                       <a:r>
@@ -12259,15 +12392,21 @@
                       </a:endParaRPr>
                     </a:p>
                   </a:txBody>
-                  <a:tcPr marL="91440" marR="91440" marT="45720" marB="45720" anchor="ctr">
+                  <a:tcPr anchor="ctr">
                     <a:lnL w="0" cap="flat" cmpd="sng" algn="ctr">
                       <a:noFill/>
                     </a:lnL>
                     <a:lnR w="0" cap="flat" cmpd="sng" algn="ctr">
                       <a:noFill/>
                     </a:lnR>
-                    <a:lnT w="0" cap="flat" cmpd="sng" algn="ctr">
-                      <a:noFill/>
+                    <a:lnT w="9525" cap="flat" cmpd="sng" algn="ctr">
+                      <a:solidFill>
+                        <a:srgbClr val="DCE2E7"/>
+                      </a:solidFill>
+                      <a:prstDash val="solid"/>
+                      <a:round/>
+                      <a:headEnd type="none" w="med" len="med"/>
+                      <a:tailEnd type="none" w="med" len="med"/>
                     </a:lnT>
                     <a:lnB w="9525" cap="flat" cmpd="sng" algn="ctr">
                       <a:solidFill>
@@ -12285,7 +12424,7 @@
                     <a:bodyPr/>
                     <a:lstStyle/>
                     <a:p>
-                      <a:pPr indent="0" marL="0">
+                      <a:pPr marL="0" indent="0">
                         <a:buNone/>
                       </a:pPr>
                       <a:r>
@@ -12306,15 +12445,21 @@
                       </a:endParaRPr>
                     </a:p>
                   </a:txBody>
-                  <a:tcPr marL="91440" marR="91440" marT="45720" marB="45720" anchor="ctr">
+                  <a:tcPr anchor="ctr">
                     <a:lnL w="0" cap="flat" cmpd="sng" algn="ctr">
                       <a:noFill/>
                     </a:lnL>
                     <a:lnR w="0" cap="flat" cmpd="sng" algn="ctr">
                       <a:noFill/>
                     </a:lnR>
-                    <a:lnT w="0" cap="flat" cmpd="sng" algn="ctr">
-                      <a:noFill/>
+                    <a:lnT w="9525" cap="flat" cmpd="sng" algn="ctr">
+                      <a:solidFill>
+                        <a:srgbClr val="DCE2E7"/>
+                      </a:solidFill>
+                      <a:prstDash val="solid"/>
+                      <a:round/>
+                      <a:headEnd type="none" w="med" len="med"/>
+                      <a:tailEnd type="none" w="med" len="med"/>
                     </a:lnT>
                     <a:lnB w="9525" cap="flat" cmpd="sng" algn="ctr">
                       <a:solidFill>
@@ -12327,6 +12472,11 @@
                     </a:lnB>
                   </a:tcPr>
                 </a:tc>
+                <a:extLst>
+                  <a:ext uri="{0D108BD9-81ED-4DB2-BD59-A6C34878D82A}">
+                    <a16:rowId xmlns:a16="http://schemas.microsoft.com/office/drawing/2014/main" val="10005"/>
+                  </a:ext>
+                </a:extLst>
               </a:tr>
             </a:tbl>
           </a:graphicData>
@@ -12352,7 +12502,7 @@
           </a:prstGeom>
           <a:extLst>
             <a:ext uri="{C572A759-6A51-4108-AA02-DFA0A04FC94B}">
-              <ma14:wrappingTextBoxFlag xmlns:ma14="http://schemas.microsoft.com/office/mac/drawingml/2011/main" val="0"/>
+              <ma14:wrappingTextBoxFlag xmlns:ma14="http://schemas.microsoft.com/office/mac/drawingml/2011/main" xmlns="" val="0"/>
             </a:ext>
           </a:extLst>
         </p:spPr>
@@ -12373,7 +12523,7 @@
           <a:p>
             <a:pPr algn="r"/>
             <a:fld id="{F7021451-1387-4CA6-816F-3879F97B5CBC}" type="slidenum">
-              <a:rPr b="0" lang="en-US"/>
+              <a:rPr lang="en-US" b="0"/>
               <a:t>7</a:t>
             </a:fld>
             <a:endParaRPr lang="en-US"/>
@@ -12408,9 +12558,11 @@
       <p:sp>
         <p:nvSpPr>
           <p:cNvPr id="2" name="Text 0"/>
-          <p:cNvSpPr/>
+          <p:cNvSpPr>
+            <a:spLocks noGrp="1"/>
+          </p:cNvSpPr>
           <p:nvPr>
-            <p:ph idx="100" type="body" hasCustomPrompt="1"/>
+            <p:ph type="body" idx="100" hasCustomPrompt="1"/>
           </p:nvPr>
         </p:nvSpPr>
         <p:spPr>
@@ -12428,11 +12580,11 @@
           <a:bodyPr wrap="square" lIns="0" tIns="0" rIns="0" bIns="0" rtlCol="0" anchor="ctr"/>
           <a:lstStyle/>
           <a:p>
-            <a:pPr indent="0" marL="0">
-              <a:buNone/>
-            </a:pPr>
-            <a:r>
-              <a:rPr lang="en-US" sz="1100" b="1" spc="200" kern="0" dirty="0">
+            <a:pPr marL="0" indent="0">
+              <a:buNone/>
+            </a:pPr>
+            <a:r>
+              <a:rPr lang="en-US" sz="1100" b="1" kern="0" spc="200" dirty="0">
                 <a:solidFill>
                   <a:schemeClr val="accent1"/>
                 </a:solidFill>
@@ -12449,9 +12601,11 @@
       <p:sp>
         <p:nvSpPr>
           <p:cNvPr id="3" name="Text 0"/>
-          <p:cNvSpPr/>
+          <p:cNvSpPr>
+            <a:spLocks noGrp="1"/>
+          </p:cNvSpPr>
           <p:nvPr>
-            <p:ph idx="101" type="title" hasCustomPrompt="1"/>
+            <p:ph type="title" idx="101" hasCustomPrompt="1"/>
           </p:nvPr>
         </p:nvSpPr>
         <p:spPr>
@@ -12469,7 +12623,7 @@
           <a:bodyPr wrap="square" lIns="0" tIns="0" rIns="0" bIns="0" rtlCol="0" anchor="ctr"/>
           <a:lstStyle/>
           <a:p>
-            <a:pPr algn="l" indent="0" marL="0">
+            <a:pPr marL="0" indent="0" algn="l">
               <a:buNone/>
             </a:pPr>
             <a:r>
@@ -12535,11 +12689,11 @@
           <a:bodyPr wrap="square" lIns="0" tIns="0" rIns="0" bIns="0" rtlCol="0" anchor="ctr"/>
           <a:lstStyle/>
           <a:p>
-            <a:pPr algn="r" indent="0" marL="0">
-              <a:buNone/>
-            </a:pPr>
-            <a:r>
-              <a:rPr lang="en-US" sz="900" b="1" spc="100" kern="0" dirty="0">
+            <a:pPr marL="0" indent="0" algn="r">
+              <a:buNone/>
+            </a:pPr>
+            <a:r>
+              <a:rPr lang="en-US" sz="900" b="1" kern="0" spc="100" dirty="0">
                 <a:solidFill>
                   <a:schemeClr val="tx2"/>
                 </a:solidFill>
@@ -12574,7 +12728,7 @@
           <a:bodyPr wrap="square" lIns="0" tIns="0" rIns="0" bIns="0" rtlCol="0" anchor="ctr"/>
           <a:lstStyle/>
           <a:p>
-            <a:pPr indent="0" marL="0">
+            <a:pPr marL="0" indent="0">
               <a:buNone/>
             </a:pPr>
             <a:r>
@@ -12591,7 +12745,7 @@
             <a:endParaRPr lang="en-US" sz="1150" dirty="0"/>
           </a:p>
           <a:p>
-            <a:pPr indent="0" marL="0">
+            <a:pPr marL="0" indent="0">
               <a:buNone/>
             </a:pPr>
             <a:r>
@@ -12682,7 +12836,7 @@
           <a:bodyPr wrap="square" lIns="0" tIns="0" rIns="0" bIns="0" rtlCol="0" anchor="ctr"/>
           <a:lstStyle/>
           <a:p>
-            <a:pPr indent="0" marL="0">
+            <a:pPr marL="0" indent="0">
               <a:buNone/>
             </a:pPr>
             <a:r>
@@ -12721,7 +12875,7 @@
           <a:bodyPr wrap="square" lIns="0" tIns="0" rIns="0" bIns="0" rtlCol="0" anchor="ctr"/>
           <a:lstStyle/>
           <a:p>
-            <a:pPr algn="r" indent="0" marL="0">
+            <a:pPr marL="0" indent="0" algn="r">
               <a:buNone/>
             </a:pPr>
             <a:r>
@@ -12760,7 +12914,7 @@
           <a:bodyPr wrap="square" lIns="0" tIns="0" rIns="0" bIns="0" rtlCol="0" anchor="ctr"/>
           <a:lstStyle/>
           <a:p>
-            <a:pPr indent="0" marL="0">
+            <a:pPr marL="0" indent="0">
               <a:buNone/>
             </a:pPr>
             <a:r>
@@ -12777,7 +12931,7 @@
             <a:endParaRPr lang="en-US" sz="1150" dirty="0"/>
           </a:p>
           <a:p>
-            <a:pPr indent="0" marL="0">
+            <a:pPr marL="0" indent="0">
               <a:buNone/>
             </a:pPr>
             <a:r>
@@ -12868,7 +13022,7 @@
           <a:bodyPr wrap="square" lIns="0" tIns="0" rIns="0" bIns="0" rtlCol="0" anchor="ctr"/>
           <a:lstStyle/>
           <a:p>
-            <a:pPr indent="0" marL="0">
+            <a:pPr marL="0" indent="0">
               <a:buNone/>
             </a:pPr>
             <a:r>
@@ -12907,7 +13061,7 @@
           <a:bodyPr wrap="square" lIns="0" tIns="0" rIns="0" bIns="0" rtlCol="0" anchor="ctr"/>
           <a:lstStyle/>
           <a:p>
-            <a:pPr algn="r" indent="0" marL="0">
+            <a:pPr marL="0" indent="0" algn="r">
               <a:buNone/>
             </a:pPr>
             <a:r>
@@ -12946,7 +13100,7 @@
           <a:bodyPr wrap="square" lIns="0" tIns="0" rIns="0" bIns="0" rtlCol="0" anchor="ctr"/>
           <a:lstStyle/>
           <a:p>
-            <a:pPr indent="0" marL="0">
+            <a:pPr marL="0" indent="0">
               <a:buNone/>
             </a:pPr>
             <a:r>
@@ -12963,7 +13117,7 @@
             <a:endParaRPr lang="en-US" sz="1150" dirty="0"/>
           </a:p>
           <a:p>
-            <a:pPr indent="0" marL="0">
+            <a:pPr marL="0" indent="0">
               <a:buNone/>
             </a:pPr>
             <a:r>
@@ -13054,7 +13208,7 @@
           <a:bodyPr wrap="square" lIns="0" tIns="0" rIns="0" bIns="0" rtlCol="0" anchor="ctr"/>
           <a:lstStyle/>
           <a:p>
-            <a:pPr indent="0" marL="0">
+            <a:pPr marL="0" indent="0">
               <a:buNone/>
             </a:pPr>
             <a:r>
@@ -13093,7 +13247,7 @@
           <a:bodyPr wrap="square" lIns="0" tIns="0" rIns="0" bIns="0" rtlCol="0" anchor="ctr"/>
           <a:lstStyle/>
           <a:p>
-            <a:pPr algn="r" indent="0" marL="0">
+            <a:pPr marL="0" indent="0" algn="r">
               <a:buNone/>
             </a:pPr>
             <a:r>
@@ -13132,7 +13286,7 @@
           <a:bodyPr wrap="square" lIns="0" tIns="0" rIns="0" bIns="0" rtlCol="0" anchor="ctr"/>
           <a:lstStyle/>
           <a:p>
-            <a:pPr indent="0" marL="0">
+            <a:pPr marL="0" indent="0">
               <a:buNone/>
             </a:pPr>
             <a:r>
@@ -13149,7 +13303,7 @@
             <a:endParaRPr lang="en-US" sz="1150" dirty="0"/>
           </a:p>
           <a:p>
-            <a:pPr indent="0" marL="0">
+            <a:pPr marL="0" indent="0">
               <a:buNone/>
             </a:pPr>
             <a:r>
@@ -13240,7 +13394,7 @@
           <a:bodyPr wrap="square" lIns="0" tIns="0" rIns="0" bIns="0" rtlCol="0" anchor="ctr"/>
           <a:lstStyle/>
           <a:p>
-            <a:pPr indent="0" marL="0">
+            <a:pPr marL="0" indent="0">
               <a:buNone/>
             </a:pPr>
             <a:r>
@@ -13279,7 +13433,7 @@
           <a:bodyPr wrap="square" lIns="0" tIns="0" rIns="0" bIns="0" rtlCol="0" anchor="ctr"/>
           <a:lstStyle/>
           <a:p>
-            <a:pPr algn="r" indent="0" marL="0">
+            <a:pPr marL="0" indent="0" algn="r">
               <a:buNone/>
             </a:pPr>
             <a:r>
@@ -13318,7 +13472,7 @@
           <a:bodyPr wrap="square" lIns="0" tIns="0" rIns="0" bIns="0" rtlCol="0" anchor="ctr"/>
           <a:lstStyle/>
           <a:p>
-            <a:pPr indent="0" marL="0">
+            <a:pPr marL="0" indent="0">
               <a:buNone/>
             </a:pPr>
             <a:r>
@@ -13335,7 +13489,7 @@
             <a:endParaRPr lang="en-US" sz="1150" dirty="0"/>
           </a:p>
           <a:p>
-            <a:pPr indent="0" marL="0">
+            <a:pPr marL="0" indent="0">
               <a:buNone/>
             </a:pPr>
             <a:r>
@@ -13426,7 +13580,7 @@
           <a:bodyPr wrap="square" lIns="0" tIns="0" rIns="0" bIns="0" rtlCol="0" anchor="ctr"/>
           <a:lstStyle/>
           <a:p>
-            <a:pPr indent="0" marL="0">
+            <a:pPr marL="0" indent="0">
               <a:buNone/>
             </a:pPr>
             <a:r>
@@ -13465,7 +13619,7 @@
           <a:bodyPr wrap="square" lIns="0" tIns="0" rIns="0" bIns="0" rtlCol="0" anchor="ctr"/>
           <a:lstStyle/>
           <a:p>
-            <a:pPr algn="r" indent="0" marL="0">
+            <a:pPr marL="0" indent="0" algn="r">
               <a:buNone/>
             </a:pPr>
             <a:r>
@@ -13504,7 +13658,7 @@
           <a:bodyPr wrap="square" lIns="0" tIns="0" rIns="0" bIns="0" rtlCol="0" anchor="ctr"/>
           <a:lstStyle/>
           <a:p>
-            <a:pPr indent="0" marL="0">
+            <a:pPr marL="0" indent="0">
               <a:buNone/>
             </a:pPr>
             <a:r>
@@ -13521,7 +13675,7 @@
             <a:endParaRPr lang="en-US" sz="1150" dirty="0"/>
           </a:p>
           <a:p>
-            <a:pPr indent="0" marL="0">
+            <a:pPr marL="0" indent="0">
               <a:buNone/>
             </a:pPr>
             <a:r>
@@ -13612,7 +13766,7 @@
           <a:bodyPr wrap="square" lIns="0" tIns="0" rIns="0" bIns="0" rtlCol="0" anchor="ctr"/>
           <a:lstStyle/>
           <a:p>
-            <a:pPr indent="0" marL="0">
+            <a:pPr marL="0" indent="0">
               <a:buNone/>
             </a:pPr>
             <a:r>
@@ -13651,7 +13805,7 @@
           <a:bodyPr wrap="square" lIns="0" tIns="0" rIns="0" bIns="0" rtlCol="0" anchor="ctr"/>
           <a:lstStyle/>
           <a:p>
-            <a:pPr algn="r" indent="0" marL="0">
+            <a:pPr marL="0" indent="0" algn="r">
               <a:buNone/>
             </a:pPr>
             <a:r>
@@ -13671,7 +13825,7 @@
       </p:sp>
       <p:sp>
         <p:nvSpPr>
-          <p:cNvPr id="25" name="Slide Number Placeholder 0"/>
+          <p:cNvPr id="36" name="Slide Number Placeholder 0"/>
           <p:cNvSpPr>
             <a:spLocks noGrp="1"/>
           </p:cNvSpPr>
@@ -13689,7 +13843,7 @@
           </a:prstGeom>
           <a:extLst>
             <a:ext uri="{C572A759-6A51-4108-AA02-DFA0A04FC94B}">
-              <ma14:wrappingTextBoxFlag xmlns:ma14="http://schemas.microsoft.com/office/mac/drawingml/2011/main" val="0"/>
+              <ma14:wrappingTextBoxFlag xmlns:ma14="http://schemas.microsoft.com/office/mac/drawingml/2011/main" xmlns="" val="0"/>
             </a:ext>
           </a:extLst>
         </p:spPr>
@@ -13710,7 +13864,7 @@
           <a:p>
             <a:pPr algn="r"/>
             <a:fld id="{F7021451-1387-4CA6-816F-3879F97B5CBC}" type="slidenum">
-              <a:rPr b="0" lang="en-US"/>
+              <a:rPr lang="en-US" b="0"/>
               <a:t>8</a:t>
             </a:fld>
             <a:endParaRPr lang="en-US"/>
@@ -13745,9 +13899,11 @@
       <p:sp>
         <p:nvSpPr>
           <p:cNvPr id="2" name="Text 0"/>
-          <p:cNvSpPr/>
+          <p:cNvSpPr>
+            <a:spLocks noGrp="1"/>
+          </p:cNvSpPr>
           <p:nvPr>
-            <p:ph idx="100" type="body" hasCustomPrompt="1"/>
+            <p:ph type="body" idx="100" hasCustomPrompt="1"/>
           </p:nvPr>
         </p:nvSpPr>
         <p:spPr>
@@ -13765,11 +13921,11 @@
           <a:bodyPr wrap="square" lIns="0" tIns="0" rIns="0" bIns="0" rtlCol="0" anchor="ctr"/>
           <a:lstStyle/>
           <a:p>
-            <a:pPr indent="0" marL="0">
-              <a:buNone/>
-            </a:pPr>
-            <a:r>
-              <a:rPr lang="en-US" sz="1100" b="1" spc="200" kern="0" dirty="0">
+            <a:pPr marL="0" indent="0">
+              <a:buNone/>
+            </a:pPr>
+            <a:r>
+              <a:rPr lang="en-US" sz="1100" b="1" kern="0" spc="200" dirty="0">
                 <a:solidFill>
                   <a:schemeClr val="accent1"/>
                 </a:solidFill>
@@ -13786,9 +13942,11 @@
       <p:sp>
         <p:nvSpPr>
           <p:cNvPr id="3" name="Text 0"/>
-          <p:cNvSpPr/>
+          <p:cNvSpPr>
+            <a:spLocks noGrp="1"/>
+          </p:cNvSpPr>
           <p:nvPr>
-            <p:ph idx="101" type="title" hasCustomPrompt="1"/>
+            <p:ph type="title" idx="101" hasCustomPrompt="1"/>
           </p:nvPr>
         </p:nvSpPr>
         <p:spPr>
@@ -13806,7 +13964,7 @@
           <a:bodyPr wrap="square" lIns="0" tIns="0" rIns="0" bIns="0" rtlCol="0" anchor="ctr"/>
           <a:lstStyle/>
           <a:p>
-            <a:pPr algn="l" indent="0" marL="0">
+            <a:pPr marL="0" indent="0" algn="l">
               <a:buNone/>
             </a:pPr>
             <a:r>
@@ -13872,7 +14030,7 @@
           <a:bodyPr wrap="square" lIns="0" tIns="0" rIns="0" bIns="0" rtlCol="0" anchor="ctr"/>
           <a:lstStyle/>
           <a:p>
-            <a:pPr indent="0" marL="0">
+            <a:pPr marL="0" indent="0">
               <a:buNone/>
             </a:pPr>
             <a:r>
@@ -13886,9 +14044,6 @@
               </a:rPr>
               <a:t>✓ </a:t>
             </a:r>
-            <a:pPr indent="0" marL="0">
-              <a:buNone/>
-            </a:pPr>
             <a:r>
               <a:rPr lang="en-US" sz="1200" b="1" dirty="0">
                 <a:solidFill>
@@ -13903,7 +14058,7 @@
             <a:endParaRPr lang="en-US" sz="1200" dirty="0"/>
           </a:p>
           <a:p>
-            <a:pPr indent="0" marL="0">
+            <a:pPr marL="0" indent="0">
               <a:buNone/>
             </a:pPr>
             <a:r>
@@ -13969,7 +14124,7 @@
           <a:bodyPr wrap="square" lIns="0" tIns="0" rIns="0" bIns="0" rtlCol="0" anchor="ctr"/>
           <a:lstStyle/>
           <a:p>
-            <a:pPr indent="0" marL="0">
+            <a:pPr marL="0" indent="0">
               <a:buNone/>
             </a:pPr>
             <a:r>
@@ -13983,9 +14138,6 @@
               </a:rPr>
               <a:t>✓ </a:t>
             </a:r>
-            <a:pPr indent="0" marL="0">
-              <a:buNone/>
-            </a:pPr>
             <a:r>
               <a:rPr lang="en-US" sz="1200" b="1" dirty="0">
                 <a:solidFill>
@@ -14000,7 +14152,7 @@
             <a:endParaRPr lang="en-US" sz="1200" dirty="0"/>
           </a:p>
           <a:p>
-            <a:pPr indent="0" marL="0">
+            <a:pPr marL="0" indent="0">
               <a:buNone/>
             </a:pPr>
             <a:r>
@@ -14066,7 +14218,7 @@
           <a:bodyPr wrap="square" lIns="0" tIns="0" rIns="0" bIns="0" rtlCol="0" anchor="ctr"/>
           <a:lstStyle/>
           <a:p>
-            <a:pPr indent="0" marL="0">
+            <a:pPr marL="0" indent="0">
               <a:buNone/>
             </a:pPr>
             <a:r>
@@ -14080,9 +14232,6 @@
               </a:rPr>
               <a:t>✓ </a:t>
             </a:r>
-            <a:pPr indent="0" marL="0">
-              <a:buNone/>
-            </a:pPr>
             <a:r>
               <a:rPr lang="en-US" sz="1200" b="1" dirty="0">
                 <a:solidFill>
@@ -14097,7 +14246,7 @@
             <a:endParaRPr lang="en-US" sz="1200" dirty="0"/>
           </a:p>
           <a:p>
-            <a:pPr indent="0" marL="0">
+            <a:pPr marL="0" indent="0">
               <a:buNone/>
             </a:pPr>
             <a:r>
@@ -14163,7 +14312,7 @@
           <a:bodyPr wrap="square" lIns="0" tIns="0" rIns="0" bIns="0" rtlCol="0" anchor="ctr"/>
           <a:lstStyle/>
           <a:p>
-            <a:pPr indent="0" marL="0">
+            <a:pPr marL="0" indent="0">
               <a:buNone/>
             </a:pPr>
             <a:r>
@@ -14177,9 +14326,6 @@
               </a:rPr>
               <a:t>✓ </a:t>
             </a:r>
-            <a:pPr indent="0" marL="0">
-              <a:buNone/>
-            </a:pPr>
             <a:r>
               <a:rPr lang="en-US" sz="1200" b="1" dirty="0">
                 <a:solidFill>
@@ -14194,7 +14340,7 @@
             <a:endParaRPr lang="en-US" sz="1200" dirty="0"/>
           </a:p>
           <a:p>
-            <a:pPr indent="0" marL="0">
+            <a:pPr marL="0" indent="0">
               <a:buNone/>
             </a:pPr>
             <a:r>
@@ -14260,7 +14406,7 @@
           <a:bodyPr wrap="square" lIns="0" tIns="0" rIns="0" bIns="0" rtlCol="0" anchor="ctr"/>
           <a:lstStyle/>
           <a:p>
-            <a:pPr indent="0" marL="0">
+            <a:pPr marL="0" indent="0">
               <a:buNone/>
             </a:pPr>
             <a:r>
@@ -14274,9 +14420,6 @@
               </a:rPr>
               <a:t>✓ </a:t>
             </a:r>
-            <a:pPr indent="0" marL="0">
-              <a:buNone/>
-            </a:pPr>
             <a:r>
               <a:rPr lang="en-US" sz="1200" b="1" dirty="0">
                 <a:solidFill>
@@ -14291,7 +14434,7 @@
             <a:endParaRPr lang="en-US" sz="1200" dirty="0"/>
           </a:p>
           <a:p>
-            <a:pPr indent="0" marL="0">
+            <a:pPr marL="0" indent="0">
               <a:buNone/>
             </a:pPr>
             <a:r>
@@ -14357,7 +14500,7 @@
           <a:bodyPr wrap="square" lIns="0" tIns="0" rIns="0" bIns="0" rtlCol="0" anchor="ctr"/>
           <a:lstStyle/>
           <a:p>
-            <a:pPr indent="0" marL="0">
+            <a:pPr marL="0" indent="0">
               <a:buNone/>
             </a:pPr>
             <a:r>
@@ -14371,9 +14514,6 @@
               </a:rPr>
               <a:t>✓ </a:t>
             </a:r>
-            <a:pPr indent="0" marL="0">
-              <a:buNone/>
-            </a:pPr>
             <a:r>
               <a:rPr lang="en-US" sz="1200" b="1" dirty="0">
                 <a:solidFill>
@@ -14388,7 +14528,7 @@
             <a:endParaRPr lang="en-US" sz="1200" dirty="0"/>
           </a:p>
           <a:p>
-            <a:pPr indent="0" marL="0">
+            <a:pPr marL="0" indent="0">
               <a:buNone/>
             </a:pPr>
             <a:r>
@@ -14454,7 +14594,7 @@
           <a:bodyPr wrap="square" lIns="0" tIns="0" rIns="0" bIns="0" rtlCol="0" anchor="ctr"/>
           <a:lstStyle/>
           <a:p>
-            <a:pPr indent="0" marL="0">
+            <a:pPr marL="0" indent="0">
               <a:buNone/>
             </a:pPr>
             <a:r>
@@ -14468,9 +14608,6 @@
               </a:rPr>
               <a:t>✓ </a:t>
             </a:r>
-            <a:pPr indent="0" marL="0">
-              <a:buNone/>
-            </a:pPr>
             <a:r>
               <a:rPr lang="en-US" sz="1200" b="1" dirty="0">
                 <a:solidFill>
@@ -14485,7 +14622,7 @@
             <a:endParaRPr lang="en-US" sz="1200" dirty="0"/>
           </a:p>
           <a:p>
-            <a:pPr indent="0" marL="0">
+            <a:pPr marL="0" indent="0">
               <a:buNone/>
             </a:pPr>
             <a:r>
@@ -14551,7 +14688,7 @@
           <a:bodyPr wrap="square" lIns="0" tIns="0" rIns="0" bIns="0" rtlCol="0" anchor="ctr"/>
           <a:lstStyle/>
           <a:p>
-            <a:pPr indent="0" marL="0">
+            <a:pPr marL="0" indent="0">
               <a:buNone/>
             </a:pPr>
             <a:r>
@@ -14565,9 +14702,6 @@
               </a:rPr>
               <a:t>✓ </a:t>
             </a:r>
-            <a:pPr indent="0" marL="0">
-              <a:buNone/>
-            </a:pPr>
             <a:r>
               <a:rPr lang="en-US" sz="1200" b="1" dirty="0">
                 <a:solidFill>
@@ -14582,7 +14716,7 @@
             <a:endParaRPr lang="en-US" sz="1200" dirty="0"/>
           </a:p>
           <a:p>
-            <a:pPr indent="0" marL="0">
+            <a:pPr marL="0" indent="0">
               <a:buNone/>
             </a:pPr>
             <a:r>
@@ -14648,7 +14782,7 @@
           <a:bodyPr wrap="square" lIns="0" tIns="0" rIns="0" bIns="0" rtlCol="0" anchor="ctr"/>
           <a:lstStyle/>
           <a:p>
-            <a:pPr indent="0" marL="0">
+            <a:pPr marL="0" indent="0">
               <a:buNone/>
             </a:pPr>
             <a:r>
@@ -14662,9 +14796,6 @@
               </a:rPr>
               <a:t>✓ </a:t>
             </a:r>
-            <a:pPr indent="0" marL="0">
-              <a:buNone/>
-            </a:pPr>
             <a:r>
               <a:rPr lang="en-US" sz="1200" b="1" dirty="0">
                 <a:solidFill>
@@ -14679,7 +14810,7 @@
             <a:endParaRPr lang="en-US" sz="1200" dirty="0"/>
           </a:p>
           <a:p>
-            <a:pPr indent="0" marL="0">
+            <a:pPr marL="0" indent="0">
               <a:buNone/>
             </a:pPr>
             <a:r>
@@ -14745,11 +14876,11 @@
           <a:bodyPr wrap="square" lIns="0" tIns="0" rIns="0" bIns="0" rtlCol="0" anchor="ctr"/>
           <a:lstStyle/>
           <a:p>
-            <a:pPr indent="0" marL="0">
-              <a:buNone/>
-            </a:pPr>
-            <a:r>
-              <a:rPr lang="en-US" sz="900" b="1" spc="100" kern="0" dirty="0">
+            <a:pPr marL="0" indent="0">
+              <a:buNone/>
+            </a:pPr>
+            <a:r>
+              <a:rPr lang="en-US" sz="900" b="1" kern="0" spc="100" dirty="0">
                 <a:solidFill>
                   <a:schemeClr val="tx2"/>
                 </a:solidFill>
@@ -14890,7 +15021,7 @@
           <a:bodyPr wrap="square" lIns="0" tIns="0" rIns="0" bIns="0" rtlCol="0" anchor="t"/>
           <a:lstStyle/>
           <a:p>
-            <a:pPr indent="0" marL="0">
+            <a:pPr marL="0" indent="0">
               <a:buNone/>
             </a:pPr>
             <a:r>
@@ -14910,7 +15041,7 @@
       </p:sp>
       <p:sp>
         <p:nvSpPr>
-          <p:cNvPr id="25" name="Slide Number Placeholder 0"/>
+          <p:cNvPr id="26" name="Slide Number Placeholder 0"/>
           <p:cNvSpPr>
             <a:spLocks noGrp="1"/>
           </p:cNvSpPr>
@@ -14928,7 +15059,7 @@
           </a:prstGeom>
           <a:extLst>
             <a:ext uri="{C572A759-6A51-4108-AA02-DFA0A04FC94B}">
-              <ma14:wrappingTextBoxFlag xmlns:ma14="http://schemas.microsoft.com/office/mac/drawingml/2011/main" val="0"/>
+              <ma14:wrappingTextBoxFlag xmlns:ma14="http://schemas.microsoft.com/office/mac/drawingml/2011/main" xmlns="" val="0"/>
             </a:ext>
           </a:extLst>
         </p:spPr>
@@ -14949,7 +15080,7 @@
           <a:p>
             <a:pPr algn="r"/>
             <a:fld id="{F7021451-1387-4CA6-816F-3879F97B5CBC}" type="slidenum">
-              <a:rPr b="0" lang="en-US"/>
+              <a:rPr lang="en-US" b="0"/>
               <a:t>9</a:t>
             </a:fld>
             <a:endParaRPr lang="en-US"/>
@@ -15257,4 +15388,299 @@
     </a:ext>
   </a:extLst>
 </a:theme>
+</file>
+
+<file path=ppt/theme/theme2.xml><?xml version="1.0" encoding="utf-8"?>
+<a:theme xmlns:a="http://schemas.openxmlformats.org/drawingml/2006/main" name="Tema de Office">
+  <a:themeElements>
+    <a:clrScheme name="Office">
+      <a:dk1>
+        <a:sysClr val="windowText" lastClr="000000"/>
+      </a:dk1>
+      <a:lt1>
+        <a:sysClr val="window" lastClr="FFFFFF"/>
+      </a:lt1>
+      <a:dk2>
+        <a:srgbClr val="44546A"/>
+      </a:dk2>
+      <a:lt2>
+        <a:srgbClr val="E7E6E6"/>
+      </a:lt2>
+      <a:accent1>
+        <a:srgbClr val="4472C4"/>
+      </a:accent1>
+      <a:accent2>
+        <a:srgbClr val="ED7D31"/>
+      </a:accent2>
+      <a:accent3>
+        <a:srgbClr val="A5A5A5"/>
+      </a:accent3>
+      <a:accent4>
+        <a:srgbClr val="FFC000"/>
+      </a:accent4>
+      <a:accent5>
+        <a:srgbClr val="5B9BD5"/>
+      </a:accent5>
+      <a:accent6>
+        <a:srgbClr val="70AD47"/>
+      </a:accent6>
+      <a:hlink>
+        <a:srgbClr val="0563C1"/>
+      </a:hlink>
+      <a:folHlink>
+        <a:srgbClr val="954F72"/>
+      </a:folHlink>
+    </a:clrScheme>
+    <a:fontScheme name="Office">
+      <a:majorFont>
+        <a:latin typeface="Calibri Light" panose="020F0302020204030204"/>
+        <a:ea typeface=""/>
+        <a:cs typeface=""/>
+        <a:font script="Jpan" typeface="游ゴシック Light"/>
+        <a:font script="Hang" typeface="맑은 고딕"/>
+        <a:font script="Hans" typeface="等线 Light"/>
+        <a:font script="Hant" typeface="新細明體"/>
+        <a:font script="Arab" typeface="Times New Roman"/>
+        <a:font script="Hebr" typeface="Times New Roman"/>
+        <a:font script="Thai" typeface="Angsana New"/>
+        <a:font script="Ethi" typeface="Nyala"/>
+        <a:font script="Beng" typeface="Vrinda"/>
+        <a:font script="Gujr" typeface="Shruti"/>
+        <a:font script="Khmr" typeface="MoolBoran"/>
+        <a:font script="Knda" typeface="Tunga"/>
+        <a:font script="Guru" typeface="Raavi"/>
+        <a:font script="Cans" typeface="Euphemia"/>
+        <a:font script="Cher" typeface="Plantagenet Cherokee"/>
+        <a:font script="Yiii" typeface="Microsoft Yi Baiti"/>
+        <a:font script="Tibt" typeface="Microsoft Himalaya"/>
+        <a:font script="Thaa" typeface="MV Boli"/>
+        <a:font script="Deva" typeface="Mangal"/>
+        <a:font script="Telu" typeface="Gautami"/>
+        <a:font script="Taml" typeface="Latha"/>
+        <a:font script="Syrc" typeface="Estrangelo Edessa"/>
+        <a:font script="Orya" typeface="Kalinga"/>
+        <a:font script="Mlym" typeface="Kartika"/>
+        <a:font script="Laoo" typeface="DokChampa"/>
+        <a:font script="Sinh" typeface="Iskoola Pota"/>
+        <a:font script="Mong" typeface="Mongolian Baiti"/>
+        <a:font script="Viet" typeface="Times New Roman"/>
+        <a:font script="Uigh" typeface="Microsoft Uighur"/>
+        <a:font script="Geor" typeface="Sylfaen"/>
+        <a:font script="Armn" typeface="Arial"/>
+        <a:font script="Bugi" typeface="Leelawadee UI"/>
+        <a:font script="Bopo" typeface="Microsoft JhengHei"/>
+        <a:font script="Java" typeface="Javanese Text"/>
+        <a:font script="Lisu" typeface="Segoe UI"/>
+        <a:font script="Mymr" typeface="Myanmar Text"/>
+        <a:font script="Nkoo" typeface="Ebrima"/>
+        <a:font script="Olck" typeface="Nirmala UI"/>
+        <a:font script="Osma" typeface="Ebrima"/>
+        <a:font script="Phag" typeface="Phagspa"/>
+        <a:font script="Syrn" typeface="Estrangelo Edessa"/>
+        <a:font script="Syrj" typeface="Estrangelo Edessa"/>
+        <a:font script="Syre" typeface="Estrangelo Edessa"/>
+        <a:font script="Sora" typeface="Nirmala UI"/>
+        <a:font script="Tale" typeface="Microsoft Tai Le"/>
+        <a:font script="Talu" typeface="Microsoft New Tai Lue"/>
+        <a:font script="Tfng" typeface="Ebrima"/>
+      </a:majorFont>
+      <a:minorFont>
+        <a:latin typeface="Calibri" panose="020F0502020204030204"/>
+        <a:ea typeface=""/>
+        <a:cs typeface=""/>
+        <a:font script="Jpan" typeface="游ゴシック"/>
+        <a:font script="Hang" typeface="맑은 고딕"/>
+        <a:font script="Hans" typeface="等线"/>
+        <a:font script="Hant" typeface="新細明體"/>
+        <a:font script="Arab" typeface="Arial"/>
+        <a:font script="Hebr" typeface="Arial"/>
+        <a:font script="Thai" typeface="Cordia New"/>
+        <a:font script="Ethi" typeface="Nyala"/>
+        <a:font script="Beng" typeface="Vrinda"/>
+        <a:font script="Gujr" typeface="Shruti"/>
+        <a:font script="Khmr" typeface="DaunPenh"/>
+        <a:font script="Knda" typeface="Tunga"/>
+        <a:font script="Guru" typeface="Raavi"/>
+        <a:font script="Cans" typeface="Euphemia"/>
+        <a:font script="Cher" typeface="Plantagenet Cherokee"/>
+        <a:font script="Yiii" typeface="Microsoft Yi Baiti"/>
+        <a:font script="Tibt" typeface="Microsoft Himalaya"/>
+        <a:font script="Thaa" typeface="MV Boli"/>
+        <a:font script="Deva" typeface="Mangal"/>
+        <a:font script="Telu" typeface="Gautami"/>
+        <a:font script="Taml" typeface="Latha"/>
+        <a:font script="Syrc" typeface="Estrangelo Edessa"/>
+        <a:font script="Orya" typeface="Kalinga"/>
+        <a:font script="Mlym" typeface="Kartika"/>
+        <a:font script="Laoo" typeface="DokChampa"/>
+        <a:font script="Sinh" typeface="Iskoola Pota"/>
+        <a:font script="Mong" typeface="Mongolian Baiti"/>
+        <a:font script="Viet" typeface="Arial"/>
+        <a:font script="Uigh" typeface="Microsoft Uighur"/>
+        <a:font script="Geor" typeface="Sylfaen"/>
+        <a:font script="Armn" typeface="Arial"/>
+        <a:font script="Bugi" typeface="Leelawadee UI"/>
+        <a:font script="Bopo" typeface="Microsoft JhengHei"/>
+        <a:font script="Java" typeface="Javanese Text"/>
+        <a:font script="Lisu" typeface="Segoe UI"/>
+        <a:font script="Mymr" typeface="Myanmar Text"/>
+        <a:font script="Nkoo" typeface="Ebrima"/>
+        <a:font script="Olck" typeface="Nirmala UI"/>
+        <a:font script="Osma" typeface="Ebrima"/>
+        <a:font script="Phag" typeface="Phagspa"/>
+        <a:font script="Syrn" typeface="Estrangelo Edessa"/>
+        <a:font script="Syrj" typeface="Estrangelo Edessa"/>
+        <a:font script="Syre" typeface="Estrangelo Edessa"/>
+        <a:font script="Sora" typeface="Nirmala UI"/>
+        <a:font script="Tale" typeface="Microsoft Tai Le"/>
+        <a:font script="Talu" typeface="Microsoft New Tai Lue"/>
+        <a:font script="Tfng" typeface="Ebrima"/>
+      </a:minorFont>
+    </a:fontScheme>
+    <a:fmtScheme name="Office">
+      <a:fillStyleLst>
+        <a:solidFill>
+          <a:schemeClr val="phClr"/>
+        </a:solidFill>
+        <a:gradFill rotWithShape="1">
+          <a:gsLst>
+            <a:gs pos="0">
+              <a:schemeClr val="phClr">
+                <a:lumMod val="110000"/>
+                <a:satMod val="105000"/>
+                <a:tint val="67000"/>
+              </a:schemeClr>
+            </a:gs>
+            <a:gs pos="50000">
+              <a:schemeClr val="phClr">
+                <a:lumMod val="105000"/>
+                <a:satMod val="103000"/>
+                <a:tint val="73000"/>
+              </a:schemeClr>
+            </a:gs>
+            <a:gs pos="100000">
+              <a:schemeClr val="phClr">
+                <a:lumMod val="105000"/>
+                <a:satMod val="109000"/>
+                <a:tint val="81000"/>
+              </a:schemeClr>
+            </a:gs>
+          </a:gsLst>
+          <a:lin ang="5400000" scaled="0"/>
+        </a:gradFill>
+        <a:gradFill rotWithShape="1">
+          <a:gsLst>
+            <a:gs pos="0">
+              <a:schemeClr val="phClr">
+                <a:satMod val="103000"/>
+                <a:lumMod val="102000"/>
+                <a:tint val="94000"/>
+              </a:schemeClr>
+            </a:gs>
+            <a:gs pos="50000">
+              <a:schemeClr val="phClr">
+                <a:satMod val="110000"/>
+                <a:lumMod val="100000"/>
+                <a:shade val="100000"/>
+              </a:schemeClr>
+            </a:gs>
+            <a:gs pos="100000">
+              <a:schemeClr val="phClr">
+                <a:lumMod val="99000"/>
+                <a:satMod val="120000"/>
+                <a:shade val="78000"/>
+              </a:schemeClr>
+            </a:gs>
+          </a:gsLst>
+          <a:lin ang="5400000" scaled="0"/>
+        </a:gradFill>
+      </a:fillStyleLst>
+      <a:lnStyleLst>
+        <a:ln w="6350" cap="flat" cmpd="sng" algn="ctr">
+          <a:solidFill>
+            <a:schemeClr val="phClr"/>
+          </a:solidFill>
+          <a:prstDash val="solid"/>
+          <a:miter lim="800000"/>
+        </a:ln>
+        <a:ln w="12700" cap="flat" cmpd="sng" algn="ctr">
+          <a:solidFill>
+            <a:schemeClr val="phClr"/>
+          </a:solidFill>
+          <a:prstDash val="solid"/>
+          <a:miter lim="800000"/>
+        </a:ln>
+        <a:ln w="19050" cap="flat" cmpd="sng" algn="ctr">
+          <a:solidFill>
+            <a:schemeClr val="phClr"/>
+          </a:solidFill>
+          <a:prstDash val="solid"/>
+          <a:miter lim="800000"/>
+        </a:ln>
+      </a:lnStyleLst>
+      <a:effectStyleLst>
+        <a:effectStyle>
+          <a:effectLst/>
+        </a:effectStyle>
+        <a:effectStyle>
+          <a:effectLst/>
+        </a:effectStyle>
+        <a:effectStyle>
+          <a:effectLst>
+            <a:outerShdw blurRad="57150" dist="19050" dir="5400000" algn="ctr" rotWithShape="0">
+              <a:srgbClr val="000000">
+                <a:alpha val="63000"/>
+              </a:srgbClr>
+            </a:outerShdw>
+          </a:effectLst>
+        </a:effectStyle>
+      </a:effectStyleLst>
+      <a:bgFillStyleLst>
+        <a:solidFill>
+          <a:schemeClr val="phClr"/>
+        </a:solidFill>
+        <a:solidFill>
+          <a:schemeClr val="phClr">
+            <a:tint val="95000"/>
+            <a:satMod val="170000"/>
+          </a:schemeClr>
+        </a:solidFill>
+        <a:gradFill rotWithShape="1">
+          <a:gsLst>
+            <a:gs pos="0">
+              <a:schemeClr val="phClr">
+                <a:tint val="93000"/>
+                <a:satMod val="150000"/>
+                <a:shade val="98000"/>
+                <a:lumMod val="102000"/>
+              </a:schemeClr>
+            </a:gs>
+            <a:gs pos="50000">
+              <a:schemeClr val="phClr">
+                <a:tint val="98000"/>
+                <a:satMod val="130000"/>
+                <a:shade val="90000"/>
+                <a:lumMod val="103000"/>
+              </a:schemeClr>
+            </a:gs>
+            <a:gs pos="100000">
+              <a:schemeClr val="phClr">
+                <a:shade val="63000"/>
+                <a:satMod val="120000"/>
+              </a:schemeClr>
+            </a:gs>
+          </a:gsLst>
+          <a:lin ang="5400000" scaled="0"/>
+        </a:gradFill>
+      </a:bgFillStyleLst>
+    </a:fmtScheme>
+  </a:themeElements>
+  <a:objectDefaults/>
+  <a:extraClrSchemeLst/>
+  <a:extLst>
+    <a:ext uri="{05A4C25C-085E-4340-85A3-A5531E510DB2}">
+      <thm15:themeFamily xmlns:thm15="http://schemas.microsoft.com/office/thememl/2012/main" name="Office Theme" id="{62F939B6-93AF-4DB8-9C6B-D6C7DFDC589F}" vid="{4A3C46E8-61CC-4603-A589-7422A47A8E4A}"/>
+    </a:ext>
+  </a:extLst>
+</a:theme>
 </file>